--- a/振り返りの重要性_指導講評_修正版.pptx
+++ b/振り返りの重要性_指導講評_修正版.pptx
@@ -6195,6 +6195,2667 @@
   <p:cSld>
     <p:spTree>
       <p:nvGrpSpPr>
+        <p:cNvPr id="1" name=""/>
+        <p:cNvGrpSpPr/>
+        <p:nvPr/>
+      </p:nvGrpSpPr>
+      <p:grpSpPr>
+        <a:xfrm>
+          <a:off x="0" y="0"/>
+          <a:ext cx="0" cy="0"/>
+          <a:chOff x="0" y="0"/>
+          <a:chExt cx="0" cy="0"/>
+        </a:xfrm>
+      </p:grpSpPr>
+      <p:sp>
+        <p:nvSpPr>
+          <p:cNvPr id="2" name="Rectangle 1"/>
+          <p:cNvSpPr/>
+          <p:nvPr/>
+        </p:nvSpPr>
+        <p:spPr>
+          <a:xfrm>
+            <a:off x="0" y="0"/>
+            <a:ext cx="12192119" cy="576000"/>
+          </a:xfrm>
+          <a:prstGeom prst="rect">
+            <a:avLst/>
+          </a:prstGeom>
+          <a:solidFill>
+            <a:srgbClr val="1F3864"/>
+          </a:solidFill>
+          <a:ln>
+            <a:noFill/>
+          </a:ln>
+        </p:spPr>
+        <p:style>
+          <a:lnRef idx="1">
+            <a:schemeClr val="accent1"/>
+          </a:lnRef>
+          <a:fillRef idx="3">
+            <a:schemeClr val="accent1"/>
+          </a:fillRef>
+          <a:effectRef idx="2">
+            <a:schemeClr val="accent1"/>
+          </a:effectRef>
+          <a:fontRef idx="minor">
+            <a:schemeClr val="lt1"/>
+          </a:fontRef>
+        </p:style>
+        <p:txBody>
+          <a:bodyPr rtlCol="0" anchor="ctr"/>
+          <a:lstStyle/>
+          <a:p>
+            <a:pPr algn="ctr"/>
+            <a:endParaRPr/>
+          </a:p>
+        </p:txBody>
+      </p:sp>
+      <p:sp>
+        <p:nvSpPr>
+          <p:cNvPr id="3" name="TextBox 2"/>
+          <p:cNvSpPr txBox="1"/>
+          <p:nvPr/>
+        </p:nvSpPr>
+        <p:spPr>
+          <a:xfrm>
+            <a:off x="180000" y="54000"/>
+            <a:ext cx="11832119" cy="468000"/>
+          </a:xfrm>
+          <a:prstGeom prst="rect">
+            <a:avLst/>
+          </a:prstGeom>
+          <a:noFill/>
+        </p:spPr>
+        <p:txBody>
+          <a:bodyPr wrap="none">
+            <a:spAutoFit/>
+          </a:bodyPr>
+          <a:lstStyle/>
+          <a:p>
+            <a:pPr algn="l"/>
+            <a:r>
+              <a:rPr sz="2400" b="1">
+                <a:solidFill>
+                  <a:srgbClr val="FFFFFF"/>
+                </a:solidFill>
+                <a:latin typeface="BIZ UDPGothic"/>
+              </a:rPr>
+              <a:t>H27「論点整理」の核心</a:t>
+            </a:r>
+          </a:p>
+        </p:txBody>
+      </p:sp>
+      <p:sp>
+        <p:nvSpPr>
+          <p:cNvPr id="4" name="TextBox 3"/>
+          <p:cNvSpPr txBox="1"/>
+          <p:nvPr/>
+        </p:nvSpPr>
+        <p:spPr>
+          <a:xfrm>
+            <a:off x="288000" y="720000"/>
+            <a:ext cx="11616119" cy="5418022"/>
+          </a:xfrm>
+          <a:prstGeom prst="rect">
+            <a:avLst/>
+          </a:prstGeom>
+          <a:noFill/>
+        </p:spPr>
+        <p:txBody>
+          <a:bodyPr wrap="square">
+            <a:spAutoFit/>
+          </a:bodyPr>
+          <a:lstStyle/>
+          <a:p>
+            <a:pPr algn="l">
+              <a:lnSpc>
+                <a:spcPts val="3500"/>
+              </a:lnSpc>
+            </a:pPr>
+            <a:r>
+              <a:rPr sz="2800" b="0" dirty="0">
+                <a:solidFill>
+                  <a:srgbClr val="333333"/>
+                </a:solidFill>
+                <a:latin typeface="BIZ UDPGothic"/>
+              </a:rPr>
+              <a:t>■ アクティブ・ラーニングの３つの視点</a:t>
+            </a:r>
+          </a:p>
+          <a:p>
+            <a:pPr algn="l">
+              <a:lnSpc>
+                <a:spcPts val="3500"/>
+              </a:lnSpc>
+            </a:pPr>
+            <a:endParaRPr sz="2800" b="0" dirty="0">
+              <a:solidFill>
+                <a:srgbClr val="333333"/>
+              </a:solidFill>
+              <a:latin typeface="BIZ UDPGothic"/>
+            </a:endParaRPr>
+          </a:p>
+          <a:p>
+            <a:pPr>
+              <a:lnSpc>
+                <a:spcPts val="3500"/>
+              </a:lnSpc>
+            </a:pPr>
+            <a:r>
+              <a:rPr lang="ja-JP" altLang="en-US" sz="2800" dirty="0">
+                <a:solidFill>
+                  <a:srgbClr val="333333"/>
+                </a:solidFill>
+                <a:latin typeface="メイリオ" panose="020B0604030504040204" pitchFamily="50" charset="-128"/>
+                <a:ea typeface="メイリオ" panose="020B0604030504040204" pitchFamily="50" charset="-128"/>
+              </a:rPr>
+              <a:t>　① 主体的な学び　←ここに「振り返り」が明記</a:t>
+            </a:r>
+          </a:p>
+          <a:p>
+            <a:pPr>
+              <a:lnSpc>
+                <a:spcPts val="3500"/>
+              </a:lnSpc>
+            </a:pPr>
+            <a:r>
+              <a:rPr lang="ja-JP" altLang="en-US" sz="2800" dirty="0">
+                <a:solidFill>
+                  <a:srgbClr val="333333"/>
+                </a:solidFill>
+                <a:latin typeface="メイリオ" panose="020B0604030504040204" pitchFamily="50" charset="-128"/>
+                <a:ea typeface="メイリオ" panose="020B0604030504040204" pitchFamily="50" charset="-128"/>
+              </a:rPr>
+              <a:t>　　→「学習を自己調整しながら学ぼうとする態度」</a:t>
+            </a:r>
+          </a:p>
+          <a:p>
+            <a:pPr algn="l">
+              <a:lnSpc>
+                <a:spcPts val="3500"/>
+              </a:lnSpc>
+            </a:pPr>
+            <a:r>
+              <a:rPr lang="ja-JP" altLang="en-US" sz="2800" dirty="0">
+                <a:solidFill>
+                  <a:srgbClr val="333333"/>
+                </a:solidFill>
+                <a:latin typeface="メイリオ" panose="020B0604030504040204" pitchFamily="50" charset="-128"/>
+                <a:ea typeface="メイリオ" panose="020B0604030504040204" pitchFamily="50" charset="-128"/>
+              </a:rPr>
+              <a:t>　</a:t>
+            </a:r>
+            <a:r>
+              <a:rPr sz="2800" b="0" dirty="0">
+                <a:solidFill>
+                  <a:srgbClr val="333333"/>
+                </a:solidFill>
+                <a:latin typeface="メイリオ" panose="020B0604030504040204" pitchFamily="50" charset="-128"/>
+                <a:ea typeface="メイリオ" panose="020B0604030504040204" pitchFamily="50" charset="-128"/>
+              </a:rPr>
+              <a:t>② </a:t>
+            </a:r>
+            <a:r>
+              <a:rPr sz="2800" b="0" dirty="0" err="1">
+                <a:solidFill>
+                  <a:srgbClr val="333333"/>
+                </a:solidFill>
+                <a:latin typeface="メイリオ" panose="020B0604030504040204" pitchFamily="50" charset="-128"/>
+                <a:ea typeface="メイリオ" panose="020B0604030504040204" pitchFamily="50" charset="-128"/>
+              </a:rPr>
+              <a:t>対話的な学び</a:t>
+            </a:r>
+            <a:endParaRPr sz="2800" b="0" dirty="0">
+              <a:solidFill>
+                <a:srgbClr val="333333"/>
+              </a:solidFill>
+              <a:latin typeface="メイリオ" panose="020B0604030504040204" pitchFamily="50" charset="-128"/>
+              <a:ea typeface="メイリオ" panose="020B0604030504040204" pitchFamily="50" charset="-128"/>
+            </a:endParaRPr>
+          </a:p>
+          <a:p>
+            <a:pPr algn="l">
+              <a:lnSpc>
+                <a:spcPts val="3500"/>
+              </a:lnSpc>
+            </a:pPr>
+            <a:r>
+              <a:rPr sz="2800" b="0" dirty="0">
+                <a:solidFill>
+                  <a:srgbClr val="333333"/>
+                </a:solidFill>
+                <a:latin typeface="メイリオ" panose="020B0604030504040204" pitchFamily="50" charset="-128"/>
+                <a:ea typeface="メイリオ" panose="020B0604030504040204" pitchFamily="50" charset="-128"/>
+              </a:rPr>
+              <a:t>　　→ </a:t>
+            </a:r>
+            <a:r>
+              <a:rPr sz="2800" b="0" dirty="0" err="1">
+                <a:solidFill>
+                  <a:srgbClr val="333333"/>
+                </a:solidFill>
+                <a:latin typeface="メイリオ" panose="020B0604030504040204" pitchFamily="50" charset="-128"/>
+                <a:ea typeface="メイリオ" panose="020B0604030504040204" pitchFamily="50" charset="-128"/>
+              </a:rPr>
+              <a:t>他者との協働・対話を通じた思考の広がり</a:t>
+            </a:r>
+            <a:endParaRPr lang="en-US" sz="2800" b="0" dirty="0">
+              <a:solidFill>
+                <a:srgbClr val="333333"/>
+              </a:solidFill>
+              <a:latin typeface="メイリオ" panose="020B0604030504040204" pitchFamily="50" charset="-128"/>
+              <a:ea typeface="メイリオ" panose="020B0604030504040204" pitchFamily="50" charset="-128"/>
+            </a:endParaRPr>
+          </a:p>
+          <a:p>
+            <a:pPr>
+              <a:lnSpc>
+                <a:spcPts val="3500"/>
+              </a:lnSpc>
+            </a:pPr>
+            <a:r>
+              <a:rPr lang="ja-JP" altLang="en-US" sz="2800" dirty="0">
+                <a:solidFill>
+                  <a:srgbClr val="333333"/>
+                </a:solidFill>
+                <a:latin typeface="メイリオ" panose="020B0604030504040204" pitchFamily="50" charset="-128"/>
+                <a:ea typeface="メイリオ" panose="020B0604030504040204" pitchFamily="50" charset="-128"/>
+              </a:rPr>
+              <a:t>　③ 深い学び</a:t>
+            </a:r>
+          </a:p>
+          <a:p>
+            <a:pPr>
+              <a:lnSpc>
+                <a:spcPts val="3500"/>
+              </a:lnSpc>
+            </a:pPr>
+            <a:r>
+              <a:rPr lang="ja-JP" altLang="en-US" sz="2800" dirty="0">
+                <a:solidFill>
+                  <a:srgbClr val="333333"/>
+                </a:solidFill>
+                <a:latin typeface="メイリオ" panose="020B0604030504040204" pitchFamily="50" charset="-128"/>
+                <a:ea typeface="メイリオ" panose="020B0604030504040204" pitchFamily="50" charset="-128"/>
+              </a:rPr>
+              <a:t>　　→「見方・考え方」を働かせた習得・活用・探究</a:t>
+            </a:r>
+          </a:p>
+          <a:p>
+            <a:pPr algn="l">
+              <a:lnSpc>
+                <a:spcPts val="3500"/>
+              </a:lnSpc>
+            </a:pPr>
+            <a:endParaRPr sz="2800" b="0" dirty="0">
+              <a:solidFill>
+                <a:srgbClr val="333333"/>
+              </a:solidFill>
+              <a:latin typeface="メイリオ" panose="020B0604030504040204" pitchFamily="50" charset="-128"/>
+              <a:ea typeface="メイリオ" panose="020B0604030504040204" pitchFamily="50" charset="-128"/>
+            </a:endParaRPr>
+          </a:p>
+          <a:p>
+            <a:pPr algn="l">
+              <a:lnSpc>
+                <a:spcPts val="3500"/>
+              </a:lnSpc>
+            </a:pPr>
+            <a:r>
+              <a:rPr sz="2800" b="0" dirty="0">
+                <a:solidFill>
+                  <a:srgbClr val="333333"/>
+                </a:solidFill>
+                <a:latin typeface="メイリオ" panose="020B0604030504040204" pitchFamily="50" charset="-128"/>
+                <a:ea typeface="メイリオ" panose="020B0604030504040204" pitchFamily="50" charset="-128"/>
+              </a:rPr>
+              <a:t>　</a:t>
+            </a:r>
+            <a:endParaRPr lang="ja-JP" altLang="en-US" sz="2800" b="0" dirty="0">
+              <a:solidFill>
+                <a:srgbClr val="333333"/>
+              </a:solidFill>
+              <a:latin typeface="BIZ UDPGothic"/>
+            </a:endParaRPr>
+          </a:p>
+          <a:p>
+            <a:pPr algn="l">
+              <a:lnSpc>
+                <a:spcPts val="3500"/>
+              </a:lnSpc>
+            </a:pPr>
+            <a:r>
+              <a:rPr sz="2800" b="0" dirty="0">
+                <a:solidFill>
+                  <a:srgbClr val="333333"/>
+                </a:solidFill>
+                <a:latin typeface="BIZ UDPGothic"/>
+              </a:rPr>
+              <a:t>■ </a:t>
+            </a:r>
+            <a:r>
+              <a:rPr sz="2800" b="0" dirty="0" err="1">
+                <a:solidFill>
+                  <a:srgbClr val="333333"/>
+                </a:solidFill>
+                <a:latin typeface="BIZ UDPGothic"/>
+              </a:rPr>
+              <a:t>キーワード</a:t>
+            </a:r>
+            <a:r>
+              <a:rPr sz="2800" b="0" dirty="0">
+                <a:solidFill>
+                  <a:srgbClr val="333333"/>
+                </a:solidFill>
+                <a:latin typeface="BIZ UDPGothic"/>
+              </a:rPr>
+              <a:t>：「</a:t>
+            </a:r>
+            <a:r>
+              <a:rPr sz="2800" b="0" dirty="0" err="1">
+                <a:solidFill>
+                  <a:srgbClr val="333333"/>
+                </a:solidFill>
+                <a:latin typeface="BIZ UDPGothic"/>
+              </a:rPr>
+              <a:t>自己調整</a:t>
+            </a:r>
+            <a:r>
+              <a:rPr sz="2800" b="0" dirty="0">
+                <a:solidFill>
+                  <a:srgbClr val="333333"/>
+                </a:solidFill>
+                <a:latin typeface="BIZ UDPGothic"/>
+              </a:rPr>
+              <a:t>」</a:t>
+            </a:r>
+          </a:p>
+          <a:p>
+            <a:pPr algn="l">
+              <a:lnSpc>
+                <a:spcPts val="3500"/>
+              </a:lnSpc>
+            </a:pPr>
+            <a:r>
+              <a:rPr sz="2800" b="0" dirty="0">
+                <a:solidFill>
+                  <a:srgbClr val="333333"/>
+                </a:solidFill>
+                <a:latin typeface="BIZ UDPGothic"/>
+              </a:rPr>
+              <a:t>　→ </a:t>
+            </a:r>
+            <a:r>
+              <a:rPr sz="2800" b="0" dirty="0" err="1">
+                <a:solidFill>
+                  <a:srgbClr val="333333"/>
+                </a:solidFill>
+                <a:latin typeface="BIZ UDPGothic"/>
+              </a:rPr>
+              <a:t>振り返りなしに、自己調整は生まれない</a:t>
+            </a:r>
+            <a:endParaRPr sz="1700" b="0" dirty="0">
+              <a:solidFill>
+                <a:srgbClr val="333333"/>
+              </a:solidFill>
+              <a:latin typeface="BIZ UDPGothic"/>
+            </a:endParaRPr>
+          </a:p>
+        </p:txBody>
+      </p:sp>
+      <p:sp>
+        <p:nvSpPr>
+          <p:cNvPr id="5" name="TextBox 4"/>
+          <p:cNvSpPr txBox="1"/>
+          <p:nvPr/>
+        </p:nvSpPr>
+        <p:spPr>
+          <a:xfrm>
+            <a:off x="11292119" y="6570000"/>
+            <a:ext cx="720000" cy="216000"/>
+          </a:xfrm>
+          <a:prstGeom prst="rect">
+            <a:avLst/>
+          </a:prstGeom>
+          <a:noFill/>
+        </p:spPr>
+        <p:txBody>
+          <a:bodyPr wrap="none">
+            <a:spAutoFit/>
+          </a:bodyPr>
+          <a:lstStyle/>
+          <a:p>
+            <a:pPr algn="r"/>
+            <a:r>
+              <a:rPr sz="1000">
+                <a:solidFill>
+                  <a:srgbClr val="999999"/>
+                </a:solidFill>
+                <a:latin typeface="BIZ UDPGothic"/>
+              </a:rPr>
+              <a:t>10 / 20</a:t>
+            </a:r>
+          </a:p>
+        </p:txBody>
+      </p:sp>
+    </p:spTree>
+  </p:cSld>
+  <p:clrMapOvr>
+    <a:masterClrMapping/>
+  </p:clrMapOvr>
+</p:sld>
+</file>
+
+<file path=ppt/slides/slide11.xml><?xml version="1.0" encoding="utf-8"?>
+<p:sld xmlns:a="http://schemas.openxmlformats.org/drawingml/2006/main" xmlns:r="http://schemas.openxmlformats.org/officeDocument/2006/relationships" xmlns:p="http://schemas.openxmlformats.org/presentationml/2006/main">
+  <p:cSld>
+    <p:spTree>
+      <p:nvGrpSpPr>
+        <p:cNvPr id="1" name=""/>
+        <p:cNvGrpSpPr/>
+        <p:nvPr/>
+      </p:nvGrpSpPr>
+      <p:grpSpPr>
+        <a:xfrm>
+          <a:off x="0" y="0"/>
+          <a:ext cx="0" cy="0"/>
+          <a:chOff x="0" y="0"/>
+          <a:chExt cx="0" cy="0"/>
+        </a:xfrm>
+      </p:grpSpPr>
+      <p:sp>
+        <p:nvSpPr>
+          <p:cNvPr id="2" name="Rectangle 1"/>
+          <p:cNvSpPr/>
+          <p:nvPr/>
+        </p:nvSpPr>
+        <p:spPr>
+          <a:xfrm>
+            <a:off x="0" y="0"/>
+            <a:ext cx="12192119" cy="576000"/>
+          </a:xfrm>
+          <a:prstGeom prst="rect">
+            <a:avLst/>
+          </a:prstGeom>
+          <a:solidFill>
+            <a:srgbClr val="1F3864"/>
+          </a:solidFill>
+          <a:ln>
+            <a:noFill/>
+          </a:ln>
+        </p:spPr>
+        <p:style>
+          <a:lnRef idx="1">
+            <a:schemeClr val="accent1"/>
+          </a:lnRef>
+          <a:fillRef idx="3">
+            <a:schemeClr val="accent1"/>
+          </a:fillRef>
+          <a:effectRef idx="2">
+            <a:schemeClr val="accent1"/>
+          </a:effectRef>
+          <a:fontRef idx="minor">
+            <a:schemeClr val="lt1"/>
+          </a:fontRef>
+        </p:style>
+        <p:txBody>
+          <a:bodyPr rtlCol="0" anchor="ctr"/>
+          <a:lstStyle/>
+          <a:p>
+            <a:pPr algn="ctr"/>
+            <a:endParaRPr/>
+          </a:p>
+        </p:txBody>
+      </p:sp>
+      <p:sp>
+        <p:nvSpPr>
+          <p:cNvPr id="3" name="TextBox 2"/>
+          <p:cNvSpPr txBox="1"/>
+          <p:nvPr/>
+        </p:nvSpPr>
+        <p:spPr>
+          <a:xfrm>
+            <a:off x="180000" y="54000"/>
+            <a:ext cx="11832119" cy="468000"/>
+          </a:xfrm>
+          <a:prstGeom prst="rect">
+            <a:avLst/>
+          </a:prstGeom>
+          <a:noFill/>
+        </p:spPr>
+        <p:txBody>
+          <a:bodyPr wrap="none">
+            <a:spAutoFit/>
+          </a:bodyPr>
+          <a:lstStyle/>
+          <a:p>
+            <a:pPr algn="l"/>
+            <a:r>
+              <a:rPr sz="2400" b="1">
+                <a:solidFill>
+                  <a:srgbClr val="FFFFFF"/>
+                </a:solidFill>
+                <a:latin typeface="BIZ UDPGothic"/>
+              </a:rPr>
+              <a:t>R7「論点整理」が示す新たな強調点</a:t>
+            </a:r>
+          </a:p>
+        </p:txBody>
+      </p:sp>
+      <p:sp>
+        <p:nvSpPr>
+          <p:cNvPr id="4" name="TextBox 3"/>
+          <p:cNvSpPr txBox="1"/>
+          <p:nvPr/>
+        </p:nvSpPr>
+        <p:spPr>
+          <a:xfrm>
+            <a:off x="288000" y="720000"/>
+            <a:ext cx="11616119" cy="5880456"/>
+          </a:xfrm>
+          <a:prstGeom prst="rect">
+            <a:avLst/>
+          </a:prstGeom>
+          <a:noFill/>
+        </p:spPr>
+        <p:txBody>
+          <a:bodyPr wrap="square">
+            <a:spAutoFit/>
+          </a:bodyPr>
+          <a:lstStyle/>
+          <a:p>
+            <a:pPr algn="l">
+              <a:lnSpc>
+                <a:spcPts val="3500"/>
+              </a:lnSpc>
+            </a:pPr>
+            <a:r>
+              <a:rPr sz="2800" b="0" dirty="0">
+                <a:solidFill>
+                  <a:srgbClr val="333333"/>
+                </a:solidFill>
+                <a:latin typeface="メイリオ" panose="020B0604030504040204" pitchFamily="50" charset="-128"/>
+                <a:ea typeface="メイリオ" panose="020B0604030504040204" pitchFamily="50" charset="-128"/>
+              </a:rPr>
+              <a:t>■ </a:t>
+            </a:r>
+            <a:r>
+              <a:rPr sz="2800" b="0" dirty="0" err="1">
+                <a:solidFill>
+                  <a:srgbClr val="333333"/>
+                </a:solidFill>
+                <a:latin typeface="メイリオ" panose="020B0604030504040204" pitchFamily="50" charset="-128"/>
+                <a:ea typeface="メイリオ" panose="020B0604030504040204" pitchFamily="50" charset="-128"/>
+              </a:rPr>
+              <a:t>自己調整学習のさらなる重視</a:t>
+            </a:r>
+            <a:endParaRPr sz="2800" b="0" dirty="0">
+              <a:solidFill>
+                <a:srgbClr val="333333"/>
+              </a:solidFill>
+              <a:latin typeface="メイリオ" panose="020B0604030504040204" pitchFamily="50" charset="-128"/>
+              <a:ea typeface="メイリオ" panose="020B0604030504040204" pitchFamily="50" charset="-128"/>
+            </a:endParaRPr>
+          </a:p>
+          <a:p>
+            <a:pPr algn="l">
+              <a:lnSpc>
+                <a:spcPts val="3500"/>
+              </a:lnSpc>
+            </a:pPr>
+            <a:r>
+              <a:rPr sz="2800" b="0" dirty="0">
+                <a:solidFill>
+                  <a:srgbClr val="333333"/>
+                </a:solidFill>
+                <a:latin typeface="メイリオ" panose="020B0604030504040204" pitchFamily="50" charset="-128"/>
+                <a:ea typeface="メイリオ" panose="020B0604030504040204" pitchFamily="50" charset="-128"/>
+              </a:rPr>
+              <a:t>　「</a:t>
+            </a:r>
+            <a:r>
+              <a:rPr sz="2800" b="0" dirty="0" err="1">
+                <a:solidFill>
+                  <a:srgbClr val="333333"/>
+                </a:solidFill>
+                <a:latin typeface="メイリオ" panose="020B0604030504040204" pitchFamily="50" charset="-128"/>
+                <a:ea typeface="メイリオ" panose="020B0604030504040204" pitchFamily="50" charset="-128"/>
+              </a:rPr>
+              <a:t>見通し</a:t>
+            </a:r>
+            <a:r>
+              <a:rPr sz="2800" b="0" dirty="0">
+                <a:solidFill>
+                  <a:srgbClr val="333333"/>
+                </a:solidFill>
+                <a:latin typeface="メイリオ" panose="020B0604030504040204" pitchFamily="50" charset="-128"/>
+                <a:ea typeface="メイリオ" panose="020B0604030504040204" pitchFamily="50" charset="-128"/>
+              </a:rPr>
+              <a:t> → </a:t>
+            </a:r>
+            <a:r>
+              <a:rPr sz="2800" b="0" dirty="0" err="1">
+                <a:solidFill>
+                  <a:srgbClr val="333333"/>
+                </a:solidFill>
+                <a:latin typeface="メイリオ" panose="020B0604030504040204" pitchFamily="50" charset="-128"/>
+                <a:ea typeface="メイリオ" panose="020B0604030504040204" pitchFamily="50" charset="-128"/>
+              </a:rPr>
+              <a:t>学習</a:t>
+            </a:r>
+            <a:r>
+              <a:rPr sz="2800" b="0" dirty="0">
+                <a:solidFill>
+                  <a:srgbClr val="333333"/>
+                </a:solidFill>
+                <a:latin typeface="メイリオ" panose="020B0604030504040204" pitchFamily="50" charset="-128"/>
+                <a:ea typeface="メイリオ" panose="020B0604030504040204" pitchFamily="50" charset="-128"/>
+              </a:rPr>
+              <a:t> → </a:t>
+            </a:r>
+            <a:r>
+              <a:rPr sz="2800" b="0" dirty="0" err="1">
+                <a:solidFill>
+                  <a:srgbClr val="333333"/>
+                </a:solidFill>
+                <a:latin typeface="メイリオ" panose="020B0604030504040204" pitchFamily="50" charset="-128"/>
+                <a:ea typeface="メイリオ" panose="020B0604030504040204" pitchFamily="50" charset="-128"/>
+              </a:rPr>
+              <a:t>振り返り」の往還を</a:t>
+            </a:r>
+            <a:endParaRPr sz="2800" b="0" dirty="0">
+              <a:solidFill>
+                <a:srgbClr val="333333"/>
+              </a:solidFill>
+              <a:latin typeface="メイリオ" panose="020B0604030504040204" pitchFamily="50" charset="-128"/>
+              <a:ea typeface="メイリオ" panose="020B0604030504040204" pitchFamily="50" charset="-128"/>
+            </a:endParaRPr>
+          </a:p>
+          <a:p>
+            <a:pPr algn="l">
+              <a:lnSpc>
+                <a:spcPts val="3500"/>
+              </a:lnSpc>
+            </a:pPr>
+            <a:r>
+              <a:rPr sz="2800" b="0" dirty="0">
+                <a:solidFill>
+                  <a:srgbClr val="333333"/>
+                </a:solidFill>
+                <a:latin typeface="メイリオ" panose="020B0604030504040204" pitchFamily="50" charset="-128"/>
+                <a:ea typeface="メイリオ" panose="020B0604030504040204" pitchFamily="50" charset="-128"/>
+              </a:rPr>
+              <a:t>　</a:t>
+            </a:r>
+            <a:r>
+              <a:rPr sz="2800" b="0" dirty="0" err="1">
+                <a:solidFill>
+                  <a:srgbClr val="333333"/>
+                </a:solidFill>
+                <a:latin typeface="メイリオ" panose="020B0604030504040204" pitchFamily="50" charset="-128"/>
+                <a:ea typeface="メイリオ" panose="020B0604030504040204" pitchFamily="50" charset="-128"/>
+              </a:rPr>
+              <a:t>すべての教科・場面で意図的に位置づける</a:t>
+            </a:r>
+            <a:endParaRPr sz="2800" b="0" dirty="0">
+              <a:solidFill>
+                <a:srgbClr val="333333"/>
+              </a:solidFill>
+              <a:latin typeface="メイリオ" panose="020B0604030504040204" pitchFamily="50" charset="-128"/>
+              <a:ea typeface="メイリオ" panose="020B0604030504040204" pitchFamily="50" charset="-128"/>
+            </a:endParaRPr>
+          </a:p>
+          <a:p>
+            <a:pPr algn="l">
+              <a:lnSpc>
+                <a:spcPts val="3500"/>
+              </a:lnSpc>
+            </a:pPr>
+            <a:endParaRPr sz="2800" b="0" dirty="0">
+              <a:solidFill>
+                <a:srgbClr val="333333"/>
+              </a:solidFill>
+              <a:latin typeface="メイリオ" panose="020B0604030504040204" pitchFamily="50" charset="-128"/>
+              <a:ea typeface="メイリオ" panose="020B0604030504040204" pitchFamily="50" charset="-128"/>
+            </a:endParaRPr>
+          </a:p>
+          <a:p>
+            <a:pPr algn="l">
+              <a:lnSpc>
+                <a:spcPts val="3500"/>
+              </a:lnSpc>
+            </a:pPr>
+            <a:r>
+              <a:rPr sz="2800" b="0" dirty="0">
+                <a:solidFill>
+                  <a:srgbClr val="333333"/>
+                </a:solidFill>
+                <a:latin typeface="メイリオ" panose="020B0604030504040204" pitchFamily="50" charset="-128"/>
+                <a:ea typeface="メイリオ" panose="020B0604030504040204" pitchFamily="50" charset="-128"/>
+              </a:rPr>
+              <a:t>■ </a:t>
+            </a:r>
+            <a:r>
+              <a:rPr sz="2800" b="0" dirty="0" err="1">
+                <a:solidFill>
+                  <a:srgbClr val="333333"/>
+                </a:solidFill>
+                <a:latin typeface="メイリオ" panose="020B0604030504040204" pitchFamily="50" charset="-128"/>
+                <a:ea typeface="メイリオ" panose="020B0604030504040204" pitchFamily="50" charset="-128"/>
+              </a:rPr>
+              <a:t>ウェルビーイングとの接続</a:t>
+            </a:r>
+            <a:endParaRPr sz="2800" b="0" dirty="0">
+              <a:solidFill>
+                <a:srgbClr val="333333"/>
+              </a:solidFill>
+              <a:latin typeface="メイリオ" panose="020B0604030504040204" pitchFamily="50" charset="-128"/>
+              <a:ea typeface="メイリオ" panose="020B0604030504040204" pitchFamily="50" charset="-128"/>
+            </a:endParaRPr>
+          </a:p>
+          <a:p>
+            <a:pPr algn="l">
+              <a:lnSpc>
+                <a:spcPts val="3500"/>
+              </a:lnSpc>
+            </a:pPr>
+            <a:r>
+              <a:rPr sz="2800" b="0" dirty="0">
+                <a:solidFill>
+                  <a:srgbClr val="333333"/>
+                </a:solidFill>
+                <a:latin typeface="メイリオ" panose="020B0604030504040204" pitchFamily="50" charset="-128"/>
+                <a:ea typeface="メイリオ" panose="020B0604030504040204" pitchFamily="50" charset="-128"/>
+              </a:rPr>
+              <a:t>　</a:t>
+            </a:r>
+            <a:r>
+              <a:rPr sz="2800" b="0" dirty="0" err="1">
+                <a:solidFill>
+                  <a:srgbClr val="333333"/>
+                </a:solidFill>
+                <a:latin typeface="メイリオ" panose="020B0604030504040204" pitchFamily="50" charset="-128"/>
+                <a:ea typeface="メイリオ" panose="020B0604030504040204" pitchFamily="50" charset="-128"/>
+              </a:rPr>
+              <a:t>振り返りが「学びへの自信・有能感」を育む</a:t>
+            </a:r>
+            <a:endParaRPr sz="2800" b="0" dirty="0">
+              <a:solidFill>
+                <a:srgbClr val="333333"/>
+              </a:solidFill>
+              <a:latin typeface="メイリオ" panose="020B0604030504040204" pitchFamily="50" charset="-128"/>
+              <a:ea typeface="メイリオ" panose="020B0604030504040204" pitchFamily="50" charset="-128"/>
+            </a:endParaRPr>
+          </a:p>
+          <a:p>
+            <a:pPr algn="l">
+              <a:lnSpc>
+                <a:spcPts val="3500"/>
+              </a:lnSpc>
+            </a:pPr>
+            <a:r>
+              <a:rPr sz="2800" b="0" dirty="0">
+                <a:solidFill>
+                  <a:srgbClr val="333333"/>
+                </a:solidFill>
+                <a:latin typeface="メイリオ" panose="020B0604030504040204" pitchFamily="50" charset="-128"/>
+                <a:ea typeface="メイリオ" panose="020B0604030504040204" pitchFamily="50" charset="-128"/>
+              </a:rPr>
+              <a:t>　→ </a:t>
+            </a:r>
+            <a:r>
+              <a:rPr sz="2800" b="0" dirty="0" err="1">
+                <a:solidFill>
+                  <a:srgbClr val="333333"/>
+                </a:solidFill>
+                <a:latin typeface="メイリオ" panose="020B0604030504040204" pitchFamily="50" charset="-128"/>
+                <a:ea typeface="メイリオ" panose="020B0604030504040204" pitchFamily="50" charset="-128"/>
+              </a:rPr>
+              <a:t>学ぶことが楽しい、という実感へ</a:t>
+            </a:r>
+            <a:endParaRPr sz="2800" b="0" dirty="0">
+              <a:solidFill>
+                <a:srgbClr val="333333"/>
+              </a:solidFill>
+              <a:latin typeface="メイリオ" panose="020B0604030504040204" pitchFamily="50" charset="-128"/>
+              <a:ea typeface="メイリオ" panose="020B0604030504040204" pitchFamily="50" charset="-128"/>
+            </a:endParaRPr>
+          </a:p>
+          <a:p>
+            <a:pPr algn="l">
+              <a:lnSpc>
+                <a:spcPts val="3500"/>
+              </a:lnSpc>
+            </a:pPr>
+            <a:endParaRPr sz="2800" b="0" dirty="0">
+              <a:solidFill>
+                <a:srgbClr val="333333"/>
+              </a:solidFill>
+              <a:latin typeface="メイリオ" panose="020B0604030504040204" pitchFamily="50" charset="-128"/>
+              <a:ea typeface="メイリオ" panose="020B0604030504040204" pitchFamily="50" charset="-128"/>
+            </a:endParaRPr>
+          </a:p>
+          <a:p>
+            <a:pPr algn="l">
+              <a:lnSpc>
+                <a:spcPts val="3500"/>
+              </a:lnSpc>
+            </a:pPr>
+            <a:r>
+              <a:rPr sz="2800" b="0" dirty="0">
+                <a:solidFill>
+                  <a:srgbClr val="333333"/>
+                </a:solidFill>
+                <a:latin typeface="メイリオ" panose="020B0604030504040204" pitchFamily="50" charset="-128"/>
+                <a:ea typeface="メイリオ" panose="020B0604030504040204" pitchFamily="50" charset="-128"/>
+              </a:rPr>
+              <a:t>■ </a:t>
+            </a:r>
+            <a:r>
+              <a:rPr sz="2800" b="0" dirty="0" err="1">
+                <a:solidFill>
+                  <a:srgbClr val="333333"/>
+                </a:solidFill>
+                <a:latin typeface="メイリオ" panose="020B0604030504040204" pitchFamily="50" charset="-128"/>
+                <a:ea typeface="メイリオ" panose="020B0604030504040204" pitchFamily="50" charset="-128"/>
+              </a:rPr>
+              <a:t>デジタルを活用した振り返りの蓄積</a:t>
+            </a:r>
+            <a:endParaRPr sz="2800" b="0" dirty="0">
+              <a:solidFill>
+                <a:srgbClr val="333333"/>
+              </a:solidFill>
+              <a:latin typeface="メイリオ" panose="020B0604030504040204" pitchFamily="50" charset="-128"/>
+              <a:ea typeface="メイリオ" panose="020B0604030504040204" pitchFamily="50" charset="-128"/>
+            </a:endParaRPr>
+          </a:p>
+          <a:p>
+            <a:pPr algn="l">
+              <a:lnSpc>
+                <a:spcPts val="3500"/>
+              </a:lnSpc>
+            </a:pPr>
+            <a:r>
+              <a:rPr sz="2800" b="0" dirty="0">
+                <a:solidFill>
+                  <a:srgbClr val="333333"/>
+                </a:solidFill>
+                <a:latin typeface="メイリオ" panose="020B0604030504040204" pitchFamily="50" charset="-128"/>
+                <a:ea typeface="メイリオ" panose="020B0604030504040204" pitchFamily="50" charset="-128"/>
+              </a:rPr>
+              <a:t>　１人１台端末を活用し、振り返りを「見える化」</a:t>
+            </a:r>
+          </a:p>
+          <a:p>
+            <a:pPr algn="l">
+              <a:lnSpc>
+                <a:spcPts val="3500"/>
+              </a:lnSpc>
+            </a:pPr>
+            <a:r>
+              <a:rPr sz="2800" b="0" dirty="0">
+                <a:solidFill>
+                  <a:srgbClr val="333333"/>
+                </a:solidFill>
+                <a:latin typeface="メイリオ" panose="020B0604030504040204" pitchFamily="50" charset="-128"/>
+                <a:ea typeface="メイリオ" panose="020B0604030504040204" pitchFamily="50" charset="-128"/>
+              </a:rPr>
+              <a:t>　→ </a:t>
+            </a:r>
+            <a:r>
+              <a:rPr sz="2800" b="0" dirty="0" err="1">
+                <a:solidFill>
+                  <a:srgbClr val="333333"/>
+                </a:solidFill>
+                <a:latin typeface="メイリオ" panose="020B0604030504040204" pitchFamily="50" charset="-128"/>
+                <a:ea typeface="メイリオ" panose="020B0604030504040204" pitchFamily="50" charset="-128"/>
+              </a:rPr>
+              <a:t>学習履歴として蓄積・次の学びへ接続</a:t>
+            </a:r>
+            <a:endParaRPr sz="2800" b="0" dirty="0">
+              <a:solidFill>
+                <a:srgbClr val="333333"/>
+              </a:solidFill>
+              <a:latin typeface="メイリオ" panose="020B0604030504040204" pitchFamily="50" charset="-128"/>
+              <a:ea typeface="メイリオ" panose="020B0604030504040204" pitchFamily="50" charset="-128"/>
+            </a:endParaRPr>
+          </a:p>
+          <a:p>
+            <a:pPr algn="l">
+              <a:lnSpc>
+                <a:spcPts val="3500"/>
+              </a:lnSpc>
+            </a:pPr>
+            <a:endParaRPr sz="2800" b="0" dirty="0">
+              <a:solidFill>
+                <a:srgbClr val="333333"/>
+              </a:solidFill>
+              <a:latin typeface="メイリオ" panose="020B0604030504040204" pitchFamily="50" charset="-128"/>
+              <a:ea typeface="メイリオ" panose="020B0604030504040204" pitchFamily="50" charset="-128"/>
+            </a:endParaRPr>
+          </a:p>
+          <a:p>
+            <a:pPr algn="l">
+              <a:lnSpc>
+                <a:spcPts val="3500"/>
+              </a:lnSpc>
+            </a:pPr>
+            <a:r>
+              <a:rPr sz="2800" b="0" dirty="0">
+                <a:solidFill>
+                  <a:srgbClr val="333333"/>
+                </a:solidFill>
+                <a:latin typeface="メイリオ" panose="020B0604030504040204" pitchFamily="50" charset="-128"/>
+                <a:ea typeface="メイリオ" panose="020B0604030504040204" pitchFamily="50" charset="-128"/>
+              </a:rPr>
+              <a:t>■ H27から10年。振り返りの重要性はより深化している。</a:t>
+            </a:r>
+          </a:p>
+        </p:txBody>
+      </p:sp>
+      <p:sp>
+        <p:nvSpPr>
+          <p:cNvPr id="5" name="TextBox 4"/>
+          <p:cNvSpPr txBox="1"/>
+          <p:nvPr/>
+        </p:nvSpPr>
+        <p:spPr>
+          <a:xfrm>
+            <a:off x="11292119" y="6570000"/>
+            <a:ext cx="720000" cy="216000"/>
+          </a:xfrm>
+          <a:prstGeom prst="rect">
+            <a:avLst/>
+          </a:prstGeom>
+          <a:noFill/>
+        </p:spPr>
+        <p:txBody>
+          <a:bodyPr wrap="none">
+            <a:spAutoFit/>
+          </a:bodyPr>
+          <a:lstStyle/>
+          <a:p>
+            <a:pPr algn="r"/>
+            <a:r>
+              <a:rPr sz="1000">
+                <a:solidFill>
+                  <a:srgbClr val="999999"/>
+                </a:solidFill>
+                <a:latin typeface="BIZ UDPGothic"/>
+              </a:rPr>
+              <a:t>13 / 20</a:t>
+            </a:r>
+          </a:p>
+        </p:txBody>
+      </p:sp>
+    </p:spTree>
+  </p:cSld>
+  <p:clrMapOvr>
+    <a:masterClrMapping/>
+  </p:clrMapOvr>
+</p:sld>
+</file>
+
+<file path=ppt/slides/slide12.xml><?xml version="1.0" encoding="utf-8"?>
+<p:sld xmlns:a="http://schemas.openxmlformats.org/drawingml/2006/main" xmlns:r="http://schemas.openxmlformats.org/officeDocument/2006/relationships" xmlns:p="http://schemas.openxmlformats.org/presentationml/2006/main">
+  <p:cSld>
+    <p:spTree>
+      <p:nvGrpSpPr>
+        <p:cNvPr id="1" name=""/>
+        <p:cNvGrpSpPr/>
+        <p:nvPr/>
+      </p:nvGrpSpPr>
+      <p:grpSpPr>
+        <a:xfrm>
+          <a:off x="0" y="0"/>
+          <a:ext cx="0" cy="0"/>
+          <a:chOff x="0" y="0"/>
+          <a:chExt cx="0" cy="0"/>
+        </a:xfrm>
+      </p:grpSpPr>
+      <p:sp>
+        <p:nvSpPr>
+          <p:cNvPr id="2" name="Rectangle 1"/>
+          <p:cNvSpPr/>
+          <p:nvPr/>
+        </p:nvSpPr>
+        <p:spPr>
+          <a:xfrm>
+            <a:off x="0" y="0"/>
+            <a:ext cx="12192119" cy="576000"/>
+          </a:xfrm>
+          <a:prstGeom prst="rect">
+            <a:avLst/>
+          </a:prstGeom>
+          <a:solidFill>
+            <a:srgbClr val="1F3864"/>
+          </a:solidFill>
+          <a:ln>
+            <a:noFill/>
+          </a:ln>
+        </p:spPr>
+        <p:style>
+          <a:lnRef idx="1">
+            <a:schemeClr val="accent1"/>
+          </a:lnRef>
+          <a:fillRef idx="3">
+            <a:schemeClr val="accent1"/>
+          </a:fillRef>
+          <a:effectRef idx="2">
+            <a:schemeClr val="accent1"/>
+          </a:effectRef>
+          <a:fontRef idx="minor">
+            <a:schemeClr val="lt1"/>
+          </a:fontRef>
+        </p:style>
+        <p:txBody>
+          <a:bodyPr rtlCol="0" anchor="ctr"/>
+          <a:lstStyle/>
+          <a:p>
+            <a:pPr algn="ctr"/>
+            <a:endParaRPr/>
+          </a:p>
+        </p:txBody>
+      </p:sp>
+      <p:sp>
+        <p:nvSpPr>
+          <p:cNvPr id="3" name="TextBox 2"/>
+          <p:cNvSpPr txBox="1"/>
+          <p:nvPr/>
+        </p:nvSpPr>
+        <p:spPr>
+          <a:xfrm>
+            <a:off x="180000" y="54000"/>
+            <a:ext cx="11832119" cy="468000"/>
+          </a:xfrm>
+          <a:prstGeom prst="rect">
+            <a:avLst/>
+          </a:prstGeom>
+          <a:noFill/>
+        </p:spPr>
+        <p:txBody>
+          <a:bodyPr wrap="none">
+            <a:spAutoFit/>
+          </a:bodyPr>
+          <a:lstStyle/>
+          <a:p>
+            <a:pPr algn="l"/>
+            <a:r>
+              <a:rPr sz="2400" b="1">
+                <a:solidFill>
+                  <a:srgbClr val="FFFFFF"/>
+                </a:solidFill>
+                <a:latin typeface="BIZ UDPGothic"/>
+              </a:rPr>
+              <a:t>学習指導要領（H29）における「振り返り」</a:t>
+            </a:r>
+          </a:p>
+        </p:txBody>
+      </p:sp>
+      <p:sp>
+        <p:nvSpPr>
+          <p:cNvPr id="4" name="TextBox 3"/>
+          <p:cNvSpPr txBox="1"/>
+          <p:nvPr/>
+        </p:nvSpPr>
+        <p:spPr>
+          <a:xfrm>
+            <a:off x="288000" y="720000"/>
+            <a:ext cx="11616119" cy="5927264"/>
+          </a:xfrm>
+          <a:prstGeom prst="rect">
+            <a:avLst/>
+          </a:prstGeom>
+          <a:noFill/>
+        </p:spPr>
+        <p:txBody>
+          <a:bodyPr wrap="square">
+            <a:spAutoFit/>
+          </a:bodyPr>
+          <a:lstStyle/>
+          <a:p>
+            <a:pPr algn="l">
+              <a:lnSpc>
+                <a:spcPts val="3500"/>
+              </a:lnSpc>
+            </a:pPr>
+            <a:r>
+              <a:rPr sz="2800" b="0" dirty="0">
+                <a:solidFill>
+                  <a:srgbClr val="333333"/>
+                </a:solidFill>
+                <a:latin typeface="メイリオ" panose="020B0604030504040204" pitchFamily="50" charset="-128"/>
+                <a:ea typeface="メイリオ" panose="020B0604030504040204" pitchFamily="50" charset="-128"/>
+              </a:rPr>
+              <a:t>■ </a:t>
+            </a:r>
+            <a:r>
+              <a:rPr sz="2800" b="0" dirty="0" err="1">
+                <a:solidFill>
+                  <a:srgbClr val="333333"/>
+                </a:solidFill>
+                <a:latin typeface="メイリオ" panose="020B0604030504040204" pitchFamily="50" charset="-128"/>
+                <a:ea typeface="メイリオ" panose="020B0604030504040204" pitchFamily="50" charset="-128"/>
+              </a:rPr>
+              <a:t>総則</a:t>
+            </a:r>
+            <a:r>
+              <a:rPr sz="2800" b="0" dirty="0">
+                <a:solidFill>
+                  <a:srgbClr val="333333"/>
+                </a:solidFill>
+                <a:latin typeface="メイリオ" panose="020B0604030504040204" pitchFamily="50" charset="-128"/>
+                <a:ea typeface="メイリオ" panose="020B0604030504040204" pitchFamily="50" charset="-128"/>
+              </a:rPr>
+              <a:t> 第３の１（主体的・対話的で深い学び）</a:t>
+            </a:r>
+          </a:p>
+          <a:p>
+            <a:pPr algn="l">
+              <a:lnSpc>
+                <a:spcPts val="3500"/>
+              </a:lnSpc>
+            </a:pPr>
+            <a:endParaRPr sz="2800" b="0" dirty="0">
+              <a:solidFill>
+                <a:srgbClr val="333333"/>
+              </a:solidFill>
+              <a:latin typeface="メイリオ" panose="020B0604030504040204" pitchFamily="50" charset="-128"/>
+              <a:ea typeface="メイリオ" panose="020B0604030504040204" pitchFamily="50" charset="-128"/>
+            </a:endParaRPr>
+          </a:p>
+          <a:p>
+            <a:pPr algn="l">
+              <a:lnSpc>
+                <a:spcPts val="3500"/>
+              </a:lnSpc>
+            </a:pPr>
+            <a:r>
+              <a:rPr sz="2800" b="0" dirty="0">
+                <a:solidFill>
+                  <a:srgbClr val="333333"/>
+                </a:solidFill>
+                <a:latin typeface="メイリオ" panose="020B0604030504040204" pitchFamily="50" charset="-128"/>
+                <a:ea typeface="メイリオ" panose="020B0604030504040204" pitchFamily="50" charset="-128"/>
+              </a:rPr>
+              <a:t>　「</a:t>
+            </a:r>
+            <a:r>
+              <a:rPr sz="2800" b="0" dirty="0" err="1">
+                <a:solidFill>
+                  <a:srgbClr val="333333"/>
+                </a:solidFill>
+                <a:latin typeface="メイリオ" panose="020B0604030504040204" pitchFamily="50" charset="-128"/>
+                <a:ea typeface="メイリオ" panose="020B0604030504040204" pitchFamily="50" charset="-128"/>
+              </a:rPr>
+              <a:t>学習の見通しを立てたり学習したことを振り返ったり</a:t>
+            </a:r>
+            <a:endParaRPr sz="2800" b="0" dirty="0">
+              <a:solidFill>
+                <a:srgbClr val="333333"/>
+              </a:solidFill>
+              <a:latin typeface="メイリオ" panose="020B0604030504040204" pitchFamily="50" charset="-128"/>
+              <a:ea typeface="メイリオ" panose="020B0604030504040204" pitchFamily="50" charset="-128"/>
+            </a:endParaRPr>
+          </a:p>
+          <a:p>
+            <a:pPr algn="l">
+              <a:lnSpc>
+                <a:spcPts val="3500"/>
+              </a:lnSpc>
+            </a:pPr>
+            <a:r>
+              <a:rPr sz="2800" b="0" dirty="0">
+                <a:solidFill>
+                  <a:srgbClr val="333333"/>
+                </a:solidFill>
+                <a:latin typeface="メイリオ" panose="020B0604030504040204" pitchFamily="50" charset="-128"/>
+                <a:ea typeface="メイリオ" panose="020B0604030504040204" pitchFamily="50" charset="-128"/>
+              </a:rPr>
+              <a:t>　　</a:t>
+            </a:r>
+            <a:r>
+              <a:rPr sz="2800" b="0" dirty="0" err="1">
+                <a:solidFill>
+                  <a:srgbClr val="333333"/>
+                </a:solidFill>
+                <a:latin typeface="メイリオ" panose="020B0604030504040204" pitchFamily="50" charset="-128"/>
+                <a:ea typeface="メイリオ" panose="020B0604030504040204" pitchFamily="50" charset="-128"/>
+              </a:rPr>
+              <a:t>する活動を、計画的に取り入れ</a:t>
+            </a:r>
+            <a:r>
+              <a:rPr sz="2800" b="0" dirty="0">
+                <a:solidFill>
+                  <a:srgbClr val="333333"/>
+                </a:solidFill>
+                <a:latin typeface="メイリオ" panose="020B0604030504040204" pitchFamily="50" charset="-128"/>
+                <a:ea typeface="メイリオ" panose="020B0604030504040204" pitchFamily="50" charset="-128"/>
+              </a:rPr>
+              <a:t>…」</a:t>
+            </a:r>
+          </a:p>
+          <a:p>
+            <a:pPr algn="l">
+              <a:lnSpc>
+                <a:spcPts val="3500"/>
+              </a:lnSpc>
+            </a:pPr>
+            <a:endParaRPr lang="en-US" sz="2800" b="0" dirty="0">
+              <a:solidFill>
+                <a:srgbClr val="333333"/>
+              </a:solidFill>
+              <a:latin typeface="メイリオ" panose="020B0604030504040204" pitchFamily="50" charset="-128"/>
+              <a:ea typeface="メイリオ" panose="020B0604030504040204" pitchFamily="50" charset="-128"/>
+            </a:endParaRPr>
+          </a:p>
+          <a:p>
+            <a:pPr algn="l">
+              <a:lnSpc>
+                <a:spcPts val="3500"/>
+              </a:lnSpc>
+            </a:pPr>
+            <a:r>
+              <a:rPr sz="2800" b="0" dirty="0">
+                <a:solidFill>
+                  <a:srgbClr val="333333"/>
+                </a:solidFill>
+                <a:latin typeface="メイリオ" panose="020B0604030504040204" pitchFamily="50" charset="-128"/>
+                <a:ea typeface="メイリオ" panose="020B0604030504040204" pitchFamily="50" charset="-128"/>
+              </a:rPr>
+              <a:t>■ </a:t>
+            </a:r>
+            <a:r>
+              <a:rPr sz="2800" b="0" dirty="0" err="1">
+                <a:solidFill>
+                  <a:srgbClr val="333333"/>
+                </a:solidFill>
+                <a:latin typeface="メイリオ" panose="020B0604030504040204" pitchFamily="50" charset="-128"/>
+                <a:ea typeface="メイリオ" panose="020B0604030504040204" pitchFamily="50" charset="-128"/>
+              </a:rPr>
+              <a:t>数学科の目標（中学校学習指導要領</a:t>
+            </a:r>
+            <a:r>
+              <a:rPr sz="2800" b="0" dirty="0">
+                <a:solidFill>
+                  <a:srgbClr val="333333"/>
+                </a:solidFill>
+                <a:latin typeface="メイリオ" panose="020B0604030504040204" pitchFamily="50" charset="-128"/>
+                <a:ea typeface="メイリオ" panose="020B0604030504040204" pitchFamily="50" charset="-128"/>
+              </a:rPr>
+              <a:t>）</a:t>
+            </a:r>
+          </a:p>
+          <a:p>
+            <a:pPr algn="l">
+              <a:lnSpc>
+                <a:spcPts val="3500"/>
+              </a:lnSpc>
+            </a:pPr>
+            <a:endParaRPr sz="2800" b="0" dirty="0">
+              <a:solidFill>
+                <a:srgbClr val="333333"/>
+              </a:solidFill>
+              <a:latin typeface="メイリオ" panose="020B0604030504040204" pitchFamily="50" charset="-128"/>
+              <a:ea typeface="メイリオ" panose="020B0604030504040204" pitchFamily="50" charset="-128"/>
+            </a:endParaRPr>
+          </a:p>
+          <a:p>
+            <a:pPr algn="l">
+              <a:lnSpc>
+                <a:spcPts val="3500"/>
+              </a:lnSpc>
+            </a:pPr>
+            <a:r>
+              <a:rPr sz="2800" b="0" dirty="0">
+                <a:solidFill>
+                  <a:srgbClr val="333333"/>
+                </a:solidFill>
+                <a:latin typeface="メイリオ" panose="020B0604030504040204" pitchFamily="50" charset="-128"/>
+                <a:ea typeface="メイリオ" panose="020B0604030504040204" pitchFamily="50" charset="-128"/>
+              </a:rPr>
+              <a:t>　「</a:t>
+            </a:r>
+            <a:r>
+              <a:rPr sz="2800" b="0" dirty="0" err="1">
+                <a:solidFill>
+                  <a:srgbClr val="333333"/>
+                </a:solidFill>
+                <a:latin typeface="メイリオ" panose="020B0604030504040204" pitchFamily="50" charset="-128"/>
+                <a:ea typeface="メイリオ" panose="020B0604030504040204" pitchFamily="50" charset="-128"/>
+              </a:rPr>
+              <a:t>問題解決の過程を振り返って評価・改善しようとする</a:t>
+            </a:r>
+            <a:endParaRPr sz="2800" b="0" dirty="0">
+              <a:solidFill>
+                <a:srgbClr val="333333"/>
+              </a:solidFill>
+              <a:latin typeface="メイリオ" panose="020B0604030504040204" pitchFamily="50" charset="-128"/>
+              <a:ea typeface="メイリオ" panose="020B0604030504040204" pitchFamily="50" charset="-128"/>
+            </a:endParaRPr>
+          </a:p>
+          <a:p>
+            <a:pPr algn="l">
+              <a:lnSpc>
+                <a:spcPts val="3500"/>
+              </a:lnSpc>
+            </a:pPr>
+            <a:r>
+              <a:rPr sz="2800" b="0" dirty="0">
+                <a:solidFill>
+                  <a:srgbClr val="333333"/>
+                </a:solidFill>
+                <a:latin typeface="メイリオ" panose="020B0604030504040204" pitchFamily="50" charset="-128"/>
+                <a:ea typeface="メイリオ" panose="020B0604030504040204" pitchFamily="50" charset="-128"/>
+              </a:rPr>
+              <a:t>　　</a:t>
+            </a:r>
+            <a:r>
+              <a:rPr sz="2800" b="0" dirty="0" err="1">
+                <a:solidFill>
+                  <a:srgbClr val="333333"/>
+                </a:solidFill>
+                <a:latin typeface="メイリオ" panose="020B0604030504040204" pitchFamily="50" charset="-128"/>
+                <a:ea typeface="メイリオ" panose="020B0604030504040204" pitchFamily="50" charset="-128"/>
+              </a:rPr>
+              <a:t>態度を養う</a:t>
+            </a:r>
+            <a:r>
+              <a:rPr sz="2800" b="0" dirty="0">
+                <a:solidFill>
+                  <a:srgbClr val="333333"/>
+                </a:solidFill>
+                <a:latin typeface="メイリオ" panose="020B0604030504040204" pitchFamily="50" charset="-128"/>
+                <a:ea typeface="メイリオ" panose="020B0604030504040204" pitchFamily="50" charset="-128"/>
+              </a:rPr>
+              <a:t>」</a:t>
+            </a:r>
+          </a:p>
+          <a:p>
+            <a:pPr algn="l">
+              <a:lnSpc>
+                <a:spcPts val="3500"/>
+              </a:lnSpc>
+            </a:pPr>
+            <a:endParaRPr sz="2800" b="0" dirty="0">
+              <a:solidFill>
+                <a:srgbClr val="333333"/>
+              </a:solidFill>
+              <a:latin typeface="メイリオ" panose="020B0604030504040204" pitchFamily="50" charset="-128"/>
+              <a:ea typeface="メイリオ" panose="020B0604030504040204" pitchFamily="50" charset="-128"/>
+            </a:endParaRPr>
+          </a:p>
+          <a:p>
+            <a:pPr algn="l">
+              <a:lnSpc>
+                <a:spcPts val="3500"/>
+              </a:lnSpc>
+            </a:pPr>
+            <a:r>
+              <a:rPr sz="2800" b="0" dirty="0">
+                <a:solidFill>
+                  <a:srgbClr val="333333"/>
+                </a:solidFill>
+                <a:latin typeface="メイリオ" panose="020B0604030504040204" pitchFamily="50" charset="-128"/>
+                <a:ea typeface="メイリオ" panose="020B0604030504040204" pitchFamily="50" charset="-128"/>
+              </a:rPr>
+              <a:t>■ </a:t>
+            </a:r>
+            <a:r>
+              <a:rPr sz="2800" b="0" dirty="0" err="1">
+                <a:solidFill>
+                  <a:srgbClr val="333333"/>
+                </a:solidFill>
+                <a:latin typeface="メイリオ" panose="020B0604030504040204" pitchFamily="50" charset="-128"/>
+                <a:ea typeface="メイリオ" panose="020B0604030504040204" pitchFamily="50" charset="-128"/>
+              </a:rPr>
+              <a:t>重要ポイント</a:t>
+            </a:r>
+            <a:endParaRPr sz="2800" b="0" dirty="0">
+              <a:solidFill>
+                <a:srgbClr val="333333"/>
+              </a:solidFill>
+              <a:latin typeface="メイリオ" panose="020B0604030504040204" pitchFamily="50" charset="-128"/>
+              <a:ea typeface="メイリオ" panose="020B0604030504040204" pitchFamily="50" charset="-128"/>
+            </a:endParaRPr>
+          </a:p>
+          <a:p>
+            <a:pPr algn="l">
+              <a:lnSpc>
+                <a:spcPts val="3500"/>
+              </a:lnSpc>
+            </a:pPr>
+            <a:r>
+              <a:rPr sz="2800" b="0" dirty="0">
+                <a:solidFill>
+                  <a:srgbClr val="333333"/>
+                </a:solidFill>
+                <a:latin typeface="メイリオ" panose="020B0604030504040204" pitchFamily="50" charset="-128"/>
+                <a:ea typeface="メイリオ" panose="020B0604030504040204" pitchFamily="50" charset="-128"/>
+              </a:rPr>
+              <a:t>　→ </a:t>
+            </a:r>
+            <a:r>
+              <a:rPr sz="2800" b="0" dirty="0" err="1">
+                <a:solidFill>
+                  <a:srgbClr val="333333"/>
+                </a:solidFill>
+                <a:latin typeface="メイリオ" panose="020B0604030504040204" pitchFamily="50" charset="-128"/>
+                <a:ea typeface="メイリオ" panose="020B0604030504040204" pitchFamily="50" charset="-128"/>
+              </a:rPr>
+              <a:t>振り返りは「目標」に明記された重要な学習活動</a:t>
+            </a:r>
+            <a:endParaRPr sz="2800" b="0" dirty="0">
+              <a:solidFill>
+                <a:srgbClr val="333333"/>
+              </a:solidFill>
+              <a:latin typeface="メイリオ" panose="020B0604030504040204" pitchFamily="50" charset="-128"/>
+              <a:ea typeface="メイリオ" panose="020B0604030504040204" pitchFamily="50" charset="-128"/>
+            </a:endParaRPr>
+          </a:p>
+          <a:p>
+            <a:pPr algn="l">
+              <a:lnSpc>
+                <a:spcPts val="3500"/>
+              </a:lnSpc>
+            </a:pPr>
+            <a:r>
+              <a:rPr sz="2800" b="0" dirty="0">
+                <a:solidFill>
+                  <a:srgbClr val="333333"/>
+                </a:solidFill>
+                <a:latin typeface="メイリオ" panose="020B0604030504040204" pitchFamily="50" charset="-128"/>
+                <a:ea typeface="メイリオ" panose="020B0604030504040204" pitchFamily="50" charset="-128"/>
+              </a:rPr>
+              <a:t>　→「</a:t>
+            </a:r>
+            <a:r>
+              <a:rPr sz="2800" b="0" dirty="0" err="1">
+                <a:solidFill>
+                  <a:srgbClr val="333333"/>
+                </a:solidFill>
+                <a:latin typeface="メイリオ" panose="020B0604030504040204" pitchFamily="50" charset="-128"/>
+                <a:ea typeface="メイリオ" panose="020B0604030504040204" pitchFamily="50" charset="-128"/>
+              </a:rPr>
+              <a:t>させてあげること」ではなく「育てるべき力</a:t>
+            </a:r>
+            <a:r>
+              <a:rPr sz="2800" b="0" dirty="0">
+                <a:solidFill>
+                  <a:srgbClr val="333333"/>
+                </a:solidFill>
+                <a:latin typeface="メイリオ" panose="020B0604030504040204" pitchFamily="50" charset="-128"/>
+                <a:ea typeface="メイリオ" panose="020B0604030504040204" pitchFamily="50" charset="-128"/>
+              </a:rPr>
+              <a:t>」</a:t>
+            </a:r>
+          </a:p>
+        </p:txBody>
+      </p:sp>
+      <p:sp>
+        <p:nvSpPr>
+          <p:cNvPr id="5" name="TextBox 4"/>
+          <p:cNvSpPr txBox="1"/>
+          <p:nvPr/>
+        </p:nvSpPr>
+        <p:spPr>
+          <a:xfrm>
+            <a:off x="11292119" y="6570000"/>
+            <a:ext cx="720000" cy="216000"/>
+          </a:xfrm>
+          <a:prstGeom prst="rect">
+            <a:avLst/>
+          </a:prstGeom>
+          <a:noFill/>
+        </p:spPr>
+        <p:txBody>
+          <a:bodyPr wrap="none">
+            <a:spAutoFit/>
+          </a:bodyPr>
+          <a:lstStyle/>
+          <a:p>
+            <a:pPr algn="r"/>
+            <a:r>
+              <a:rPr sz="1000">
+                <a:solidFill>
+                  <a:srgbClr val="999999"/>
+                </a:solidFill>
+                <a:latin typeface="BIZ UDPGothic"/>
+              </a:rPr>
+              <a:t>12 / 20</a:t>
+            </a:r>
+          </a:p>
+        </p:txBody>
+      </p:sp>
+    </p:spTree>
+  </p:cSld>
+  <p:clrMapOvr>
+    <a:masterClrMapping/>
+  </p:clrMapOvr>
+</p:sld>
+</file>
+
+<file path=ppt/slides/slide13.xml><?xml version="1.0" encoding="utf-8"?>
+<p:sld xmlns:a="http://schemas.openxmlformats.org/drawingml/2006/main" xmlns:r="http://schemas.openxmlformats.org/officeDocument/2006/relationships" xmlns:p="http://schemas.openxmlformats.org/presentationml/2006/main">
+  <p:cSld>
+    <p:spTree>
+      <p:nvGrpSpPr>
+        <p:cNvPr id="1" name=""/>
+        <p:cNvGrpSpPr/>
+        <p:nvPr/>
+      </p:nvGrpSpPr>
+      <p:grpSpPr>
+        <a:xfrm>
+          <a:off x="0" y="0"/>
+          <a:ext cx="0" cy="0"/>
+          <a:chOff x="0" y="0"/>
+          <a:chExt cx="0" cy="0"/>
+        </a:xfrm>
+      </p:grpSpPr>
+      <p:sp>
+        <p:nvSpPr>
+          <p:cNvPr id="2" name="Rectangle 1"/>
+          <p:cNvSpPr/>
+          <p:nvPr/>
+        </p:nvSpPr>
+        <p:spPr>
+          <a:xfrm>
+            <a:off x="0" y="0"/>
+            <a:ext cx="12192119" cy="576000"/>
+          </a:xfrm>
+          <a:prstGeom prst="rect">
+            <a:avLst/>
+          </a:prstGeom>
+          <a:solidFill>
+            <a:srgbClr val="1F3864"/>
+          </a:solidFill>
+          <a:ln>
+            <a:noFill/>
+          </a:ln>
+        </p:spPr>
+        <p:style>
+          <a:lnRef idx="1">
+            <a:schemeClr val="accent1"/>
+          </a:lnRef>
+          <a:fillRef idx="3">
+            <a:schemeClr val="accent1"/>
+          </a:fillRef>
+          <a:effectRef idx="2">
+            <a:schemeClr val="accent1"/>
+          </a:effectRef>
+          <a:fontRef idx="minor">
+            <a:schemeClr val="lt1"/>
+          </a:fontRef>
+        </p:style>
+        <p:txBody>
+          <a:bodyPr rtlCol="0" anchor="ctr"/>
+          <a:lstStyle/>
+          <a:p>
+            <a:pPr algn="ctr"/>
+            <a:endParaRPr/>
+          </a:p>
+        </p:txBody>
+      </p:sp>
+      <p:sp>
+        <p:nvSpPr>
+          <p:cNvPr id="3" name="TextBox 2"/>
+          <p:cNvSpPr txBox="1"/>
+          <p:nvPr/>
+        </p:nvSpPr>
+        <p:spPr>
+          <a:xfrm>
+            <a:off x="180000" y="54000"/>
+            <a:ext cx="11832119" cy="468000"/>
+          </a:xfrm>
+          <a:prstGeom prst="rect">
+            <a:avLst/>
+          </a:prstGeom>
+          <a:noFill/>
+        </p:spPr>
+        <p:txBody>
+          <a:bodyPr wrap="none">
+            <a:spAutoFit/>
+          </a:bodyPr>
+          <a:lstStyle/>
+          <a:p>
+            <a:pPr algn="l"/>
+            <a:r>
+              <a:rPr sz="2400" b="1">
+                <a:solidFill>
+                  <a:srgbClr val="FFFFFF"/>
+                </a:solidFill>
+                <a:latin typeface="BIZ UDPGothic"/>
+              </a:rPr>
+              <a:t>「よい振り返り」とはどんなものか</a:t>
+            </a:r>
+          </a:p>
+        </p:txBody>
+      </p:sp>
+      <p:sp>
+        <p:nvSpPr>
+          <p:cNvPr id="4" name="TextBox 3"/>
+          <p:cNvSpPr txBox="1"/>
+          <p:nvPr/>
+        </p:nvSpPr>
+        <p:spPr>
+          <a:xfrm>
+            <a:off x="288000" y="720000"/>
+            <a:ext cx="11616119" cy="5418022"/>
+          </a:xfrm>
+          <a:prstGeom prst="rect">
+            <a:avLst/>
+          </a:prstGeom>
+          <a:noFill/>
+        </p:spPr>
+        <p:txBody>
+          <a:bodyPr wrap="square">
+            <a:spAutoFit/>
+          </a:bodyPr>
+          <a:lstStyle/>
+          <a:p>
+            <a:pPr algn="l">
+              <a:lnSpc>
+                <a:spcPts val="3500"/>
+              </a:lnSpc>
+            </a:pPr>
+            <a:r>
+              <a:rPr sz="2800" b="0" dirty="0">
+                <a:solidFill>
+                  <a:srgbClr val="333333"/>
+                </a:solidFill>
+                <a:latin typeface="BIZ UDPGothic"/>
+              </a:rPr>
+              <a:t>■ </a:t>
+            </a:r>
+            <a:r>
+              <a:rPr sz="2800" b="0" dirty="0" err="1">
+                <a:solidFill>
+                  <a:srgbClr val="333333"/>
+                </a:solidFill>
+                <a:latin typeface="BIZ UDPGothic"/>
+              </a:rPr>
+              <a:t>振り返りの「質」を問う</a:t>
+            </a:r>
+            <a:endParaRPr sz="2800" b="0" dirty="0">
+              <a:solidFill>
+                <a:srgbClr val="333333"/>
+              </a:solidFill>
+              <a:latin typeface="BIZ UDPGothic"/>
+            </a:endParaRPr>
+          </a:p>
+          <a:p>
+            <a:pPr algn="l">
+              <a:lnSpc>
+                <a:spcPts val="3500"/>
+              </a:lnSpc>
+            </a:pPr>
+            <a:r>
+              <a:rPr sz="2800" b="0" dirty="0">
+                <a:solidFill>
+                  <a:srgbClr val="333333"/>
+                </a:solidFill>
+                <a:latin typeface="BIZ UDPGothic"/>
+              </a:rPr>
+              <a:t>　✕ </a:t>
+            </a:r>
+            <a:r>
+              <a:rPr sz="2800" b="0" dirty="0" err="1">
+                <a:solidFill>
+                  <a:srgbClr val="333333"/>
+                </a:solidFill>
+                <a:latin typeface="BIZ UDPGothic"/>
+              </a:rPr>
+              <a:t>低質な振り返りの例</a:t>
+            </a:r>
+            <a:r>
+              <a:rPr sz="2800" b="0" dirty="0">
+                <a:solidFill>
+                  <a:srgbClr val="333333"/>
+                </a:solidFill>
+                <a:latin typeface="BIZ UDPGothic"/>
+              </a:rPr>
+              <a:t>：</a:t>
+            </a:r>
+          </a:p>
+          <a:p>
+            <a:pPr algn="l">
+              <a:lnSpc>
+                <a:spcPts val="3500"/>
+              </a:lnSpc>
+            </a:pPr>
+            <a:r>
+              <a:rPr sz="2800" b="0" dirty="0">
+                <a:solidFill>
+                  <a:srgbClr val="333333"/>
+                </a:solidFill>
+                <a:latin typeface="BIZ UDPGothic"/>
+              </a:rPr>
+              <a:t>　　「</a:t>
+            </a:r>
+            <a:r>
+              <a:rPr sz="2800" b="0" dirty="0" err="1">
+                <a:solidFill>
+                  <a:srgbClr val="333333"/>
+                </a:solidFill>
+                <a:latin typeface="BIZ UDPGothic"/>
+              </a:rPr>
+              <a:t>今日の授業は楽しかった</a:t>
+            </a:r>
+            <a:r>
+              <a:rPr sz="2800" b="0" dirty="0">
+                <a:solidFill>
+                  <a:srgbClr val="333333"/>
+                </a:solidFill>
+                <a:latin typeface="BIZ UDPGothic"/>
+              </a:rPr>
+              <a:t>」</a:t>
+            </a:r>
+            <a:r>
+              <a:rPr lang="ja-JP" altLang="en-US" sz="2800" dirty="0">
+                <a:solidFill>
+                  <a:srgbClr val="333333"/>
+                </a:solidFill>
+                <a:latin typeface="BIZ UDPGothic"/>
+              </a:rPr>
+              <a:t>、</a:t>
+            </a:r>
+            <a:r>
+              <a:rPr sz="2800" b="0" dirty="0">
+                <a:solidFill>
+                  <a:srgbClr val="333333"/>
+                </a:solidFill>
+                <a:latin typeface="BIZ UDPGothic"/>
+              </a:rPr>
+              <a:t>　「</a:t>
+            </a:r>
+            <a:r>
+              <a:rPr sz="2800" b="0" dirty="0" err="1">
+                <a:solidFill>
+                  <a:srgbClr val="333333"/>
+                </a:solidFill>
+                <a:latin typeface="BIZ UDPGothic"/>
+              </a:rPr>
+              <a:t>二次方程式がわかった</a:t>
+            </a:r>
+            <a:r>
+              <a:rPr sz="2800" b="0" dirty="0">
+                <a:solidFill>
+                  <a:srgbClr val="333333"/>
+                </a:solidFill>
+                <a:latin typeface="BIZ UDPGothic"/>
+              </a:rPr>
+              <a:t>」</a:t>
+            </a:r>
+          </a:p>
+          <a:p>
+            <a:pPr algn="l">
+              <a:lnSpc>
+                <a:spcPts val="3500"/>
+              </a:lnSpc>
+            </a:pPr>
+            <a:r>
+              <a:rPr sz="2800" b="0" dirty="0">
+                <a:solidFill>
+                  <a:srgbClr val="333333"/>
+                </a:solidFill>
+                <a:latin typeface="BIZ UDPGothic"/>
+              </a:rPr>
+              <a:t>　　「</a:t>
+            </a:r>
+            <a:r>
+              <a:rPr sz="2800" b="0" dirty="0" err="1">
+                <a:solidFill>
+                  <a:srgbClr val="333333"/>
+                </a:solidFill>
+                <a:latin typeface="BIZ UDPGothic"/>
+              </a:rPr>
+              <a:t>難しかった</a:t>
+            </a:r>
+            <a:r>
+              <a:rPr sz="2800" b="0" dirty="0">
+                <a:solidFill>
+                  <a:srgbClr val="333333"/>
+                </a:solidFill>
+                <a:latin typeface="BIZ UDPGothic"/>
+              </a:rPr>
+              <a:t>」</a:t>
+            </a:r>
+          </a:p>
+          <a:p>
+            <a:pPr algn="l">
+              <a:lnSpc>
+                <a:spcPts val="3500"/>
+              </a:lnSpc>
+            </a:pPr>
+            <a:r>
+              <a:rPr sz="2800" b="0" dirty="0">
+                <a:solidFill>
+                  <a:srgbClr val="333333"/>
+                </a:solidFill>
+                <a:latin typeface="BIZ UDPGothic"/>
+              </a:rPr>
+              <a:t>　○ </a:t>
+            </a:r>
+            <a:r>
+              <a:rPr sz="2800" b="0" dirty="0" err="1">
+                <a:solidFill>
+                  <a:srgbClr val="333333"/>
+                </a:solidFill>
+                <a:latin typeface="BIZ UDPGothic"/>
+              </a:rPr>
+              <a:t>高質な振り返りの例</a:t>
+            </a:r>
+            <a:r>
+              <a:rPr sz="2800" b="0" dirty="0">
+                <a:solidFill>
+                  <a:srgbClr val="333333"/>
+                </a:solidFill>
+                <a:latin typeface="BIZ UDPGothic"/>
+              </a:rPr>
+              <a:t>：</a:t>
+            </a:r>
+          </a:p>
+          <a:p>
+            <a:pPr algn="l">
+              <a:lnSpc>
+                <a:spcPts val="3500"/>
+              </a:lnSpc>
+            </a:pPr>
+            <a:r>
+              <a:rPr sz="2800" b="0" dirty="0">
+                <a:solidFill>
+                  <a:srgbClr val="333333"/>
+                </a:solidFill>
+                <a:latin typeface="BIZ UDPGothic"/>
+              </a:rPr>
+              <a:t>　　「</a:t>
+            </a:r>
+            <a:r>
+              <a:rPr sz="2800" b="0" dirty="0" err="1">
+                <a:solidFill>
+                  <a:srgbClr val="333333"/>
+                </a:solidFill>
+                <a:latin typeface="BIZ UDPGothic"/>
+              </a:rPr>
+              <a:t>因数分解でとけない場合に解の公式を使う、という</a:t>
+            </a:r>
+            <a:endParaRPr sz="2800" b="0" dirty="0">
+              <a:solidFill>
+                <a:srgbClr val="333333"/>
+              </a:solidFill>
+              <a:latin typeface="BIZ UDPGothic"/>
+            </a:endParaRPr>
+          </a:p>
+          <a:p>
+            <a:pPr algn="l">
+              <a:lnSpc>
+                <a:spcPts val="3500"/>
+              </a:lnSpc>
+            </a:pPr>
+            <a:r>
+              <a:rPr sz="2800" b="0" dirty="0">
+                <a:solidFill>
+                  <a:srgbClr val="333333"/>
+                </a:solidFill>
+                <a:latin typeface="BIZ UDPGothic"/>
+              </a:rPr>
+              <a:t>　　　</a:t>
+            </a:r>
+            <a:r>
+              <a:rPr sz="2800" b="0" dirty="0" err="1">
+                <a:solidFill>
+                  <a:srgbClr val="333333"/>
+                </a:solidFill>
+                <a:latin typeface="BIZ UDPGothic"/>
+              </a:rPr>
+              <a:t>判断ができるようになった。次回は使う場面を</a:t>
+            </a:r>
+            <a:endParaRPr sz="2800" b="0" dirty="0">
+              <a:solidFill>
+                <a:srgbClr val="333333"/>
+              </a:solidFill>
+              <a:latin typeface="BIZ UDPGothic"/>
+            </a:endParaRPr>
+          </a:p>
+          <a:p>
+            <a:pPr algn="l">
+              <a:lnSpc>
+                <a:spcPts val="3500"/>
+              </a:lnSpc>
+            </a:pPr>
+            <a:r>
+              <a:rPr sz="2800" b="0" dirty="0">
+                <a:solidFill>
+                  <a:srgbClr val="333333"/>
+                </a:solidFill>
+                <a:latin typeface="BIZ UDPGothic"/>
+              </a:rPr>
+              <a:t>　　　</a:t>
+            </a:r>
+            <a:r>
+              <a:rPr sz="2800" b="0" dirty="0" err="1">
+                <a:solidFill>
+                  <a:srgbClr val="333333"/>
+                </a:solidFill>
+                <a:latin typeface="BIZ UDPGothic"/>
+              </a:rPr>
+              <a:t>自分で判断できるようにしたい</a:t>
+            </a:r>
+            <a:r>
+              <a:rPr sz="2800" b="0" dirty="0">
+                <a:solidFill>
+                  <a:srgbClr val="333333"/>
+                </a:solidFill>
+                <a:latin typeface="BIZ UDPGothic"/>
+              </a:rPr>
+              <a:t>」</a:t>
+            </a:r>
+          </a:p>
+          <a:p>
+            <a:pPr algn="l">
+              <a:lnSpc>
+                <a:spcPts val="3500"/>
+              </a:lnSpc>
+            </a:pPr>
+            <a:endParaRPr sz="2800" b="0" dirty="0">
+              <a:solidFill>
+                <a:srgbClr val="333333"/>
+              </a:solidFill>
+              <a:latin typeface="BIZ UDPGothic"/>
+            </a:endParaRPr>
+          </a:p>
+          <a:p>
+            <a:pPr algn="l">
+              <a:lnSpc>
+                <a:spcPts val="3500"/>
+              </a:lnSpc>
+            </a:pPr>
+            <a:r>
+              <a:rPr sz="2800" b="0" dirty="0">
+                <a:solidFill>
+                  <a:srgbClr val="333333"/>
+                </a:solidFill>
+                <a:latin typeface="BIZ UDPGothic"/>
+              </a:rPr>
+              <a:t>■ 振り返りの３つの問い（軸）</a:t>
+            </a:r>
+          </a:p>
+          <a:p>
+            <a:pPr algn="l">
+              <a:lnSpc>
+                <a:spcPts val="3500"/>
+              </a:lnSpc>
+            </a:pPr>
+            <a:r>
+              <a:rPr sz="2800" b="0" dirty="0">
+                <a:solidFill>
+                  <a:srgbClr val="333333"/>
+                </a:solidFill>
+                <a:latin typeface="BIZ UDPGothic"/>
+              </a:rPr>
+              <a:t>　① </a:t>
+            </a:r>
+            <a:r>
+              <a:rPr sz="2800" b="0" dirty="0" err="1">
+                <a:solidFill>
+                  <a:srgbClr val="333333"/>
+                </a:solidFill>
+                <a:latin typeface="BIZ UDPGothic"/>
+              </a:rPr>
+              <a:t>何がわかったか（理解</a:t>
+            </a:r>
+            <a:r>
+              <a:rPr sz="2800" b="0" dirty="0">
+                <a:solidFill>
+                  <a:srgbClr val="333333"/>
+                </a:solidFill>
+                <a:latin typeface="BIZ UDPGothic"/>
+              </a:rPr>
+              <a:t>）　② </a:t>
+            </a:r>
+            <a:r>
+              <a:rPr sz="2800" b="0" dirty="0" err="1">
+                <a:solidFill>
+                  <a:srgbClr val="333333"/>
+                </a:solidFill>
+                <a:latin typeface="BIZ UDPGothic"/>
+              </a:rPr>
+              <a:t>なぜそう考えたか（根拠</a:t>
+            </a:r>
+            <a:r>
+              <a:rPr sz="2800" b="0" dirty="0">
+                <a:solidFill>
+                  <a:srgbClr val="333333"/>
+                </a:solidFill>
+                <a:latin typeface="BIZ UDPGothic"/>
+              </a:rPr>
+              <a:t>）　</a:t>
+            </a:r>
+            <a:endParaRPr lang="en-US" sz="2800" b="0" dirty="0">
+              <a:solidFill>
+                <a:srgbClr val="333333"/>
+              </a:solidFill>
+              <a:latin typeface="BIZ UDPGothic"/>
+            </a:endParaRPr>
+          </a:p>
+          <a:p>
+            <a:pPr algn="l">
+              <a:lnSpc>
+                <a:spcPts val="3500"/>
+              </a:lnSpc>
+            </a:pPr>
+            <a:r>
+              <a:rPr lang="ja-JP" altLang="en-US" sz="2800" b="0" dirty="0">
+                <a:solidFill>
+                  <a:srgbClr val="333333"/>
+                </a:solidFill>
+                <a:latin typeface="BIZ UDPGothic"/>
+              </a:rPr>
+              <a:t>  </a:t>
+            </a:r>
+            <a:r>
+              <a:rPr sz="2800" b="0" dirty="0">
+                <a:solidFill>
+                  <a:srgbClr val="333333"/>
+                </a:solidFill>
+                <a:latin typeface="BIZ UDPGothic"/>
+              </a:rPr>
+              <a:t>③ </a:t>
+            </a:r>
+            <a:r>
+              <a:rPr sz="2800" b="0" dirty="0" err="1">
+                <a:solidFill>
+                  <a:srgbClr val="333333"/>
+                </a:solidFill>
+                <a:latin typeface="BIZ UDPGothic"/>
+              </a:rPr>
+              <a:t>次に何をしたいか（見通し</a:t>
+            </a:r>
+            <a:r>
+              <a:rPr sz="2800" b="0" dirty="0">
+                <a:solidFill>
+                  <a:srgbClr val="333333"/>
+                </a:solidFill>
+                <a:latin typeface="BIZ UDPGothic"/>
+              </a:rPr>
+              <a:t>）</a:t>
+            </a:r>
+          </a:p>
+        </p:txBody>
+      </p:sp>
+      <p:sp>
+        <p:nvSpPr>
+          <p:cNvPr id="5" name="TextBox 4"/>
+          <p:cNvSpPr txBox="1"/>
+          <p:nvPr/>
+        </p:nvSpPr>
+        <p:spPr>
+          <a:xfrm>
+            <a:off x="11292119" y="6570000"/>
+            <a:ext cx="720000" cy="216000"/>
+          </a:xfrm>
+          <a:prstGeom prst="rect">
+            <a:avLst/>
+          </a:prstGeom>
+          <a:noFill/>
+        </p:spPr>
+        <p:txBody>
+          <a:bodyPr wrap="none">
+            <a:spAutoFit/>
+          </a:bodyPr>
+          <a:lstStyle/>
+          <a:p>
+            <a:pPr algn="r"/>
+            <a:r>
+              <a:rPr sz="1000">
+                <a:solidFill>
+                  <a:srgbClr val="999999"/>
+                </a:solidFill>
+                <a:latin typeface="BIZ UDPGothic"/>
+              </a:rPr>
+              <a:t>15 / 20</a:t>
+            </a:r>
+          </a:p>
+        </p:txBody>
+      </p:sp>
+    </p:spTree>
+  </p:cSld>
+  <p:clrMapOvr>
+    <a:masterClrMapping/>
+  </p:clrMapOvr>
+</p:sld>
+</file>
+
+<file path=ppt/slides/slide14.xml><?xml version="1.0" encoding="utf-8"?>
+<p:sld xmlns:a="http://schemas.openxmlformats.org/drawingml/2006/main" xmlns:r="http://schemas.openxmlformats.org/officeDocument/2006/relationships" xmlns:p="http://schemas.openxmlformats.org/presentationml/2006/main">
+  <p:cSld>
+    <p:spTree>
+      <p:nvGrpSpPr>
+        <p:cNvPr id="1" name=""/>
+        <p:cNvGrpSpPr/>
+        <p:nvPr/>
+      </p:nvGrpSpPr>
+      <p:grpSpPr>
+        <a:xfrm>
+          <a:off x="0" y="0"/>
+          <a:ext cx="0" cy="0"/>
+          <a:chOff x="0" y="0"/>
+          <a:chExt cx="0" cy="0"/>
+        </a:xfrm>
+      </p:grpSpPr>
+      <p:sp>
+        <p:nvSpPr>
+          <p:cNvPr id="2" name="Rectangle 1"/>
+          <p:cNvSpPr/>
+          <p:nvPr/>
+        </p:nvSpPr>
+        <p:spPr>
+          <a:xfrm>
+            <a:off x="0" y="0"/>
+            <a:ext cx="12192119" cy="576000"/>
+          </a:xfrm>
+          <a:prstGeom prst="rect">
+            <a:avLst/>
+          </a:prstGeom>
+          <a:solidFill>
+            <a:srgbClr val="1F3864"/>
+          </a:solidFill>
+          <a:ln>
+            <a:noFill/>
+          </a:ln>
+        </p:spPr>
+        <p:style>
+          <a:lnRef idx="1">
+            <a:schemeClr val="accent1"/>
+          </a:lnRef>
+          <a:fillRef idx="3">
+            <a:schemeClr val="accent1"/>
+          </a:fillRef>
+          <a:effectRef idx="2">
+            <a:schemeClr val="accent1"/>
+          </a:effectRef>
+          <a:fontRef idx="minor">
+            <a:schemeClr val="lt1"/>
+          </a:fontRef>
+        </p:style>
+        <p:txBody>
+          <a:bodyPr rtlCol="0" anchor="ctr"/>
+          <a:lstStyle/>
+          <a:p>
+            <a:pPr algn="ctr"/>
+            <a:endParaRPr/>
+          </a:p>
+        </p:txBody>
+      </p:sp>
+      <p:sp>
+        <p:nvSpPr>
+          <p:cNvPr id="3" name="TextBox 2"/>
+          <p:cNvSpPr txBox="1"/>
+          <p:nvPr/>
+        </p:nvSpPr>
+        <p:spPr>
+          <a:xfrm>
+            <a:off x="180000" y="54000"/>
+            <a:ext cx="11832119" cy="468000"/>
+          </a:xfrm>
+          <a:prstGeom prst="rect">
+            <a:avLst/>
+          </a:prstGeom>
+          <a:noFill/>
+        </p:spPr>
+        <p:txBody>
+          <a:bodyPr wrap="none">
+            <a:spAutoFit/>
+          </a:bodyPr>
+          <a:lstStyle/>
+          <a:p>
+            <a:pPr algn="l"/>
+            <a:r>
+              <a:rPr sz="2400" b="1">
+                <a:solidFill>
+                  <a:srgbClr val="FFFFFF"/>
+                </a:solidFill>
+                <a:latin typeface="BIZ UDPGothic"/>
+              </a:rPr>
+              <a:t>振り返り指導の５つのポイント</a:t>
+            </a:r>
+          </a:p>
+        </p:txBody>
+      </p:sp>
+      <p:sp>
+        <p:nvSpPr>
+          <p:cNvPr id="4" name="TextBox 3"/>
+          <p:cNvSpPr txBox="1"/>
+          <p:nvPr/>
+        </p:nvSpPr>
+        <p:spPr>
+          <a:xfrm>
+            <a:off x="288000" y="720000"/>
+            <a:ext cx="11616119" cy="5837495"/>
+          </a:xfrm>
+          <a:prstGeom prst="rect">
+            <a:avLst/>
+          </a:prstGeom>
+          <a:noFill/>
+        </p:spPr>
+        <p:txBody>
+          <a:bodyPr wrap="square">
+            <a:spAutoFit/>
+          </a:bodyPr>
+          <a:lstStyle/>
+          <a:p>
+            <a:pPr algn="l">
+              <a:lnSpc>
+                <a:spcPts val="3200"/>
+              </a:lnSpc>
+            </a:pPr>
+            <a:r>
+              <a:rPr sz="2800" b="0" dirty="0">
+                <a:solidFill>
+                  <a:srgbClr val="333333"/>
+                </a:solidFill>
+                <a:latin typeface="BIZ UDPGothic"/>
+              </a:rPr>
+              <a:t>① </a:t>
+            </a:r>
+            <a:r>
+              <a:rPr sz="2800" b="0" dirty="0" err="1">
+                <a:solidFill>
+                  <a:srgbClr val="333333"/>
+                </a:solidFill>
+                <a:latin typeface="BIZ UDPGothic"/>
+              </a:rPr>
+              <a:t>振り返りの「視点」を事前に示す</a:t>
+            </a:r>
+            <a:endParaRPr sz="2800" b="0" dirty="0">
+              <a:solidFill>
+                <a:srgbClr val="333333"/>
+              </a:solidFill>
+              <a:latin typeface="BIZ UDPGothic"/>
+            </a:endParaRPr>
+          </a:p>
+          <a:p>
+            <a:pPr algn="l">
+              <a:lnSpc>
+                <a:spcPts val="3200"/>
+              </a:lnSpc>
+            </a:pPr>
+            <a:r>
+              <a:rPr sz="2800" b="0" dirty="0">
+                <a:solidFill>
+                  <a:srgbClr val="333333"/>
+                </a:solidFill>
+                <a:latin typeface="BIZ UDPGothic"/>
+              </a:rPr>
+              <a:t>　→ </a:t>
+            </a:r>
+            <a:r>
+              <a:rPr sz="2800" b="0" dirty="0" err="1">
+                <a:solidFill>
+                  <a:srgbClr val="333333"/>
+                </a:solidFill>
+                <a:latin typeface="BIZ UDPGothic"/>
+              </a:rPr>
+              <a:t>本時のめあてと対応させて板書する</a:t>
+            </a:r>
+            <a:endParaRPr sz="2800" b="0" dirty="0">
+              <a:solidFill>
+                <a:srgbClr val="333333"/>
+              </a:solidFill>
+              <a:latin typeface="BIZ UDPGothic"/>
+            </a:endParaRPr>
+          </a:p>
+          <a:p>
+            <a:pPr algn="l">
+              <a:lnSpc>
+                <a:spcPts val="3200"/>
+              </a:lnSpc>
+            </a:pPr>
+            <a:endParaRPr sz="2800" b="0" dirty="0">
+              <a:solidFill>
+                <a:srgbClr val="333333"/>
+              </a:solidFill>
+              <a:latin typeface="BIZ UDPGothic"/>
+            </a:endParaRPr>
+          </a:p>
+          <a:p>
+            <a:pPr algn="l">
+              <a:lnSpc>
+                <a:spcPts val="3200"/>
+              </a:lnSpc>
+            </a:pPr>
+            <a:r>
+              <a:rPr sz="2800" b="0" dirty="0">
+                <a:solidFill>
+                  <a:srgbClr val="333333"/>
+                </a:solidFill>
+                <a:latin typeface="BIZ UDPGothic"/>
+              </a:rPr>
+              <a:t>② 「</a:t>
+            </a:r>
+            <a:r>
+              <a:rPr sz="2800" b="0" dirty="0" err="1">
+                <a:solidFill>
+                  <a:srgbClr val="333333"/>
+                </a:solidFill>
+                <a:latin typeface="BIZ UDPGothic"/>
+              </a:rPr>
+              <a:t>書く」ことで思考を外化させる</a:t>
+            </a:r>
+            <a:endParaRPr sz="2800" b="0" dirty="0">
+              <a:solidFill>
+                <a:srgbClr val="333333"/>
+              </a:solidFill>
+              <a:latin typeface="BIZ UDPGothic"/>
+            </a:endParaRPr>
+          </a:p>
+          <a:p>
+            <a:pPr algn="l">
+              <a:lnSpc>
+                <a:spcPts val="3200"/>
+              </a:lnSpc>
+            </a:pPr>
+            <a:r>
+              <a:rPr sz="2800" b="0" dirty="0">
+                <a:solidFill>
+                  <a:srgbClr val="333333"/>
+                </a:solidFill>
+                <a:latin typeface="BIZ UDPGothic"/>
+              </a:rPr>
+              <a:t>　→ </a:t>
+            </a:r>
+            <a:r>
+              <a:rPr sz="2800" b="0" dirty="0" err="1">
+                <a:solidFill>
+                  <a:srgbClr val="333333"/>
+                </a:solidFill>
+                <a:latin typeface="BIZ UDPGothic"/>
+              </a:rPr>
+              <a:t>頭の中だけでは曖昧なままになりやすい</a:t>
+            </a:r>
+            <a:endParaRPr sz="2800" b="0" dirty="0">
+              <a:solidFill>
+                <a:srgbClr val="333333"/>
+              </a:solidFill>
+              <a:latin typeface="BIZ UDPGothic"/>
+            </a:endParaRPr>
+          </a:p>
+          <a:p>
+            <a:pPr algn="l">
+              <a:lnSpc>
+                <a:spcPts val="3200"/>
+              </a:lnSpc>
+            </a:pPr>
+            <a:endParaRPr sz="2800" b="0" dirty="0">
+              <a:solidFill>
+                <a:srgbClr val="333333"/>
+              </a:solidFill>
+              <a:latin typeface="BIZ UDPGothic"/>
+            </a:endParaRPr>
+          </a:p>
+          <a:p>
+            <a:pPr algn="l">
+              <a:lnSpc>
+                <a:spcPts val="3200"/>
+              </a:lnSpc>
+            </a:pPr>
+            <a:r>
+              <a:rPr sz="2800" b="0" dirty="0">
+                <a:solidFill>
+                  <a:srgbClr val="333333"/>
+                </a:solidFill>
+                <a:latin typeface="BIZ UDPGothic"/>
+              </a:rPr>
+              <a:t>③ </a:t>
+            </a:r>
+            <a:r>
+              <a:rPr sz="2800" b="0" dirty="0" err="1">
+                <a:solidFill>
+                  <a:srgbClr val="333333"/>
+                </a:solidFill>
+                <a:latin typeface="BIZ UDPGothic"/>
+              </a:rPr>
+              <a:t>振り返りを「見取る」教師の目をもつ</a:t>
+            </a:r>
+            <a:endParaRPr sz="2800" b="0" dirty="0">
+              <a:solidFill>
+                <a:srgbClr val="333333"/>
+              </a:solidFill>
+              <a:latin typeface="BIZ UDPGothic"/>
+            </a:endParaRPr>
+          </a:p>
+          <a:p>
+            <a:pPr algn="l">
+              <a:lnSpc>
+                <a:spcPts val="3200"/>
+              </a:lnSpc>
+            </a:pPr>
+            <a:r>
+              <a:rPr sz="2800" b="0" dirty="0">
+                <a:solidFill>
+                  <a:srgbClr val="333333"/>
+                </a:solidFill>
+                <a:latin typeface="BIZ UDPGothic"/>
+              </a:rPr>
+              <a:t>　→ </a:t>
+            </a:r>
+            <a:r>
+              <a:rPr sz="2800" b="0" dirty="0" err="1">
+                <a:solidFill>
+                  <a:srgbClr val="333333"/>
+                </a:solidFill>
+                <a:latin typeface="BIZ UDPGothic"/>
+              </a:rPr>
+              <a:t>次時の指導改善・個への対応に活用</a:t>
+            </a:r>
+            <a:endParaRPr sz="2800" b="0" dirty="0">
+              <a:solidFill>
+                <a:srgbClr val="333333"/>
+              </a:solidFill>
+              <a:latin typeface="BIZ UDPGothic"/>
+            </a:endParaRPr>
+          </a:p>
+          <a:p>
+            <a:pPr algn="l">
+              <a:lnSpc>
+                <a:spcPts val="3200"/>
+              </a:lnSpc>
+            </a:pPr>
+            <a:endParaRPr sz="2800" b="0" dirty="0">
+              <a:solidFill>
+                <a:srgbClr val="333333"/>
+              </a:solidFill>
+              <a:latin typeface="BIZ UDPGothic"/>
+            </a:endParaRPr>
+          </a:p>
+          <a:p>
+            <a:pPr algn="l">
+              <a:lnSpc>
+                <a:spcPts val="3200"/>
+              </a:lnSpc>
+            </a:pPr>
+            <a:r>
+              <a:rPr sz="2800" b="0" dirty="0">
+                <a:solidFill>
+                  <a:srgbClr val="333333"/>
+                </a:solidFill>
+                <a:latin typeface="BIZ UDPGothic"/>
+              </a:rPr>
+              <a:t>④ </a:t>
+            </a:r>
+            <a:r>
+              <a:rPr sz="2800" b="0" dirty="0" err="1">
+                <a:solidFill>
+                  <a:srgbClr val="333333"/>
+                </a:solidFill>
+                <a:latin typeface="BIZ UDPGothic"/>
+              </a:rPr>
+              <a:t>振り返りを「共有」する場を設ける</a:t>
+            </a:r>
+            <a:endParaRPr sz="2800" b="0" dirty="0">
+              <a:solidFill>
+                <a:srgbClr val="333333"/>
+              </a:solidFill>
+              <a:latin typeface="BIZ UDPGothic"/>
+            </a:endParaRPr>
+          </a:p>
+          <a:p>
+            <a:pPr algn="l">
+              <a:lnSpc>
+                <a:spcPts val="3200"/>
+              </a:lnSpc>
+            </a:pPr>
+            <a:r>
+              <a:rPr sz="2800" b="0" dirty="0">
+                <a:solidFill>
+                  <a:srgbClr val="333333"/>
+                </a:solidFill>
+                <a:latin typeface="BIZ UDPGothic"/>
+              </a:rPr>
+              <a:t>　→ </a:t>
+            </a:r>
+            <a:r>
+              <a:rPr sz="2800" b="0" dirty="0" err="1">
+                <a:solidFill>
+                  <a:srgbClr val="333333"/>
+                </a:solidFill>
+                <a:latin typeface="BIZ UDPGothic"/>
+              </a:rPr>
+              <a:t>他者の振り返りから学ぶ機会に</a:t>
+            </a:r>
+            <a:endParaRPr sz="2800" b="0" dirty="0">
+              <a:solidFill>
+                <a:srgbClr val="333333"/>
+              </a:solidFill>
+              <a:latin typeface="BIZ UDPGothic"/>
+            </a:endParaRPr>
+          </a:p>
+          <a:p>
+            <a:pPr algn="l">
+              <a:lnSpc>
+                <a:spcPts val="3200"/>
+              </a:lnSpc>
+            </a:pPr>
+            <a:endParaRPr sz="2800" b="0" dirty="0">
+              <a:solidFill>
+                <a:srgbClr val="333333"/>
+              </a:solidFill>
+              <a:latin typeface="BIZ UDPGothic"/>
+            </a:endParaRPr>
+          </a:p>
+          <a:p>
+            <a:pPr algn="l">
+              <a:lnSpc>
+                <a:spcPts val="3200"/>
+              </a:lnSpc>
+            </a:pPr>
+            <a:r>
+              <a:rPr sz="2800" b="0" dirty="0">
+                <a:solidFill>
+                  <a:srgbClr val="333333"/>
+                </a:solidFill>
+                <a:latin typeface="BIZ UDPGothic"/>
+              </a:rPr>
+              <a:t>⑤ </a:t>
+            </a:r>
+            <a:r>
+              <a:rPr sz="2800" b="0" dirty="0" err="1">
+                <a:solidFill>
+                  <a:srgbClr val="333333"/>
+                </a:solidFill>
+                <a:latin typeface="BIZ UDPGothic"/>
+              </a:rPr>
+              <a:t>振り返りを「累積・活用」する仕組みをつくる</a:t>
+            </a:r>
+            <a:endParaRPr sz="2800" b="0" dirty="0">
+              <a:solidFill>
+                <a:srgbClr val="333333"/>
+              </a:solidFill>
+              <a:latin typeface="BIZ UDPGothic"/>
+            </a:endParaRPr>
+          </a:p>
+          <a:p>
+            <a:pPr algn="l">
+              <a:lnSpc>
+                <a:spcPts val="3200"/>
+              </a:lnSpc>
+            </a:pPr>
+            <a:r>
+              <a:rPr sz="2800" b="0" dirty="0">
+                <a:solidFill>
+                  <a:srgbClr val="333333"/>
+                </a:solidFill>
+                <a:latin typeface="BIZ UDPGothic"/>
+              </a:rPr>
+              <a:t>　→ </a:t>
+            </a:r>
+            <a:r>
+              <a:rPr sz="2800" b="0" dirty="0" err="1">
+                <a:solidFill>
+                  <a:srgbClr val="333333"/>
+                </a:solidFill>
+                <a:latin typeface="BIZ UDPGothic"/>
+              </a:rPr>
+              <a:t>前時の振り返りを次時の導入へ接続</a:t>
+            </a:r>
+            <a:endParaRPr sz="2800" b="0" dirty="0">
+              <a:solidFill>
+                <a:srgbClr val="333333"/>
+              </a:solidFill>
+              <a:latin typeface="BIZ UDPGothic"/>
+            </a:endParaRPr>
+          </a:p>
+        </p:txBody>
+      </p:sp>
+      <p:sp>
+        <p:nvSpPr>
+          <p:cNvPr id="5" name="TextBox 4"/>
+          <p:cNvSpPr txBox="1"/>
+          <p:nvPr/>
+        </p:nvSpPr>
+        <p:spPr>
+          <a:xfrm>
+            <a:off x="11292119" y="6570000"/>
+            <a:ext cx="720000" cy="216000"/>
+          </a:xfrm>
+          <a:prstGeom prst="rect">
+            <a:avLst/>
+          </a:prstGeom>
+          <a:noFill/>
+        </p:spPr>
+        <p:txBody>
+          <a:bodyPr wrap="none">
+            <a:spAutoFit/>
+          </a:bodyPr>
+          <a:lstStyle/>
+          <a:p>
+            <a:pPr algn="r"/>
+            <a:r>
+              <a:rPr sz="1000">
+                <a:solidFill>
+                  <a:srgbClr val="999999"/>
+                </a:solidFill>
+                <a:latin typeface="BIZ UDPGothic"/>
+              </a:rPr>
+              <a:t>16 / 20</a:t>
+            </a:r>
+          </a:p>
+        </p:txBody>
+      </p:sp>
+    </p:spTree>
+  </p:cSld>
+  <p:clrMapOvr>
+    <a:masterClrMapping/>
+  </p:clrMapOvr>
+</p:sld>
+</file>
+
+<file path=ppt/slides/slide15.xml><?xml version="1.0" encoding="utf-8"?>
+<p:sld xmlns:a="http://schemas.openxmlformats.org/drawingml/2006/main" xmlns:r="http://schemas.openxmlformats.org/officeDocument/2006/relationships" xmlns:p="http://schemas.openxmlformats.org/presentationml/2006/main">
+  <p:cSld>
+    <p:spTree>
+      <p:nvGrpSpPr>
         <p:cNvPr id="1" name="">
           <a:extLst>
             <a:ext uri="{FF2B5EF4-FFF2-40B4-BE49-F238E27FC236}">
@@ -6616,7 +9277,7 @@
 </p:sld>
 </file>
 
-<file path=ppt/slides/slide13.xml><?xml version="1.0" encoding="utf-8"?>
+<file path=ppt/slides/slide16.xml><?xml version="1.0" encoding="utf-8"?>
 <p:sld xmlns:a="http://schemas.openxmlformats.org/drawingml/2006/main" xmlns:r="http://schemas.openxmlformats.org/officeDocument/2006/relationships" xmlns:p="http://schemas.openxmlformats.org/presentationml/2006/main">
   <p:cSld>
     <p:spTree>
@@ -7111,7 +9772,7 @@
 </p:sld>
 </file>
 
-<file path=ppt/slides/slide15.xml><?xml version="1.0" encoding="utf-8"?>
+<file path=ppt/slides/slide17.xml><?xml version="1.0" encoding="utf-8"?>
 <p:sld xmlns:a="http://schemas.openxmlformats.org/drawingml/2006/main" xmlns:r="http://schemas.openxmlformats.org/officeDocument/2006/relationships" xmlns:p="http://schemas.openxmlformats.org/presentationml/2006/main">
   <p:cSld>
     <p:spTree>
@@ -7806,6 +10467,654 @@
 </p:sld>
 </file>
 
+<file path=ppt/slides/slide18.xml><?xml version="1.0" encoding="utf-8"?>
+<p:sld xmlns:a="http://schemas.openxmlformats.org/drawingml/2006/main" xmlns:r="http://schemas.openxmlformats.org/officeDocument/2006/relationships" xmlns:p="http://schemas.openxmlformats.org/presentationml/2006/main">
+  <p:cSld>
+    <p:spTree>
+      <p:nvGrpSpPr>
+        <p:cNvPr id="1" name=""/>
+        <p:cNvGrpSpPr/>
+        <p:nvPr/>
+      </p:nvGrpSpPr>
+      <p:grpSpPr>
+        <a:xfrm>
+          <a:off x="0" y="0"/>
+          <a:ext cx="0" cy="0"/>
+          <a:chOff x="0" y="0"/>
+          <a:chExt cx="0" cy="0"/>
+        </a:xfrm>
+      </p:grpSpPr>
+      <p:sp>
+        <p:nvSpPr>
+          <p:cNvPr id="2" name="Rectangle 1"/>
+          <p:cNvSpPr/>
+          <p:nvPr/>
+        </p:nvSpPr>
+        <p:spPr>
+          <a:xfrm>
+            <a:off x="0" y="0"/>
+            <a:ext cx="12192119" cy="576000"/>
+          </a:xfrm>
+          <a:prstGeom prst="rect">
+            <a:avLst/>
+          </a:prstGeom>
+          <a:solidFill>
+            <a:srgbClr val="1F3864"/>
+          </a:solidFill>
+          <a:ln>
+            <a:noFill/>
+          </a:ln>
+        </p:spPr>
+        <p:style>
+          <a:lnRef idx="1">
+            <a:schemeClr val="accent1"/>
+          </a:lnRef>
+          <a:fillRef idx="3">
+            <a:schemeClr val="accent1"/>
+          </a:fillRef>
+          <a:effectRef idx="2">
+            <a:schemeClr val="accent1"/>
+          </a:effectRef>
+          <a:fontRef idx="minor">
+            <a:schemeClr val="lt1"/>
+          </a:fontRef>
+        </p:style>
+        <p:txBody>
+          <a:bodyPr rtlCol="0" anchor="ctr"/>
+          <a:lstStyle/>
+          <a:p>
+            <a:pPr algn="ctr"/>
+            <a:endParaRPr/>
+          </a:p>
+        </p:txBody>
+      </p:sp>
+      <p:sp>
+        <p:nvSpPr>
+          <p:cNvPr id="3" name="TextBox 2"/>
+          <p:cNvSpPr txBox="1"/>
+          <p:nvPr/>
+        </p:nvSpPr>
+        <p:spPr>
+          <a:xfrm>
+            <a:off x="180000" y="54000"/>
+            <a:ext cx="11832119" cy="468000"/>
+          </a:xfrm>
+          <a:prstGeom prst="rect">
+            <a:avLst/>
+          </a:prstGeom>
+          <a:noFill/>
+        </p:spPr>
+        <p:txBody>
+          <a:bodyPr wrap="none">
+            <a:spAutoFit/>
+          </a:bodyPr>
+          <a:lstStyle/>
+          <a:p>
+            <a:pPr algn="l"/>
+            <a:r>
+              <a:rPr sz="2400" b="1">
+                <a:solidFill>
+                  <a:srgbClr val="FFFFFF"/>
+                </a:solidFill>
+                <a:latin typeface="BIZ UDPGothic"/>
+              </a:rPr>
+              <a:t>本時授業のよかった点・さらなる提案</a:t>
+            </a:r>
+          </a:p>
+        </p:txBody>
+      </p:sp>
+      <p:sp>
+        <p:nvSpPr>
+          <p:cNvPr id="4" name="TextBox 3"/>
+          <p:cNvSpPr txBox="1"/>
+          <p:nvPr/>
+        </p:nvSpPr>
+        <p:spPr>
+          <a:xfrm>
+            <a:off x="288000" y="720000"/>
+            <a:ext cx="11616119" cy="5706000"/>
+          </a:xfrm>
+          <a:prstGeom prst="rect">
+            <a:avLst/>
+          </a:prstGeom>
+          <a:noFill/>
+        </p:spPr>
+        <p:txBody>
+          <a:bodyPr wrap="square">
+            <a:spAutoFit/>
+          </a:bodyPr>
+          <a:lstStyle/>
+          <a:p>
+            <a:pPr algn="l">
+              <a:lnSpc>
+                <a:spcPts val="2200"/>
+              </a:lnSpc>
+            </a:pPr>
+            <a:r>
+              <a:rPr sz="1700" b="0">
+                <a:solidFill>
+                  <a:srgbClr val="333333"/>
+                </a:solidFill>
+                <a:latin typeface="BIZ UDPGothic"/>
+              </a:rPr>
+              <a:t>【よかった点】</a:t>
+            </a:r>
+          </a:p>
+          <a:p>
+            <a:pPr algn="l">
+              <a:lnSpc>
+                <a:spcPts val="2200"/>
+              </a:lnSpc>
+            </a:pPr>
+            <a:r>
+              <a:rPr sz="1700" b="0">
+                <a:solidFill>
+                  <a:srgbClr val="333333"/>
+                </a:solidFill>
+                <a:latin typeface="BIZ UDPGothic"/>
+              </a:rPr>
+              <a:t>　・めあてと振り返りが明確に対応していた</a:t>
+            </a:r>
+          </a:p>
+          <a:p>
+            <a:pPr algn="l">
+              <a:lnSpc>
+                <a:spcPts val="2200"/>
+              </a:lnSpc>
+            </a:pPr>
+            <a:r>
+              <a:rPr sz="1700" b="0">
+                <a:solidFill>
+                  <a:srgbClr val="333333"/>
+                </a:solidFill>
+                <a:latin typeface="BIZ UDPGothic"/>
+              </a:rPr>
+              <a:t>　・振り返りの時間がしっかり確保されていた</a:t>
+            </a:r>
+          </a:p>
+          <a:p>
+            <a:pPr algn="l">
+              <a:lnSpc>
+                <a:spcPts val="2200"/>
+              </a:lnSpc>
+            </a:pPr>
+            <a:r>
+              <a:rPr sz="1700" b="0">
+                <a:solidFill>
+                  <a:srgbClr val="333333"/>
+                </a:solidFill>
+                <a:latin typeface="BIZ UDPGothic"/>
+              </a:rPr>
+              <a:t>　・「なぜそう考えたか」まで書いている生徒が見られた</a:t>
+            </a:r>
+          </a:p>
+          <a:p>
+            <a:pPr algn="l">
+              <a:lnSpc>
+                <a:spcPts val="2200"/>
+              </a:lnSpc>
+            </a:pPr>
+            <a:endParaRPr sz="1700" b="0">
+              <a:solidFill>
+                <a:srgbClr val="333333"/>
+              </a:solidFill>
+              <a:latin typeface="BIZ UDPGothic"/>
+            </a:endParaRPr>
+          </a:p>
+          <a:p>
+            <a:pPr algn="l">
+              <a:lnSpc>
+                <a:spcPts val="2200"/>
+              </a:lnSpc>
+            </a:pPr>
+            <a:r>
+              <a:rPr sz="1700" b="0">
+                <a:solidFill>
+                  <a:srgbClr val="333333"/>
+                </a:solidFill>
+                <a:latin typeface="BIZ UDPGothic"/>
+              </a:rPr>
+              <a:t>【さらなる充実のための提案】</a:t>
+            </a:r>
+          </a:p>
+          <a:p>
+            <a:pPr algn="l">
+              <a:lnSpc>
+                <a:spcPts val="2200"/>
+              </a:lnSpc>
+            </a:pPr>
+            <a:r>
+              <a:rPr sz="1700" b="0">
+                <a:solidFill>
+                  <a:srgbClr val="333333"/>
+                </a:solidFill>
+                <a:latin typeface="BIZ UDPGothic"/>
+              </a:rPr>
+              <a:t>　提案① 振り返りの「視点」の明示</a:t>
+            </a:r>
+          </a:p>
+          <a:p>
+            <a:pPr algn="l">
+              <a:lnSpc>
+                <a:spcPts val="2200"/>
+              </a:lnSpc>
+            </a:pPr>
+            <a:r>
+              <a:rPr sz="1700" b="0">
+                <a:solidFill>
+                  <a:srgbClr val="333333"/>
+                </a:solidFill>
+                <a:latin typeface="BIZ UDPGothic"/>
+              </a:rPr>
+              <a:t>　　→ めあてに対応した振り返りの問いを板書する</a:t>
+            </a:r>
+          </a:p>
+          <a:p>
+            <a:pPr algn="l">
+              <a:lnSpc>
+                <a:spcPts val="2200"/>
+              </a:lnSpc>
+            </a:pPr>
+            <a:r>
+              <a:rPr sz="1700" b="0">
+                <a:solidFill>
+                  <a:srgbClr val="333333"/>
+                </a:solidFill>
+                <a:latin typeface="BIZ UDPGothic"/>
+              </a:rPr>
+              <a:t>　提案② 振り返りの「共有」の工夫</a:t>
+            </a:r>
+          </a:p>
+          <a:p>
+            <a:pPr algn="l">
+              <a:lnSpc>
+                <a:spcPts val="2200"/>
+              </a:lnSpc>
+            </a:pPr>
+            <a:r>
+              <a:rPr sz="1700" b="0">
+                <a:solidFill>
+                  <a:srgbClr val="333333"/>
+                </a:solidFill>
+                <a:latin typeface="BIZ UDPGothic"/>
+              </a:rPr>
+              <a:t>　　→ 数名の振り返りを紹介し、学び合いに活用</a:t>
+            </a:r>
+          </a:p>
+          <a:p>
+            <a:pPr algn="l">
+              <a:lnSpc>
+                <a:spcPts val="2200"/>
+              </a:lnSpc>
+            </a:pPr>
+            <a:r>
+              <a:rPr sz="1700" b="0">
+                <a:solidFill>
+                  <a:srgbClr val="333333"/>
+                </a:solidFill>
+                <a:latin typeface="BIZ UDPGothic"/>
+              </a:rPr>
+              <a:t>　提案③ 振り返りの「蓄積と活用」</a:t>
+            </a:r>
+          </a:p>
+          <a:p>
+            <a:pPr algn="l">
+              <a:lnSpc>
+                <a:spcPts val="2200"/>
+              </a:lnSpc>
+            </a:pPr>
+            <a:r>
+              <a:rPr sz="1700" b="0">
+                <a:solidFill>
+                  <a:srgbClr val="333333"/>
+                </a:solidFill>
+                <a:latin typeface="BIZ UDPGothic"/>
+              </a:rPr>
+              <a:t>　　→ 前時の振り返りを次時の導入につなげる</a:t>
+            </a:r>
+          </a:p>
+        </p:txBody>
+      </p:sp>
+      <p:sp>
+        <p:nvSpPr>
+          <p:cNvPr id="5" name="TextBox 4"/>
+          <p:cNvSpPr txBox="1"/>
+          <p:nvPr/>
+        </p:nvSpPr>
+        <p:spPr>
+          <a:xfrm>
+            <a:off x="11292119" y="6570000"/>
+            <a:ext cx="720000" cy="216000"/>
+          </a:xfrm>
+          <a:prstGeom prst="rect">
+            <a:avLst/>
+          </a:prstGeom>
+          <a:noFill/>
+        </p:spPr>
+        <p:txBody>
+          <a:bodyPr wrap="none">
+            <a:spAutoFit/>
+          </a:bodyPr>
+          <a:lstStyle/>
+          <a:p>
+            <a:pPr algn="r"/>
+            <a:r>
+              <a:rPr sz="1000">
+                <a:solidFill>
+                  <a:srgbClr val="999999"/>
+                </a:solidFill>
+                <a:latin typeface="BIZ UDPGothic"/>
+              </a:rPr>
+              <a:t>18 / 20</a:t>
+            </a:r>
+          </a:p>
+        </p:txBody>
+      </p:sp>
+    </p:spTree>
+  </p:cSld>
+  <p:clrMapOvr>
+    <a:masterClrMapping/>
+  </p:clrMapOvr>
+</p:sld>
+</file>
+
+<file path=ppt/slides/slide19.xml><?xml version="1.0" encoding="utf-8"?>
+<p:sld xmlns:a="http://schemas.openxmlformats.org/drawingml/2006/main" xmlns:r="http://schemas.openxmlformats.org/officeDocument/2006/relationships" xmlns:p="http://schemas.openxmlformats.org/presentationml/2006/main">
+  <p:cSld>
+    <p:spTree>
+      <p:nvGrpSpPr>
+        <p:cNvPr id="1" name=""/>
+        <p:cNvGrpSpPr/>
+        <p:nvPr/>
+      </p:nvGrpSpPr>
+      <p:grpSpPr>
+        <a:xfrm>
+          <a:off x="0" y="0"/>
+          <a:ext cx="0" cy="0"/>
+          <a:chOff x="0" y="0"/>
+          <a:chExt cx="0" cy="0"/>
+        </a:xfrm>
+      </p:grpSpPr>
+      <p:sp>
+        <p:nvSpPr>
+          <p:cNvPr id="2" name="TextBox 1"/>
+          <p:cNvSpPr txBox="1"/>
+          <p:nvPr/>
+        </p:nvSpPr>
+        <p:spPr>
+          <a:xfrm>
+            <a:off x="720000" y="288000"/>
+            <a:ext cx="10752119" cy="648000"/>
+          </a:xfrm>
+          <a:prstGeom prst="rect">
+            <a:avLst/>
+          </a:prstGeom>
+          <a:noFill/>
+        </p:spPr>
+        <p:txBody>
+          <a:bodyPr wrap="square">
+            <a:spAutoFit/>
+          </a:bodyPr>
+          <a:lstStyle/>
+          <a:p>
+            <a:pPr algn="ctr"/>
+            <a:r>
+              <a:rPr sz="3400" b="1">
+                <a:solidFill>
+                  <a:srgbClr val="FFFFFF"/>
+                </a:solidFill>
+                <a:latin typeface="BIZ UDPGothic"/>
+              </a:rPr>
+              <a:t>まとめ</a:t>
+            </a:r>
+          </a:p>
+        </p:txBody>
+      </p:sp>
+      <p:sp>
+        <p:nvSpPr>
+          <p:cNvPr id="3" name="Rectangle 2"/>
+          <p:cNvSpPr/>
+          <p:nvPr/>
+        </p:nvSpPr>
+        <p:spPr>
+          <a:xfrm>
+            <a:off x="1080000" y="1007999"/>
+            <a:ext cx="10032119" cy="18000"/>
+          </a:xfrm>
+          <a:prstGeom prst="rect">
+            <a:avLst/>
+          </a:prstGeom>
+          <a:solidFill>
+            <a:srgbClr val="7FA7D8"/>
+          </a:solidFill>
+          <a:ln>
+            <a:noFill/>
+          </a:ln>
+        </p:spPr>
+        <p:style>
+          <a:lnRef idx="1">
+            <a:schemeClr val="accent1"/>
+          </a:lnRef>
+          <a:fillRef idx="3">
+            <a:schemeClr val="accent1"/>
+          </a:fillRef>
+          <a:effectRef idx="2">
+            <a:schemeClr val="accent1"/>
+          </a:effectRef>
+          <a:fontRef idx="minor">
+            <a:schemeClr val="lt1"/>
+          </a:fontRef>
+        </p:style>
+        <p:txBody>
+          <a:bodyPr rtlCol="0" anchor="ctr"/>
+          <a:lstStyle/>
+          <a:p>
+            <a:pPr algn="ctr"/>
+            <a:endParaRPr/>
+          </a:p>
+        </p:txBody>
+      </p:sp>
+      <p:sp>
+        <p:nvSpPr>
+          <p:cNvPr id="4" name="TextBox 3"/>
+          <p:cNvSpPr txBox="1"/>
+          <p:nvPr/>
+        </p:nvSpPr>
+        <p:spPr>
+          <a:xfrm>
+            <a:off x="720000" y="1116000"/>
+            <a:ext cx="10752119" cy="1800000"/>
+          </a:xfrm>
+          <a:prstGeom prst="rect">
+            <a:avLst/>
+          </a:prstGeom>
+          <a:noFill/>
+        </p:spPr>
+        <p:txBody>
+          <a:bodyPr wrap="square">
+            <a:spAutoFit/>
+          </a:bodyPr>
+          <a:lstStyle/>
+          <a:p>
+            <a:pPr algn="l">
+              <a:lnSpc>
+                <a:spcPts val="2600"/>
+              </a:lnSpc>
+            </a:pPr>
+            <a:r>
+              <a:rPr sz="1800" b="0">
+                <a:solidFill>
+                  <a:srgbClr val="D6E4FF"/>
+                </a:solidFill>
+                <a:latin typeface="BIZ UDPGothic"/>
+              </a:rPr>
+              <a:t>① 「振り返り」のある授業は、学力と相関している（データ）</a:t>
+            </a:r>
+          </a:p>
+          <a:p>
+            <a:pPr algn="l">
+              <a:lnSpc>
+                <a:spcPts val="2600"/>
+              </a:lnSpc>
+            </a:pPr>
+            <a:r>
+              <a:rPr sz="1800" b="0">
+                <a:solidFill>
+                  <a:srgbClr val="D6E4FF"/>
+                </a:solidFill>
+                <a:latin typeface="BIZ UDPGothic"/>
+              </a:rPr>
+              <a:t>② 「振り返り」は学習指導要領・答申が求める</a:t>
+            </a:r>
+          </a:p>
+          <a:p>
+            <a:pPr algn="l">
+              <a:lnSpc>
+                <a:spcPts val="2600"/>
+              </a:lnSpc>
+            </a:pPr>
+            <a:r>
+              <a:rPr sz="1800" b="0">
+                <a:solidFill>
+                  <a:srgbClr val="D6E4FF"/>
+                </a:solidFill>
+                <a:latin typeface="BIZ UDPGothic"/>
+              </a:rPr>
+              <a:t>　　「主体的な学び」の核心である（理論）</a:t>
+            </a:r>
+          </a:p>
+          <a:p>
+            <a:pPr algn="l">
+              <a:lnSpc>
+                <a:spcPts val="2600"/>
+              </a:lnSpc>
+            </a:pPr>
+            <a:r>
+              <a:rPr sz="1800" b="0">
+                <a:solidFill>
+                  <a:srgbClr val="D6E4FF"/>
+                </a:solidFill>
+                <a:latin typeface="BIZ UDPGothic"/>
+              </a:rPr>
+              <a:t>③ 「振り返り」は、形式ではなく質が問われる（実践）</a:t>
+            </a:r>
+          </a:p>
+        </p:txBody>
+      </p:sp>
+      <p:sp>
+        <p:nvSpPr>
+          <p:cNvPr id="5" name="TextBox 4"/>
+          <p:cNvSpPr txBox="1"/>
+          <p:nvPr/>
+        </p:nvSpPr>
+        <p:spPr>
+          <a:xfrm>
+            <a:off x="540000" y="3420000"/>
+            <a:ext cx="11112119" cy="1260000"/>
+          </a:xfrm>
+          <a:prstGeom prst="rect">
+            <a:avLst/>
+          </a:prstGeom>
+          <a:noFill/>
+        </p:spPr>
+        <p:txBody>
+          <a:bodyPr wrap="square">
+            <a:spAutoFit/>
+          </a:bodyPr>
+          <a:lstStyle/>
+          <a:p>
+            <a:pPr algn="ctr"/>
+            <a:r>
+              <a:rPr sz="2200" b="1">
+                <a:solidFill>
+                  <a:srgbClr val="C55A11"/>
+                </a:solidFill>
+                <a:latin typeface="BIZ UDPGothic"/>
+              </a:rPr>
+              <a:t>「一時間一時間の振り返りが、
+　子供の一生の学び方をつくる」</a:t>
+            </a:r>
+          </a:p>
+        </p:txBody>
+      </p:sp>
+      <p:sp>
+        <p:nvSpPr>
+          <p:cNvPr id="6" name="TextBox 5"/>
+          <p:cNvSpPr txBox="1"/>
+          <p:nvPr/>
+        </p:nvSpPr>
+        <p:spPr>
+          <a:xfrm>
+            <a:off x="540000" y="6210000"/>
+            <a:ext cx="11112119" cy="432000"/>
+          </a:xfrm>
+          <a:prstGeom prst="rect">
+            <a:avLst/>
+          </a:prstGeom>
+          <a:noFill/>
+        </p:spPr>
+        <p:txBody>
+          <a:bodyPr wrap="square">
+            <a:spAutoFit/>
+          </a:bodyPr>
+          <a:lstStyle/>
+          <a:p>
+            <a:pPr algn="ctr"/>
+            <a:r>
+              <a:rPr sz="1300" b="0">
+                <a:solidFill>
+                  <a:srgbClr val="8FAFD8"/>
+                </a:solidFill>
+                <a:latin typeface="BIZ UDPGothic"/>
+              </a:rPr>
+              <a:t>今日の授業から、また明日の授業改善へ。ともに学び続けましょう。</a:t>
+            </a:r>
+          </a:p>
+        </p:txBody>
+      </p:sp>
+      <p:sp>
+        <p:nvSpPr>
+          <p:cNvPr id="7" name="TextBox 6"/>
+          <p:cNvSpPr txBox="1"/>
+          <p:nvPr/>
+        </p:nvSpPr>
+        <p:spPr>
+          <a:xfrm>
+            <a:off x="11292119" y="6570000"/>
+            <a:ext cx="720000" cy="216000"/>
+          </a:xfrm>
+          <a:prstGeom prst="rect">
+            <a:avLst/>
+          </a:prstGeom>
+          <a:noFill/>
+        </p:spPr>
+        <p:txBody>
+          <a:bodyPr wrap="none">
+            <a:spAutoFit/>
+          </a:bodyPr>
+          <a:lstStyle/>
+          <a:p>
+            <a:pPr algn="r"/>
+            <a:r>
+              <a:rPr sz="1000">
+                <a:solidFill>
+                  <a:srgbClr val="999999"/>
+                </a:solidFill>
+                <a:latin typeface="BIZ UDPGothic"/>
+              </a:rPr>
+              <a:t>19 / 20</a:t>
+            </a:r>
+          </a:p>
+        </p:txBody>
+      </p:sp>
+    </p:spTree>
+  </p:cSld>
+  <p:clrMapOvr>
+    <a:masterClrMapping/>
+  </p:clrMapOvr>
+</p:sld>
+</file>
+
 <file path=ppt/slides/slide2.xml><?xml version="1.0" encoding="utf-8"?>
 <p:sld xmlns:a="http://schemas.openxmlformats.org/drawingml/2006/main" xmlns:r="http://schemas.openxmlformats.org/officeDocument/2006/relationships" xmlns:p="http://schemas.openxmlformats.org/presentationml/2006/main">
   <p:cSld>
@@ -8095,4050 +11404,7 @@
 </p:sld>
 </file>
 
-<file path=ppt/slides/slide21.xml><?xml version="1.0" encoding="utf-8"?>
-<p:sld xmlns:a="http://schemas.openxmlformats.org/drawingml/2006/main" xmlns:r="http://schemas.openxmlformats.org/officeDocument/2006/relationships" xmlns:p="http://schemas.openxmlformats.org/presentationml/2006/main">
-  <p:cSld>
-    <p:spTree>
-      <p:nvGrpSpPr>
-        <p:cNvPr id="1" name=""/>
-        <p:cNvGrpSpPr/>
-        <p:nvPr/>
-      </p:nvGrpSpPr>
-      <p:grpSpPr>
-        <a:xfrm>
-          <a:off x="0" y="0"/>
-          <a:ext cx="0" cy="0"/>
-          <a:chOff x="0" y="0"/>
-          <a:chExt cx="0" cy="0"/>
-        </a:xfrm>
-      </p:grpSpPr>
-      <p:sp>
-        <p:nvSpPr>
-          <p:cNvPr id="2" name="Rectangle 1"/>
-          <p:cNvSpPr/>
-          <p:nvPr/>
-        </p:nvSpPr>
-        <p:spPr>
-          <a:xfrm>
-            <a:off x="0" y="0"/>
-            <a:ext cx="12192119" cy="576000"/>
-          </a:xfrm>
-          <a:prstGeom prst="rect">
-            <a:avLst/>
-          </a:prstGeom>
-          <a:solidFill>
-            <a:srgbClr val="1F3864"/>
-          </a:solidFill>
-          <a:ln>
-            <a:noFill/>
-          </a:ln>
-        </p:spPr>
-        <p:style>
-          <a:lnRef idx="1">
-            <a:schemeClr val="accent1"/>
-          </a:lnRef>
-          <a:fillRef idx="3">
-            <a:schemeClr val="accent1"/>
-          </a:fillRef>
-          <a:effectRef idx="2">
-            <a:schemeClr val="accent1"/>
-          </a:effectRef>
-          <a:fontRef idx="minor">
-            <a:schemeClr val="lt1"/>
-          </a:fontRef>
-        </p:style>
-        <p:txBody>
-          <a:bodyPr rtlCol="0" anchor="ctr"/>
-          <a:lstStyle/>
-          <a:p>
-            <a:pPr algn="ctr"/>
-            <a:endParaRPr/>
-          </a:p>
-        </p:txBody>
-      </p:sp>
-      <p:sp>
-        <p:nvSpPr>
-          <p:cNvPr id="3" name="TextBox 2"/>
-          <p:cNvSpPr txBox="1"/>
-          <p:nvPr/>
-        </p:nvSpPr>
-        <p:spPr>
-          <a:xfrm>
-            <a:off x="180000" y="54000"/>
-            <a:ext cx="11832119" cy="468000"/>
-          </a:xfrm>
-          <a:prstGeom prst="rect">
-            <a:avLst/>
-          </a:prstGeom>
-          <a:noFill/>
-        </p:spPr>
-        <p:txBody>
-          <a:bodyPr wrap="none">
-            <a:spAutoFit/>
-          </a:bodyPr>
-          <a:lstStyle/>
-          <a:p>
-            <a:pPr algn="l"/>
-            <a:r>
-              <a:rPr sz="2400" b="1">
-                <a:solidFill>
-                  <a:srgbClr val="FFFFFF"/>
-                </a:solidFill>
-                <a:latin typeface="BIZ UDPGothic"/>
-              </a:rPr>
-              <a:t>本時授業のよかった点・さらなる提案</a:t>
-            </a:r>
-          </a:p>
-        </p:txBody>
-      </p:sp>
-      <p:sp>
-        <p:nvSpPr>
-          <p:cNvPr id="4" name="TextBox 3"/>
-          <p:cNvSpPr txBox="1"/>
-          <p:nvPr/>
-        </p:nvSpPr>
-        <p:spPr>
-          <a:xfrm>
-            <a:off x="288000" y="720000"/>
-            <a:ext cx="11616119" cy="5706000"/>
-          </a:xfrm>
-          <a:prstGeom prst="rect">
-            <a:avLst/>
-          </a:prstGeom>
-          <a:noFill/>
-        </p:spPr>
-        <p:txBody>
-          <a:bodyPr wrap="square">
-            <a:spAutoFit/>
-          </a:bodyPr>
-          <a:lstStyle/>
-          <a:p>
-            <a:pPr algn="l">
-              <a:lnSpc>
-                <a:spcPts val="2200"/>
-              </a:lnSpc>
-            </a:pPr>
-            <a:r>
-              <a:rPr sz="1700" b="0">
-                <a:solidFill>
-                  <a:srgbClr val="333333"/>
-                </a:solidFill>
-                <a:latin typeface="BIZ UDPGothic"/>
-              </a:rPr>
-              <a:t>【よかった点】</a:t>
-            </a:r>
-          </a:p>
-          <a:p>
-            <a:pPr algn="l">
-              <a:lnSpc>
-                <a:spcPts val="2200"/>
-              </a:lnSpc>
-            </a:pPr>
-            <a:r>
-              <a:rPr sz="1700" b="0">
-                <a:solidFill>
-                  <a:srgbClr val="333333"/>
-                </a:solidFill>
-                <a:latin typeface="BIZ UDPGothic"/>
-              </a:rPr>
-              <a:t>　・めあてと振り返りが明確に対応していた</a:t>
-            </a:r>
-          </a:p>
-          <a:p>
-            <a:pPr algn="l">
-              <a:lnSpc>
-                <a:spcPts val="2200"/>
-              </a:lnSpc>
-            </a:pPr>
-            <a:r>
-              <a:rPr sz="1700" b="0">
-                <a:solidFill>
-                  <a:srgbClr val="333333"/>
-                </a:solidFill>
-                <a:latin typeface="BIZ UDPGothic"/>
-              </a:rPr>
-              <a:t>　・振り返りの時間がしっかり確保されていた</a:t>
-            </a:r>
-          </a:p>
-          <a:p>
-            <a:pPr algn="l">
-              <a:lnSpc>
-                <a:spcPts val="2200"/>
-              </a:lnSpc>
-            </a:pPr>
-            <a:r>
-              <a:rPr sz="1700" b="0">
-                <a:solidFill>
-                  <a:srgbClr val="333333"/>
-                </a:solidFill>
-                <a:latin typeface="BIZ UDPGothic"/>
-              </a:rPr>
-              <a:t>　・「なぜそう考えたか」まで書いている生徒が見られた</a:t>
-            </a:r>
-          </a:p>
-          <a:p>
-            <a:pPr algn="l">
-              <a:lnSpc>
-                <a:spcPts val="2200"/>
-              </a:lnSpc>
-            </a:pPr>
-            <a:endParaRPr sz="1700" b="0">
-              <a:solidFill>
-                <a:srgbClr val="333333"/>
-              </a:solidFill>
-              <a:latin typeface="BIZ UDPGothic"/>
-            </a:endParaRPr>
-          </a:p>
-          <a:p>
-            <a:pPr algn="l">
-              <a:lnSpc>
-                <a:spcPts val="2200"/>
-              </a:lnSpc>
-            </a:pPr>
-            <a:r>
-              <a:rPr sz="1700" b="0">
-                <a:solidFill>
-                  <a:srgbClr val="333333"/>
-                </a:solidFill>
-                <a:latin typeface="BIZ UDPGothic"/>
-              </a:rPr>
-              <a:t>【さらなる充実のための提案】</a:t>
-            </a:r>
-          </a:p>
-          <a:p>
-            <a:pPr algn="l">
-              <a:lnSpc>
-                <a:spcPts val="2200"/>
-              </a:lnSpc>
-            </a:pPr>
-            <a:r>
-              <a:rPr sz="1700" b="0">
-                <a:solidFill>
-                  <a:srgbClr val="333333"/>
-                </a:solidFill>
-                <a:latin typeface="BIZ UDPGothic"/>
-              </a:rPr>
-              <a:t>　提案① 振り返りの「視点」の明示</a:t>
-            </a:r>
-          </a:p>
-          <a:p>
-            <a:pPr algn="l">
-              <a:lnSpc>
-                <a:spcPts val="2200"/>
-              </a:lnSpc>
-            </a:pPr>
-            <a:r>
-              <a:rPr sz="1700" b="0">
-                <a:solidFill>
-                  <a:srgbClr val="333333"/>
-                </a:solidFill>
-                <a:latin typeface="BIZ UDPGothic"/>
-              </a:rPr>
-              <a:t>　　→ めあてに対応した振り返りの問いを板書する</a:t>
-            </a:r>
-          </a:p>
-          <a:p>
-            <a:pPr algn="l">
-              <a:lnSpc>
-                <a:spcPts val="2200"/>
-              </a:lnSpc>
-            </a:pPr>
-            <a:r>
-              <a:rPr sz="1700" b="0">
-                <a:solidFill>
-                  <a:srgbClr val="333333"/>
-                </a:solidFill>
-                <a:latin typeface="BIZ UDPGothic"/>
-              </a:rPr>
-              <a:t>　提案② 振り返りの「共有」の工夫</a:t>
-            </a:r>
-          </a:p>
-          <a:p>
-            <a:pPr algn="l">
-              <a:lnSpc>
-                <a:spcPts val="2200"/>
-              </a:lnSpc>
-            </a:pPr>
-            <a:r>
-              <a:rPr sz="1700" b="0">
-                <a:solidFill>
-                  <a:srgbClr val="333333"/>
-                </a:solidFill>
-                <a:latin typeface="BIZ UDPGothic"/>
-              </a:rPr>
-              <a:t>　　→ 数名の振り返りを紹介し、学び合いに活用</a:t>
-            </a:r>
-          </a:p>
-          <a:p>
-            <a:pPr algn="l">
-              <a:lnSpc>
-                <a:spcPts val="2200"/>
-              </a:lnSpc>
-            </a:pPr>
-            <a:r>
-              <a:rPr sz="1700" b="0">
-                <a:solidFill>
-                  <a:srgbClr val="333333"/>
-                </a:solidFill>
-                <a:latin typeface="BIZ UDPGothic"/>
-              </a:rPr>
-              <a:t>　提案③ 振り返りの「蓄積と活用」</a:t>
-            </a:r>
-          </a:p>
-          <a:p>
-            <a:pPr algn="l">
-              <a:lnSpc>
-                <a:spcPts val="2200"/>
-              </a:lnSpc>
-            </a:pPr>
-            <a:r>
-              <a:rPr sz="1700" b="0">
-                <a:solidFill>
-                  <a:srgbClr val="333333"/>
-                </a:solidFill>
-                <a:latin typeface="BIZ UDPGothic"/>
-              </a:rPr>
-              <a:t>　　→ 前時の振り返りを次時の導入につなげる</a:t>
-            </a:r>
-          </a:p>
-        </p:txBody>
-      </p:sp>
-      <p:sp>
-        <p:nvSpPr>
-          <p:cNvPr id="5" name="TextBox 4"/>
-          <p:cNvSpPr txBox="1"/>
-          <p:nvPr/>
-        </p:nvSpPr>
-        <p:spPr>
-          <a:xfrm>
-            <a:off x="11292119" y="6570000"/>
-            <a:ext cx="720000" cy="216000"/>
-          </a:xfrm>
-          <a:prstGeom prst="rect">
-            <a:avLst/>
-          </a:prstGeom>
-          <a:noFill/>
-        </p:spPr>
-        <p:txBody>
-          <a:bodyPr wrap="none">
-            <a:spAutoFit/>
-          </a:bodyPr>
-          <a:lstStyle/>
-          <a:p>
-            <a:pPr algn="r"/>
-            <a:r>
-              <a:rPr sz="1000">
-                <a:solidFill>
-                  <a:srgbClr val="999999"/>
-                </a:solidFill>
-                <a:latin typeface="BIZ UDPGothic"/>
-              </a:rPr>
-              <a:t>18 / 20</a:t>
-            </a:r>
-          </a:p>
-        </p:txBody>
-      </p:sp>
-    </p:spTree>
-  </p:cSld>
-  <p:clrMapOvr>
-    <a:masterClrMapping/>
-  </p:clrMapOvr>
-</p:sld>
-</file>
-
-<file path=ppt/slides/slide23.xml><?xml version="1.0" encoding="utf-8"?>
-<p:sld xmlns:a="http://schemas.openxmlformats.org/drawingml/2006/main" xmlns:r="http://schemas.openxmlformats.org/officeDocument/2006/relationships" xmlns:p="http://schemas.openxmlformats.org/presentationml/2006/main">
-  <p:cSld>
-    <p:spTree>
-      <p:nvGrpSpPr>
-        <p:cNvPr id="1" name=""/>
-        <p:cNvGrpSpPr/>
-        <p:nvPr/>
-      </p:nvGrpSpPr>
-      <p:grpSpPr>
-        <a:xfrm>
-          <a:off x="0" y="0"/>
-          <a:ext cx="0" cy="0"/>
-          <a:chOff x="0" y="0"/>
-          <a:chExt cx="0" cy="0"/>
-        </a:xfrm>
-      </p:grpSpPr>
-      <p:sp>
-        <p:nvSpPr>
-          <p:cNvPr id="2" name="Rectangle 1"/>
-          <p:cNvSpPr/>
-          <p:nvPr/>
-        </p:nvSpPr>
-        <p:spPr>
-          <a:xfrm>
-            <a:off x="0" y="0"/>
-            <a:ext cx="12192119" cy="576000"/>
-          </a:xfrm>
-          <a:prstGeom prst="rect">
-            <a:avLst/>
-          </a:prstGeom>
-          <a:solidFill>
-            <a:srgbClr val="1F3864"/>
-          </a:solidFill>
-          <a:ln>
-            <a:noFill/>
-          </a:ln>
-        </p:spPr>
-        <p:style>
-          <a:lnRef idx="1">
-            <a:schemeClr val="accent1"/>
-          </a:lnRef>
-          <a:fillRef idx="3">
-            <a:schemeClr val="accent1"/>
-          </a:fillRef>
-          <a:effectRef idx="2">
-            <a:schemeClr val="accent1"/>
-          </a:effectRef>
-          <a:fontRef idx="minor">
-            <a:schemeClr val="lt1"/>
-          </a:fontRef>
-        </p:style>
-        <p:txBody>
-          <a:bodyPr rtlCol="0" anchor="ctr"/>
-          <a:lstStyle/>
-          <a:p>
-            <a:pPr algn="ctr"/>
-            <a:endParaRPr/>
-          </a:p>
-        </p:txBody>
-      </p:sp>
-      <p:sp>
-        <p:nvSpPr>
-          <p:cNvPr id="3" name="TextBox 2"/>
-          <p:cNvSpPr txBox="1"/>
-          <p:nvPr/>
-        </p:nvSpPr>
-        <p:spPr>
-          <a:xfrm>
-            <a:off x="180000" y="54000"/>
-            <a:ext cx="11832119" cy="468000"/>
-          </a:xfrm>
-          <a:prstGeom prst="rect">
-            <a:avLst/>
-          </a:prstGeom>
-          <a:noFill/>
-        </p:spPr>
-        <p:txBody>
-          <a:bodyPr wrap="none">
-            <a:spAutoFit/>
-          </a:bodyPr>
-          <a:lstStyle/>
-          <a:p>
-            <a:pPr algn="l"/>
-            <a:r>
-              <a:rPr sz="2400" b="1">
-                <a:solidFill>
-                  <a:srgbClr val="FFFFFF"/>
-                </a:solidFill>
-                <a:latin typeface="BIZ UDPGothic"/>
-              </a:rPr>
-              <a:t>H27「論点整理」→ R7「論点整理」の流れ</a:t>
-            </a:r>
-          </a:p>
-        </p:txBody>
-      </p:sp>
-      <p:sp>
-        <p:nvSpPr>
-          <p:cNvPr id="4" name="TextBox 3"/>
-          <p:cNvSpPr txBox="1"/>
-          <p:nvPr/>
-        </p:nvSpPr>
-        <p:spPr>
-          <a:xfrm>
-            <a:off x="288000" y="720000"/>
-            <a:ext cx="11616119" cy="5418022"/>
-          </a:xfrm>
-          <a:prstGeom prst="rect">
-            <a:avLst/>
-          </a:prstGeom>
-          <a:noFill/>
-        </p:spPr>
-        <p:txBody>
-          <a:bodyPr wrap="square">
-            <a:spAutoFit/>
-          </a:bodyPr>
-          <a:lstStyle/>
-          <a:p>
-            <a:pPr algn="l">
-              <a:lnSpc>
-                <a:spcPts val="3500"/>
-              </a:lnSpc>
-            </a:pPr>
-            <a:r>
-              <a:rPr sz="2800" b="0" dirty="0">
-                <a:solidFill>
-                  <a:srgbClr val="333333"/>
-                </a:solidFill>
-                <a:latin typeface="BIZ UDPGothic"/>
-              </a:rPr>
-              <a:t>■ ２つの「論点整理」が示す一貫したメッセージ</a:t>
-            </a:r>
-          </a:p>
-          <a:p>
-            <a:pPr algn="l">
-              <a:lnSpc>
-                <a:spcPts val="3500"/>
-              </a:lnSpc>
-            </a:pPr>
-            <a:endParaRPr sz="2800" b="0" dirty="0">
-              <a:solidFill>
-                <a:srgbClr val="333333"/>
-              </a:solidFill>
-              <a:latin typeface="BIZ UDPGothic"/>
-            </a:endParaRPr>
-          </a:p>
-          <a:p>
-            <a:pPr algn="l">
-              <a:lnSpc>
-                <a:spcPts val="3500"/>
-              </a:lnSpc>
-            </a:pPr>
-            <a:r>
-              <a:rPr sz="2800" b="0" dirty="0">
-                <a:solidFill>
-                  <a:srgbClr val="333333"/>
-                </a:solidFill>
-                <a:latin typeface="BIZ UDPGothic"/>
-              </a:rPr>
-              <a:t>　平成27年（2015）「</a:t>
-            </a:r>
-            <a:r>
-              <a:rPr sz="2800" b="0" dirty="0" err="1">
-                <a:solidFill>
-                  <a:srgbClr val="333333"/>
-                </a:solidFill>
-                <a:latin typeface="BIZ UDPGothic"/>
-              </a:rPr>
-              <a:t>論点整理</a:t>
-            </a:r>
-            <a:r>
-              <a:rPr sz="2800" b="0" dirty="0">
-                <a:solidFill>
-                  <a:srgbClr val="333333"/>
-                </a:solidFill>
-                <a:latin typeface="BIZ UDPGothic"/>
-              </a:rPr>
-              <a:t>」</a:t>
-            </a:r>
-          </a:p>
-          <a:p>
-            <a:pPr algn="l">
-              <a:lnSpc>
-                <a:spcPts val="3500"/>
-              </a:lnSpc>
-            </a:pPr>
-            <a:r>
-              <a:rPr sz="2800" b="0" dirty="0">
-                <a:solidFill>
-                  <a:srgbClr val="333333"/>
-                </a:solidFill>
-                <a:latin typeface="BIZ UDPGothic"/>
-              </a:rPr>
-              <a:t>　　↓ 学習指導要領改訂（H29）へ</a:t>
-            </a:r>
-          </a:p>
-          <a:p>
-            <a:pPr algn="l">
-              <a:lnSpc>
-                <a:spcPts val="3500"/>
-              </a:lnSpc>
-            </a:pPr>
-            <a:r>
-              <a:rPr sz="2800" b="0" dirty="0">
-                <a:solidFill>
-                  <a:srgbClr val="333333"/>
-                </a:solidFill>
-                <a:latin typeface="BIZ UDPGothic"/>
-              </a:rPr>
-              <a:t>　令和３年（2021）「</a:t>
-            </a:r>
-            <a:r>
-              <a:rPr sz="2800" b="0" dirty="0" err="1">
-                <a:solidFill>
-                  <a:srgbClr val="333333"/>
-                </a:solidFill>
-                <a:latin typeface="BIZ UDPGothic"/>
-              </a:rPr>
-              <a:t>令和の日本型学校教育」答申</a:t>
-            </a:r>
-            <a:endParaRPr sz="2800" b="0" dirty="0">
-              <a:solidFill>
-                <a:srgbClr val="333333"/>
-              </a:solidFill>
-              <a:latin typeface="BIZ UDPGothic"/>
-            </a:endParaRPr>
-          </a:p>
-          <a:p>
-            <a:pPr algn="l">
-              <a:lnSpc>
-                <a:spcPts val="3500"/>
-              </a:lnSpc>
-            </a:pPr>
-            <a:r>
-              <a:rPr sz="2800" b="0" dirty="0">
-                <a:solidFill>
-                  <a:srgbClr val="333333"/>
-                </a:solidFill>
-                <a:latin typeface="BIZ UDPGothic"/>
-              </a:rPr>
-              <a:t>　　↓ </a:t>
-            </a:r>
-            <a:r>
-              <a:rPr sz="2800" b="0" dirty="0" err="1">
-                <a:solidFill>
-                  <a:srgbClr val="333333"/>
-                </a:solidFill>
-                <a:latin typeface="BIZ UDPGothic"/>
-              </a:rPr>
-              <a:t>さらなる深化へ</a:t>
-            </a:r>
-            <a:endParaRPr sz="2800" b="0" dirty="0">
-              <a:solidFill>
-                <a:srgbClr val="333333"/>
-              </a:solidFill>
-              <a:latin typeface="BIZ UDPGothic"/>
-            </a:endParaRPr>
-          </a:p>
-          <a:p>
-            <a:pPr algn="l">
-              <a:lnSpc>
-                <a:spcPts val="3500"/>
-              </a:lnSpc>
-            </a:pPr>
-            <a:r>
-              <a:rPr sz="2800" b="0" dirty="0">
-                <a:solidFill>
-                  <a:srgbClr val="333333"/>
-                </a:solidFill>
-                <a:latin typeface="BIZ UDPGothic"/>
-              </a:rPr>
-              <a:t>　令和７年（2025）「</a:t>
-            </a:r>
-            <a:r>
-              <a:rPr sz="2800" b="0" dirty="0" err="1">
-                <a:solidFill>
-                  <a:srgbClr val="333333"/>
-                </a:solidFill>
-                <a:latin typeface="BIZ UDPGothic"/>
-              </a:rPr>
-              <a:t>論点整理</a:t>
-            </a:r>
-            <a:r>
-              <a:rPr sz="2800" b="0" dirty="0">
-                <a:solidFill>
-                  <a:srgbClr val="333333"/>
-                </a:solidFill>
-                <a:latin typeface="BIZ UDPGothic"/>
-              </a:rPr>
-              <a:t>」</a:t>
-            </a:r>
-          </a:p>
-          <a:p>
-            <a:pPr algn="l">
-              <a:lnSpc>
-                <a:spcPts val="3500"/>
-              </a:lnSpc>
-            </a:pPr>
-            <a:r>
-              <a:rPr sz="2800" b="0" dirty="0">
-                <a:solidFill>
-                  <a:srgbClr val="333333"/>
-                </a:solidFill>
-                <a:latin typeface="BIZ UDPGothic"/>
-              </a:rPr>
-              <a:t>　　↓ 次期学習指導要領改訂（R8〜9年告示予定）へ</a:t>
-            </a:r>
-          </a:p>
-          <a:p>
-            <a:pPr algn="l">
-              <a:lnSpc>
-                <a:spcPts val="3500"/>
-              </a:lnSpc>
-            </a:pPr>
-            <a:endParaRPr sz="2800" b="0" dirty="0">
-              <a:solidFill>
-                <a:srgbClr val="333333"/>
-              </a:solidFill>
-              <a:latin typeface="BIZ UDPGothic"/>
-            </a:endParaRPr>
-          </a:p>
-          <a:p>
-            <a:pPr algn="l">
-              <a:lnSpc>
-                <a:spcPts val="3500"/>
-              </a:lnSpc>
-            </a:pPr>
-            <a:r>
-              <a:rPr sz="2800" b="0" dirty="0">
-                <a:solidFill>
-                  <a:srgbClr val="333333"/>
-                </a:solidFill>
-                <a:latin typeface="BIZ UDPGothic"/>
-              </a:rPr>
-              <a:t>■ </a:t>
-            </a:r>
-            <a:r>
-              <a:rPr sz="2800" b="0" dirty="0" err="1">
-                <a:solidFill>
-                  <a:srgbClr val="333333"/>
-                </a:solidFill>
-                <a:latin typeface="BIZ UDPGothic"/>
-              </a:rPr>
-              <a:t>一貫して求められていること</a:t>
-            </a:r>
-            <a:r>
-              <a:rPr sz="2800" b="0" dirty="0">
-                <a:solidFill>
-                  <a:srgbClr val="333333"/>
-                </a:solidFill>
-                <a:latin typeface="BIZ UDPGothic"/>
-              </a:rPr>
-              <a:t>：</a:t>
-            </a:r>
-          </a:p>
-          <a:p>
-            <a:pPr algn="l">
-              <a:lnSpc>
-                <a:spcPts val="3500"/>
-              </a:lnSpc>
-            </a:pPr>
-            <a:r>
-              <a:rPr sz="2800" b="0" dirty="0">
-                <a:solidFill>
-                  <a:srgbClr val="333333"/>
-                </a:solidFill>
-                <a:latin typeface="BIZ UDPGothic"/>
-              </a:rPr>
-              <a:t>　「</a:t>
-            </a:r>
-            <a:r>
-              <a:rPr sz="2800" b="0" dirty="0" err="1">
-                <a:solidFill>
-                  <a:srgbClr val="333333"/>
-                </a:solidFill>
-                <a:latin typeface="BIZ UDPGothic"/>
-              </a:rPr>
-              <a:t>子供が自分の学びを調整できる力</a:t>
-            </a:r>
-            <a:r>
-              <a:rPr sz="2800" b="0" dirty="0">
-                <a:solidFill>
-                  <a:srgbClr val="333333"/>
-                </a:solidFill>
-                <a:latin typeface="BIZ UDPGothic"/>
-              </a:rPr>
-              <a:t>」</a:t>
-            </a:r>
-          </a:p>
-          <a:p>
-            <a:pPr algn="l">
-              <a:lnSpc>
-                <a:spcPts val="3500"/>
-              </a:lnSpc>
-            </a:pPr>
-            <a:r>
-              <a:rPr sz="2800" b="0" dirty="0">
-                <a:solidFill>
-                  <a:srgbClr val="333333"/>
-                </a:solidFill>
-                <a:latin typeface="BIZ UDPGothic"/>
-              </a:rPr>
-              <a:t>　　　　</a:t>
-            </a:r>
-            <a:r>
-              <a:rPr sz="2800" b="0" dirty="0" err="1">
-                <a:solidFill>
-                  <a:srgbClr val="333333"/>
-                </a:solidFill>
-                <a:latin typeface="BIZ UDPGothic"/>
-              </a:rPr>
-              <a:t>振り返りはその根幹</a:t>
-            </a:r>
-            <a:endParaRPr sz="2800" b="0" dirty="0">
-              <a:solidFill>
-                <a:srgbClr val="333333"/>
-              </a:solidFill>
-              <a:latin typeface="BIZ UDPGothic"/>
-            </a:endParaRPr>
-          </a:p>
-        </p:txBody>
-      </p:sp>
-      <p:sp>
-        <p:nvSpPr>
-          <p:cNvPr id="5" name="TextBox 4"/>
-          <p:cNvSpPr txBox="1"/>
-          <p:nvPr/>
-        </p:nvSpPr>
-        <p:spPr>
-          <a:xfrm>
-            <a:off x="11292119" y="6570000"/>
-            <a:ext cx="720000" cy="216000"/>
-          </a:xfrm>
-          <a:prstGeom prst="rect">
-            <a:avLst/>
-          </a:prstGeom>
-          <a:noFill/>
-        </p:spPr>
-        <p:txBody>
-          <a:bodyPr wrap="none">
-            <a:spAutoFit/>
-          </a:bodyPr>
-          <a:lstStyle/>
-          <a:p>
-            <a:pPr algn="r"/>
-            <a:r>
-              <a:rPr sz="1000">
-                <a:solidFill>
-                  <a:srgbClr val="999999"/>
-                </a:solidFill>
-                <a:latin typeface="BIZ UDPGothic"/>
-              </a:rPr>
-              <a:t>9 / 20</a:t>
-            </a:r>
-          </a:p>
-        </p:txBody>
-      </p:sp>
-    </p:spTree>
-  </p:cSld>
-  <p:clrMapOvr>
-    <a:masterClrMapping/>
-  </p:clrMapOvr>
-</p:sld>
-</file>
-
-<file path=ppt/slides/slide24.xml><?xml version="1.0" encoding="utf-8"?>
-<p:sld xmlns:a="http://schemas.openxmlformats.org/drawingml/2006/main" xmlns:r="http://schemas.openxmlformats.org/officeDocument/2006/relationships" xmlns:p="http://schemas.openxmlformats.org/presentationml/2006/main">
-  <p:cSld>
-    <p:spTree>
-      <p:nvGrpSpPr>
-        <p:cNvPr id="1" name=""/>
-        <p:cNvGrpSpPr/>
-        <p:nvPr/>
-      </p:nvGrpSpPr>
-      <p:grpSpPr>
-        <a:xfrm>
-          <a:off x="0" y="0"/>
-          <a:ext cx="0" cy="0"/>
-          <a:chOff x="0" y="0"/>
-          <a:chExt cx="0" cy="0"/>
-        </a:xfrm>
-      </p:grpSpPr>
-      <p:sp>
-        <p:nvSpPr>
-          <p:cNvPr id="2" name="Rectangle 1"/>
-          <p:cNvSpPr/>
-          <p:nvPr/>
-        </p:nvSpPr>
-        <p:spPr>
-          <a:xfrm>
-            <a:off x="0" y="0"/>
-            <a:ext cx="12192119" cy="576000"/>
-          </a:xfrm>
-          <a:prstGeom prst="rect">
-            <a:avLst/>
-          </a:prstGeom>
-          <a:solidFill>
-            <a:srgbClr val="1F3864"/>
-          </a:solidFill>
-          <a:ln>
-            <a:noFill/>
-          </a:ln>
-        </p:spPr>
-        <p:style>
-          <a:lnRef idx="1">
-            <a:schemeClr val="accent1"/>
-          </a:lnRef>
-          <a:fillRef idx="3">
-            <a:schemeClr val="accent1"/>
-          </a:fillRef>
-          <a:effectRef idx="2">
-            <a:schemeClr val="accent1"/>
-          </a:effectRef>
-          <a:fontRef idx="minor">
-            <a:schemeClr val="lt1"/>
-          </a:fontRef>
-        </p:style>
-        <p:txBody>
-          <a:bodyPr rtlCol="0" anchor="ctr"/>
-          <a:lstStyle/>
-          <a:p>
-            <a:pPr algn="ctr"/>
-            <a:endParaRPr/>
-          </a:p>
-        </p:txBody>
-      </p:sp>
-      <p:sp>
-        <p:nvSpPr>
-          <p:cNvPr id="3" name="TextBox 2"/>
-          <p:cNvSpPr txBox="1"/>
-          <p:nvPr/>
-        </p:nvSpPr>
-        <p:spPr>
-          <a:xfrm>
-            <a:off x="180000" y="54000"/>
-            <a:ext cx="11832119" cy="468000"/>
-          </a:xfrm>
-          <a:prstGeom prst="rect">
-            <a:avLst/>
-          </a:prstGeom>
-          <a:noFill/>
-        </p:spPr>
-        <p:txBody>
-          <a:bodyPr wrap="none">
-            <a:spAutoFit/>
-          </a:bodyPr>
-          <a:lstStyle/>
-          <a:p>
-            <a:pPr algn="l"/>
-            <a:r>
-              <a:rPr sz="2400" b="1">
-                <a:solidFill>
-                  <a:srgbClr val="FFFFFF"/>
-                </a:solidFill>
-                <a:latin typeface="BIZ UDPGothic"/>
-              </a:rPr>
-              <a:t>H27「論点整理」の核心</a:t>
-            </a:r>
-          </a:p>
-        </p:txBody>
-      </p:sp>
-      <p:sp>
-        <p:nvSpPr>
-          <p:cNvPr id="4" name="TextBox 3"/>
-          <p:cNvSpPr txBox="1"/>
-          <p:nvPr/>
-        </p:nvSpPr>
-        <p:spPr>
-          <a:xfrm>
-            <a:off x="288000" y="720000"/>
-            <a:ext cx="11616119" cy="5418022"/>
-          </a:xfrm>
-          <a:prstGeom prst="rect">
-            <a:avLst/>
-          </a:prstGeom>
-          <a:noFill/>
-        </p:spPr>
-        <p:txBody>
-          <a:bodyPr wrap="square">
-            <a:spAutoFit/>
-          </a:bodyPr>
-          <a:lstStyle/>
-          <a:p>
-            <a:pPr algn="l">
-              <a:lnSpc>
-                <a:spcPts val="3500"/>
-              </a:lnSpc>
-            </a:pPr>
-            <a:r>
-              <a:rPr sz="2800" b="0" dirty="0">
-                <a:solidFill>
-                  <a:srgbClr val="333333"/>
-                </a:solidFill>
-                <a:latin typeface="BIZ UDPGothic"/>
-              </a:rPr>
-              <a:t>■ アクティブ・ラーニングの３つの視点</a:t>
-            </a:r>
-          </a:p>
-          <a:p>
-            <a:pPr algn="l">
-              <a:lnSpc>
-                <a:spcPts val="3500"/>
-              </a:lnSpc>
-            </a:pPr>
-            <a:endParaRPr sz="2800" b="0" dirty="0">
-              <a:solidFill>
-                <a:srgbClr val="333333"/>
-              </a:solidFill>
-              <a:latin typeface="BIZ UDPGothic"/>
-            </a:endParaRPr>
-          </a:p>
-          <a:p>
-            <a:pPr>
-              <a:lnSpc>
-                <a:spcPts val="3500"/>
-              </a:lnSpc>
-            </a:pPr>
-            <a:r>
-              <a:rPr lang="ja-JP" altLang="en-US" sz="2800" dirty="0">
-                <a:solidFill>
-                  <a:srgbClr val="333333"/>
-                </a:solidFill>
-                <a:latin typeface="メイリオ" panose="020B0604030504040204" pitchFamily="50" charset="-128"/>
-                <a:ea typeface="メイリオ" panose="020B0604030504040204" pitchFamily="50" charset="-128"/>
-              </a:rPr>
-              <a:t>　① 主体的な学び　←ここに「振り返り」が明記</a:t>
-            </a:r>
-          </a:p>
-          <a:p>
-            <a:pPr>
-              <a:lnSpc>
-                <a:spcPts val="3500"/>
-              </a:lnSpc>
-            </a:pPr>
-            <a:r>
-              <a:rPr lang="ja-JP" altLang="en-US" sz="2800" dirty="0">
-                <a:solidFill>
-                  <a:srgbClr val="333333"/>
-                </a:solidFill>
-                <a:latin typeface="メイリオ" panose="020B0604030504040204" pitchFamily="50" charset="-128"/>
-                <a:ea typeface="メイリオ" panose="020B0604030504040204" pitchFamily="50" charset="-128"/>
-              </a:rPr>
-              <a:t>　　→「学習を自己調整しながら学ぼうとする態度」</a:t>
-            </a:r>
-          </a:p>
-          <a:p>
-            <a:pPr algn="l">
-              <a:lnSpc>
-                <a:spcPts val="3500"/>
-              </a:lnSpc>
-            </a:pPr>
-            <a:r>
-              <a:rPr lang="ja-JP" altLang="en-US" sz="2800" dirty="0">
-                <a:solidFill>
-                  <a:srgbClr val="333333"/>
-                </a:solidFill>
-                <a:latin typeface="メイリオ" panose="020B0604030504040204" pitchFamily="50" charset="-128"/>
-                <a:ea typeface="メイリオ" panose="020B0604030504040204" pitchFamily="50" charset="-128"/>
-              </a:rPr>
-              <a:t>　</a:t>
-            </a:r>
-            <a:r>
-              <a:rPr sz="2800" b="0" dirty="0">
-                <a:solidFill>
-                  <a:srgbClr val="333333"/>
-                </a:solidFill>
-                <a:latin typeface="メイリオ" panose="020B0604030504040204" pitchFamily="50" charset="-128"/>
-                <a:ea typeface="メイリオ" panose="020B0604030504040204" pitchFamily="50" charset="-128"/>
-              </a:rPr>
-              <a:t>② </a:t>
-            </a:r>
-            <a:r>
-              <a:rPr sz="2800" b="0" dirty="0" err="1">
-                <a:solidFill>
-                  <a:srgbClr val="333333"/>
-                </a:solidFill>
-                <a:latin typeface="メイリオ" panose="020B0604030504040204" pitchFamily="50" charset="-128"/>
-                <a:ea typeface="メイリオ" panose="020B0604030504040204" pitchFamily="50" charset="-128"/>
-              </a:rPr>
-              <a:t>対話的な学び</a:t>
-            </a:r>
-            <a:endParaRPr sz="2800" b="0" dirty="0">
-              <a:solidFill>
-                <a:srgbClr val="333333"/>
-              </a:solidFill>
-              <a:latin typeface="メイリオ" panose="020B0604030504040204" pitchFamily="50" charset="-128"/>
-              <a:ea typeface="メイリオ" panose="020B0604030504040204" pitchFamily="50" charset="-128"/>
-            </a:endParaRPr>
-          </a:p>
-          <a:p>
-            <a:pPr algn="l">
-              <a:lnSpc>
-                <a:spcPts val="3500"/>
-              </a:lnSpc>
-            </a:pPr>
-            <a:r>
-              <a:rPr sz="2800" b="0" dirty="0">
-                <a:solidFill>
-                  <a:srgbClr val="333333"/>
-                </a:solidFill>
-                <a:latin typeface="メイリオ" panose="020B0604030504040204" pitchFamily="50" charset="-128"/>
-                <a:ea typeface="メイリオ" panose="020B0604030504040204" pitchFamily="50" charset="-128"/>
-              </a:rPr>
-              <a:t>　　→ </a:t>
-            </a:r>
-            <a:r>
-              <a:rPr sz="2800" b="0" dirty="0" err="1">
-                <a:solidFill>
-                  <a:srgbClr val="333333"/>
-                </a:solidFill>
-                <a:latin typeface="メイリオ" panose="020B0604030504040204" pitchFamily="50" charset="-128"/>
-                <a:ea typeface="メイリオ" panose="020B0604030504040204" pitchFamily="50" charset="-128"/>
-              </a:rPr>
-              <a:t>他者との協働・対話を通じた思考の広がり</a:t>
-            </a:r>
-            <a:endParaRPr lang="en-US" sz="2800" b="0" dirty="0">
-              <a:solidFill>
-                <a:srgbClr val="333333"/>
-              </a:solidFill>
-              <a:latin typeface="メイリオ" panose="020B0604030504040204" pitchFamily="50" charset="-128"/>
-              <a:ea typeface="メイリオ" panose="020B0604030504040204" pitchFamily="50" charset="-128"/>
-            </a:endParaRPr>
-          </a:p>
-          <a:p>
-            <a:pPr>
-              <a:lnSpc>
-                <a:spcPts val="3500"/>
-              </a:lnSpc>
-            </a:pPr>
-            <a:r>
-              <a:rPr lang="ja-JP" altLang="en-US" sz="2800" dirty="0">
-                <a:solidFill>
-                  <a:srgbClr val="333333"/>
-                </a:solidFill>
-                <a:latin typeface="メイリオ" panose="020B0604030504040204" pitchFamily="50" charset="-128"/>
-                <a:ea typeface="メイリオ" panose="020B0604030504040204" pitchFamily="50" charset="-128"/>
-              </a:rPr>
-              <a:t>　③ 深い学び</a:t>
-            </a:r>
-          </a:p>
-          <a:p>
-            <a:pPr>
-              <a:lnSpc>
-                <a:spcPts val="3500"/>
-              </a:lnSpc>
-            </a:pPr>
-            <a:r>
-              <a:rPr lang="ja-JP" altLang="en-US" sz="2800" dirty="0">
-                <a:solidFill>
-                  <a:srgbClr val="333333"/>
-                </a:solidFill>
-                <a:latin typeface="メイリオ" panose="020B0604030504040204" pitchFamily="50" charset="-128"/>
-                <a:ea typeface="メイリオ" panose="020B0604030504040204" pitchFamily="50" charset="-128"/>
-              </a:rPr>
-              <a:t>　　→「見方・考え方」を働かせた習得・活用・探究</a:t>
-            </a:r>
-          </a:p>
-          <a:p>
-            <a:pPr algn="l">
-              <a:lnSpc>
-                <a:spcPts val="3500"/>
-              </a:lnSpc>
-            </a:pPr>
-            <a:endParaRPr sz="2800" b="0" dirty="0">
-              <a:solidFill>
-                <a:srgbClr val="333333"/>
-              </a:solidFill>
-              <a:latin typeface="メイリオ" panose="020B0604030504040204" pitchFamily="50" charset="-128"/>
-              <a:ea typeface="メイリオ" panose="020B0604030504040204" pitchFamily="50" charset="-128"/>
-            </a:endParaRPr>
-          </a:p>
-          <a:p>
-            <a:pPr algn="l">
-              <a:lnSpc>
-                <a:spcPts val="3500"/>
-              </a:lnSpc>
-            </a:pPr>
-            <a:r>
-              <a:rPr sz="2800" b="0" dirty="0">
-                <a:solidFill>
-                  <a:srgbClr val="333333"/>
-                </a:solidFill>
-                <a:latin typeface="メイリオ" panose="020B0604030504040204" pitchFamily="50" charset="-128"/>
-                <a:ea typeface="メイリオ" panose="020B0604030504040204" pitchFamily="50" charset="-128"/>
-              </a:rPr>
-              <a:t>　</a:t>
-            </a:r>
-            <a:endParaRPr lang="ja-JP" altLang="en-US" sz="2800" b="0" dirty="0">
-              <a:solidFill>
-                <a:srgbClr val="333333"/>
-              </a:solidFill>
-              <a:latin typeface="BIZ UDPGothic"/>
-            </a:endParaRPr>
-          </a:p>
-          <a:p>
-            <a:pPr algn="l">
-              <a:lnSpc>
-                <a:spcPts val="3500"/>
-              </a:lnSpc>
-            </a:pPr>
-            <a:r>
-              <a:rPr sz="2800" b="0" dirty="0">
-                <a:solidFill>
-                  <a:srgbClr val="333333"/>
-                </a:solidFill>
-                <a:latin typeface="BIZ UDPGothic"/>
-              </a:rPr>
-              <a:t>■ </a:t>
-            </a:r>
-            <a:r>
-              <a:rPr sz="2800" b="0" dirty="0" err="1">
-                <a:solidFill>
-                  <a:srgbClr val="333333"/>
-                </a:solidFill>
-                <a:latin typeface="BIZ UDPGothic"/>
-              </a:rPr>
-              <a:t>キーワード</a:t>
-            </a:r>
-            <a:r>
-              <a:rPr sz="2800" b="0" dirty="0">
-                <a:solidFill>
-                  <a:srgbClr val="333333"/>
-                </a:solidFill>
-                <a:latin typeface="BIZ UDPGothic"/>
-              </a:rPr>
-              <a:t>：「</a:t>
-            </a:r>
-            <a:r>
-              <a:rPr sz="2800" b="0" dirty="0" err="1">
-                <a:solidFill>
-                  <a:srgbClr val="333333"/>
-                </a:solidFill>
-                <a:latin typeface="BIZ UDPGothic"/>
-              </a:rPr>
-              <a:t>自己調整</a:t>
-            </a:r>
-            <a:r>
-              <a:rPr sz="2800" b="0" dirty="0">
-                <a:solidFill>
-                  <a:srgbClr val="333333"/>
-                </a:solidFill>
-                <a:latin typeface="BIZ UDPGothic"/>
-              </a:rPr>
-              <a:t>」</a:t>
-            </a:r>
-          </a:p>
-          <a:p>
-            <a:pPr algn="l">
-              <a:lnSpc>
-                <a:spcPts val="3500"/>
-              </a:lnSpc>
-            </a:pPr>
-            <a:r>
-              <a:rPr sz="2800" b="0" dirty="0">
-                <a:solidFill>
-                  <a:srgbClr val="333333"/>
-                </a:solidFill>
-                <a:latin typeface="BIZ UDPGothic"/>
-              </a:rPr>
-              <a:t>　→ </a:t>
-            </a:r>
-            <a:r>
-              <a:rPr sz="2800" b="0" dirty="0" err="1">
-                <a:solidFill>
-                  <a:srgbClr val="333333"/>
-                </a:solidFill>
-                <a:latin typeface="BIZ UDPGothic"/>
-              </a:rPr>
-              <a:t>振り返りなしに、自己調整は生まれない</a:t>
-            </a:r>
-            <a:endParaRPr sz="1700" b="0" dirty="0">
-              <a:solidFill>
-                <a:srgbClr val="333333"/>
-              </a:solidFill>
-              <a:latin typeface="BIZ UDPGothic"/>
-            </a:endParaRPr>
-          </a:p>
-        </p:txBody>
-      </p:sp>
-      <p:sp>
-        <p:nvSpPr>
-          <p:cNvPr id="5" name="TextBox 4"/>
-          <p:cNvSpPr txBox="1"/>
-          <p:nvPr/>
-        </p:nvSpPr>
-        <p:spPr>
-          <a:xfrm>
-            <a:off x="11292119" y="6570000"/>
-            <a:ext cx="720000" cy="216000"/>
-          </a:xfrm>
-          <a:prstGeom prst="rect">
-            <a:avLst/>
-          </a:prstGeom>
-          <a:noFill/>
-        </p:spPr>
-        <p:txBody>
-          <a:bodyPr wrap="none">
-            <a:spAutoFit/>
-          </a:bodyPr>
-          <a:lstStyle/>
-          <a:p>
-            <a:pPr algn="r"/>
-            <a:r>
-              <a:rPr sz="1000">
-                <a:solidFill>
-                  <a:srgbClr val="999999"/>
-                </a:solidFill>
-                <a:latin typeface="BIZ UDPGothic"/>
-              </a:rPr>
-              <a:t>10 / 20</a:t>
-            </a:r>
-          </a:p>
-        </p:txBody>
-      </p:sp>
-    </p:spTree>
-  </p:cSld>
-  <p:clrMapOvr>
-    <a:masterClrMapping/>
-  </p:clrMapOvr>
-</p:sld>
-</file>
-
-<file path=ppt/slides/slide25.xml><?xml version="1.0" encoding="utf-8"?>
-<p:sld xmlns:a="http://schemas.openxmlformats.org/drawingml/2006/main" xmlns:r="http://schemas.openxmlformats.org/officeDocument/2006/relationships" xmlns:p="http://schemas.openxmlformats.org/presentationml/2006/main">
-  <p:cSld>
-    <p:spTree>
-      <p:nvGrpSpPr>
-        <p:cNvPr id="1" name=""/>
-        <p:cNvGrpSpPr/>
-        <p:nvPr/>
-      </p:nvGrpSpPr>
-      <p:grpSpPr>
-        <a:xfrm>
-          <a:off x="0" y="0"/>
-          <a:ext cx="0" cy="0"/>
-          <a:chOff x="0" y="0"/>
-          <a:chExt cx="0" cy="0"/>
-        </a:xfrm>
-      </p:grpSpPr>
-      <p:sp>
-        <p:nvSpPr>
-          <p:cNvPr id="2" name="Rectangle 1"/>
-          <p:cNvSpPr/>
-          <p:nvPr/>
-        </p:nvSpPr>
-        <p:spPr>
-          <a:xfrm>
-            <a:off x="0" y="0"/>
-            <a:ext cx="12192119" cy="576000"/>
-          </a:xfrm>
-          <a:prstGeom prst="rect">
-            <a:avLst/>
-          </a:prstGeom>
-          <a:solidFill>
-            <a:srgbClr val="1F3864"/>
-          </a:solidFill>
-          <a:ln>
-            <a:noFill/>
-          </a:ln>
-        </p:spPr>
-        <p:style>
-          <a:lnRef idx="1">
-            <a:schemeClr val="accent1"/>
-          </a:lnRef>
-          <a:fillRef idx="3">
-            <a:schemeClr val="accent1"/>
-          </a:fillRef>
-          <a:effectRef idx="2">
-            <a:schemeClr val="accent1"/>
-          </a:effectRef>
-          <a:fontRef idx="minor">
-            <a:schemeClr val="lt1"/>
-          </a:fontRef>
-        </p:style>
-        <p:txBody>
-          <a:bodyPr rtlCol="0" anchor="ctr"/>
-          <a:lstStyle/>
-          <a:p>
-            <a:pPr algn="ctr"/>
-            <a:endParaRPr/>
-          </a:p>
-        </p:txBody>
-      </p:sp>
-      <p:sp>
-        <p:nvSpPr>
-          <p:cNvPr id="3" name="TextBox 2"/>
-          <p:cNvSpPr txBox="1"/>
-          <p:nvPr/>
-        </p:nvSpPr>
-        <p:spPr>
-          <a:xfrm>
-            <a:off x="180000" y="54000"/>
-            <a:ext cx="11832119" cy="468000"/>
-          </a:xfrm>
-          <a:prstGeom prst="rect">
-            <a:avLst/>
-          </a:prstGeom>
-          <a:noFill/>
-        </p:spPr>
-        <p:txBody>
-          <a:bodyPr wrap="none">
-            <a:spAutoFit/>
-          </a:bodyPr>
-          <a:lstStyle/>
-          <a:p>
-            <a:pPr algn="l"/>
-            <a:r>
-              <a:rPr sz="2400" b="1">
-                <a:solidFill>
-                  <a:srgbClr val="FFFFFF"/>
-                </a:solidFill>
-                <a:latin typeface="BIZ UDPGothic"/>
-              </a:rPr>
-              <a:t>R7「論点整理」が示す新たな強調点</a:t>
-            </a:r>
-          </a:p>
-        </p:txBody>
-      </p:sp>
-      <p:sp>
-        <p:nvSpPr>
-          <p:cNvPr id="4" name="TextBox 3"/>
-          <p:cNvSpPr txBox="1"/>
-          <p:nvPr/>
-        </p:nvSpPr>
-        <p:spPr>
-          <a:xfrm>
-            <a:off x="288000" y="720000"/>
-            <a:ext cx="11616119" cy="5880456"/>
-          </a:xfrm>
-          <a:prstGeom prst="rect">
-            <a:avLst/>
-          </a:prstGeom>
-          <a:noFill/>
-        </p:spPr>
-        <p:txBody>
-          <a:bodyPr wrap="square">
-            <a:spAutoFit/>
-          </a:bodyPr>
-          <a:lstStyle/>
-          <a:p>
-            <a:pPr algn="l">
-              <a:lnSpc>
-                <a:spcPts val="3500"/>
-              </a:lnSpc>
-            </a:pPr>
-            <a:r>
-              <a:rPr sz="2800" b="0" dirty="0">
-                <a:solidFill>
-                  <a:srgbClr val="333333"/>
-                </a:solidFill>
-                <a:latin typeface="メイリオ" panose="020B0604030504040204" pitchFamily="50" charset="-128"/>
-                <a:ea typeface="メイリオ" panose="020B0604030504040204" pitchFamily="50" charset="-128"/>
-              </a:rPr>
-              <a:t>■ </a:t>
-            </a:r>
-            <a:r>
-              <a:rPr sz="2800" b="0" dirty="0" err="1">
-                <a:solidFill>
-                  <a:srgbClr val="333333"/>
-                </a:solidFill>
-                <a:latin typeface="メイリオ" panose="020B0604030504040204" pitchFamily="50" charset="-128"/>
-                <a:ea typeface="メイリオ" panose="020B0604030504040204" pitchFamily="50" charset="-128"/>
-              </a:rPr>
-              <a:t>自己調整学習のさらなる重視</a:t>
-            </a:r>
-            <a:endParaRPr sz="2800" b="0" dirty="0">
-              <a:solidFill>
-                <a:srgbClr val="333333"/>
-              </a:solidFill>
-              <a:latin typeface="メイリオ" panose="020B0604030504040204" pitchFamily="50" charset="-128"/>
-              <a:ea typeface="メイリオ" panose="020B0604030504040204" pitchFamily="50" charset="-128"/>
-            </a:endParaRPr>
-          </a:p>
-          <a:p>
-            <a:pPr algn="l">
-              <a:lnSpc>
-                <a:spcPts val="3500"/>
-              </a:lnSpc>
-            </a:pPr>
-            <a:r>
-              <a:rPr sz="2800" b="0" dirty="0">
-                <a:solidFill>
-                  <a:srgbClr val="333333"/>
-                </a:solidFill>
-                <a:latin typeface="メイリオ" panose="020B0604030504040204" pitchFamily="50" charset="-128"/>
-                <a:ea typeface="メイリオ" panose="020B0604030504040204" pitchFamily="50" charset="-128"/>
-              </a:rPr>
-              <a:t>　「</a:t>
-            </a:r>
-            <a:r>
-              <a:rPr sz="2800" b="0" dirty="0" err="1">
-                <a:solidFill>
-                  <a:srgbClr val="333333"/>
-                </a:solidFill>
-                <a:latin typeface="メイリオ" panose="020B0604030504040204" pitchFamily="50" charset="-128"/>
-                <a:ea typeface="メイリオ" panose="020B0604030504040204" pitchFamily="50" charset="-128"/>
-              </a:rPr>
-              <a:t>見通し</a:t>
-            </a:r>
-            <a:r>
-              <a:rPr sz="2800" b="0" dirty="0">
-                <a:solidFill>
-                  <a:srgbClr val="333333"/>
-                </a:solidFill>
-                <a:latin typeface="メイリオ" panose="020B0604030504040204" pitchFamily="50" charset="-128"/>
-                <a:ea typeface="メイリオ" panose="020B0604030504040204" pitchFamily="50" charset="-128"/>
-              </a:rPr>
-              <a:t> → </a:t>
-            </a:r>
-            <a:r>
-              <a:rPr sz="2800" b="0" dirty="0" err="1">
-                <a:solidFill>
-                  <a:srgbClr val="333333"/>
-                </a:solidFill>
-                <a:latin typeface="メイリオ" panose="020B0604030504040204" pitchFamily="50" charset="-128"/>
-                <a:ea typeface="メイリオ" panose="020B0604030504040204" pitchFamily="50" charset="-128"/>
-              </a:rPr>
-              <a:t>学習</a:t>
-            </a:r>
-            <a:r>
-              <a:rPr sz="2800" b="0" dirty="0">
-                <a:solidFill>
-                  <a:srgbClr val="333333"/>
-                </a:solidFill>
-                <a:latin typeface="メイリオ" panose="020B0604030504040204" pitchFamily="50" charset="-128"/>
-                <a:ea typeface="メイリオ" panose="020B0604030504040204" pitchFamily="50" charset="-128"/>
-              </a:rPr>
-              <a:t> → </a:t>
-            </a:r>
-            <a:r>
-              <a:rPr sz="2800" b="0" dirty="0" err="1">
-                <a:solidFill>
-                  <a:srgbClr val="333333"/>
-                </a:solidFill>
-                <a:latin typeface="メイリオ" panose="020B0604030504040204" pitchFamily="50" charset="-128"/>
-                <a:ea typeface="メイリオ" panose="020B0604030504040204" pitchFamily="50" charset="-128"/>
-              </a:rPr>
-              <a:t>振り返り」の往還を</a:t>
-            </a:r>
-            <a:endParaRPr sz="2800" b="0" dirty="0">
-              <a:solidFill>
-                <a:srgbClr val="333333"/>
-              </a:solidFill>
-              <a:latin typeface="メイリオ" panose="020B0604030504040204" pitchFamily="50" charset="-128"/>
-              <a:ea typeface="メイリオ" panose="020B0604030504040204" pitchFamily="50" charset="-128"/>
-            </a:endParaRPr>
-          </a:p>
-          <a:p>
-            <a:pPr algn="l">
-              <a:lnSpc>
-                <a:spcPts val="3500"/>
-              </a:lnSpc>
-            </a:pPr>
-            <a:r>
-              <a:rPr sz="2800" b="0" dirty="0">
-                <a:solidFill>
-                  <a:srgbClr val="333333"/>
-                </a:solidFill>
-                <a:latin typeface="メイリオ" panose="020B0604030504040204" pitchFamily="50" charset="-128"/>
-                <a:ea typeface="メイリオ" panose="020B0604030504040204" pitchFamily="50" charset="-128"/>
-              </a:rPr>
-              <a:t>　</a:t>
-            </a:r>
-            <a:r>
-              <a:rPr sz="2800" b="0" dirty="0" err="1">
-                <a:solidFill>
-                  <a:srgbClr val="333333"/>
-                </a:solidFill>
-                <a:latin typeface="メイリオ" panose="020B0604030504040204" pitchFamily="50" charset="-128"/>
-                <a:ea typeface="メイリオ" panose="020B0604030504040204" pitchFamily="50" charset="-128"/>
-              </a:rPr>
-              <a:t>すべての教科・場面で意図的に位置づける</a:t>
-            </a:r>
-            <a:endParaRPr sz="2800" b="0" dirty="0">
-              <a:solidFill>
-                <a:srgbClr val="333333"/>
-              </a:solidFill>
-              <a:latin typeface="メイリオ" panose="020B0604030504040204" pitchFamily="50" charset="-128"/>
-              <a:ea typeface="メイリオ" panose="020B0604030504040204" pitchFamily="50" charset="-128"/>
-            </a:endParaRPr>
-          </a:p>
-          <a:p>
-            <a:pPr algn="l">
-              <a:lnSpc>
-                <a:spcPts val="3500"/>
-              </a:lnSpc>
-            </a:pPr>
-            <a:endParaRPr sz="2800" b="0" dirty="0">
-              <a:solidFill>
-                <a:srgbClr val="333333"/>
-              </a:solidFill>
-              <a:latin typeface="メイリオ" panose="020B0604030504040204" pitchFamily="50" charset="-128"/>
-              <a:ea typeface="メイリオ" panose="020B0604030504040204" pitchFamily="50" charset="-128"/>
-            </a:endParaRPr>
-          </a:p>
-          <a:p>
-            <a:pPr algn="l">
-              <a:lnSpc>
-                <a:spcPts val="3500"/>
-              </a:lnSpc>
-            </a:pPr>
-            <a:r>
-              <a:rPr sz="2800" b="0" dirty="0">
-                <a:solidFill>
-                  <a:srgbClr val="333333"/>
-                </a:solidFill>
-                <a:latin typeface="メイリオ" panose="020B0604030504040204" pitchFamily="50" charset="-128"/>
-                <a:ea typeface="メイリオ" panose="020B0604030504040204" pitchFamily="50" charset="-128"/>
-              </a:rPr>
-              <a:t>■ </a:t>
-            </a:r>
-            <a:r>
-              <a:rPr sz="2800" b="0" dirty="0" err="1">
-                <a:solidFill>
-                  <a:srgbClr val="333333"/>
-                </a:solidFill>
-                <a:latin typeface="メイリオ" panose="020B0604030504040204" pitchFamily="50" charset="-128"/>
-                <a:ea typeface="メイリオ" panose="020B0604030504040204" pitchFamily="50" charset="-128"/>
-              </a:rPr>
-              <a:t>ウェルビーイングとの接続</a:t>
-            </a:r>
-            <a:endParaRPr sz="2800" b="0" dirty="0">
-              <a:solidFill>
-                <a:srgbClr val="333333"/>
-              </a:solidFill>
-              <a:latin typeface="メイリオ" panose="020B0604030504040204" pitchFamily="50" charset="-128"/>
-              <a:ea typeface="メイリオ" panose="020B0604030504040204" pitchFamily="50" charset="-128"/>
-            </a:endParaRPr>
-          </a:p>
-          <a:p>
-            <a:pPr algn="l">
-              <a:lnSpc>
-                <a:spcPts val="3500"/>
-              </a:lnSpc>
-            </a:pPr>
-            <a:r>
-              <a:rPr sz="2800" b="0" dirty="0">
-                <a:solidFill>
-                  <a:srgbClr val="333333"/>
-                </a:solidFill>
-                <a:latin typeface="メイリオ" panose="020B0604030504040204" pitchFamily="50" charset="-128"/>
-                <a:ea typeface="メイリオ" panose="020B0604030504040204" pitchFamily="50" charset="-128"/>
-              </a:rPr>
-              <a:t>　</a:t>
-            </a:r>
-            <a:r>
-              <a:rPr sz="2800" b="0" dirty="0" err="1">
-                <a:solidFill>
-                  <a:srgbClr val="333333"/>
-                </a:solidFill>
-                <a:latin typeface="メイリオ" panose="020B0604030504040204" pitchFamily="50" charset="-128"/>
-                <a:ea typeface="メイリオ" panose="020B0604030504040204" pitchFamily="50" charset="-128"/>
-              </a:rPr>
-              <a:t>振り返りが「学びへの自信・有能感」を育む</a:t>
-            </a:r>
-            <a:endParaRPr sz="2800" b="0" dirty="0">
-              <a:solidFill>
-                <a:srgbClr val="333333"/>
-              </a:solidFill>
-              <a:latin typeface="メイリオ" panose="020B0604030504040204" pitchFamily="50" charset="-128"/>
-              <a:ea typeface="メイリオ" panose="020B0604030504040204" pitchFamily="50" charset="-128"/>
-            </a:endParaRPr>
-          </a:p>
-          <a:p>
-            <a:pPr algn="l">
-              <a:lnSpc>
-                <a:spcPts val="3500"/>
-              </a:lnSpc>
-            </a:pPr>
-            <a:r>
-              <a:rPr sz="2800" b="0" dirty="0">
-                <a:solidFill>
-                  <a:srgbClr val="333333"/>
-                </a:solidFill>
-                <a:latin typeface="メイリオ" panose="020B0604030504040204" pitchFamily="50" charset="-128"/>
-                <a:ea typeface="メイリオ" panose="020B0604030504040204" pitchFamily="50" charset="-128"/>
-              </a:rPr>
-              <a:t>　→ </a:t>
-            </a:r>
-            <a:r>
-              <a:rPr sz="2800" b="0" dirty="0" err="1">
-                <a:solidFill>
-                  <a:srgbClr val="333333"/>
-                </a:solidFill>
-                <a:latin typeface="メイリオ" panose="020B0604030504040204" pitchFamily="50" charset="-128"/>
-                <a:ea typeface="メイリオ" panose="020B0604030504040204" pitchFamily="50" charset="-128"/>
-              </a:rPr>
-              <a:t>学ぶことが楽しい、という実感へ</a:t>
-            </a:r>
-            <a:endParaRPr sz="2800" b="0" dirty="0">
-              <a:solidFill>
-                <a:srgbClr val="333333"/>
-              </a:solidFill>
-              <a:latin typeface="メイリオ" panose="020B0604030504040204" pitchFamily="50" charset="-128"/>
-              <a:ea typeface="メイリオ" panose="020B0604030504040204" pitchFamily="50" charset="-128"/>
-            </a:endParaRPr>
-          </a:p>
-          <a:p>
-            <a:pPr algn="l">
-              <a:lnSpc>
-                <a:spcPts val="3500"/>
-              </a:lnSpc>
-            </a:pPr>
-            <a:endParaRPr sz="2800" b="0" dirty="0">
-              <a:solidFill>
-                <a:srgbClr val="333333"/>
-              </a:solidFill>
-              <a:latin typeface="メイリオ" panose="020B0604030504040204" pitchFamily="50" charset="-128"/>
-              <a:ea typeface="メイリオ" panose="020B0604030504040204" pitchFamily="50" charset="-128"/>
-            </a:endParaRPr>
-          </a:p>
-          <a:p>
-            <a:pPr algn="l">
-              <a:lnSpc>
-                <a:spcPts val="3500"/>
-              </a:lnSpc>
-            </a:pPr>
-            <a:r>
-              <a:rPr sz="2800" b="0" dirty="0">
-                <a:solidFill>
-                  <a:srgbClr val="333333"/>
-                </a:solidFill>
-                <a:latin typeface="メイリオ" panose="020B0604030504040204" pitchFamily="50" charset="-128"/>
-                <a:ea typeface="メイリオ" panose="020B0604030504040204" pitchFamily="50" charset="-128"/>
-              </a:rPr>
-              <a:t>■ </a:t>
-            </a:r>
-            <a:r>
-              <a:rPr sz="2800" b="0" dirty="0" err="1">
-                <a:solidFill>
-                  <a:srgbClr val="333333"/>
-                </a:solidFill>
-                <a:latin typeface="メイリオ" panose="020B0604030504040204" pitchFamily="50" charset="-128"/>
-                <a:ea typeface="メイリオ" panose="020B0604030504040204" pitchFamily="50" charset="-128"/>
-              </a:rPr>
-              <a:t>デジタルを活用した振り返りの蓄積</a:t>
-            </a:r>
-            <a:endParaRPr sz="2800" b="0" dirty="0">
-              <a:solidFill>
-                <a:srgbClr val="333333"/>
-              </a:solidFill>
-              <a:latin typeface="メイリオ" panose="020B0604030504040204" pitchFamily="50" charset="-128"/>
-              <a:ea typeface="メイリオ" panose="020B0604030504040204" pitchFamily="50" charset="-128"/>
-            </a:endParaRPr>
-          </a:p>
-          <a:p>
-            <a:pPr algn="l">
-              <a:lnSpc>
-                <a:spcPts val="3500"/>
-              </a:lnSpc>
-            </a:pPr>
-            <a:r>
-              <a:rPr sz="2800" b="0" dirty="0">
-                <a:solidFill>
-                  <a:srgbClr val="333333"/>
-                </a:solidFill>
-                <a:latin typeface="メイリオ" panose="020B0604030504040204" pitchFamily="50" charset="-128"/>
-                <a:ea typeface="メイリオ" panose="020B0604030504040204" pitchFamily="50" charset="-128"/>
-              </a:rPr>
-              <a:t>　１人１台端末を活用し、振り返りを「見える化」</a:t>
-            </a:r>
-          </a:p>
-          <a:p>
-            <a:pPr algn="l">
-              <a:lnSpc>
-                <a:spcPts val="3500"/>
-              </a:lnSpc>
-            </a:pPr>
-            <a:r>
-              <a:rPr sz="2800" b="0" dirty="0">
-                <a:solidFill>
-                  <a:srgbClr val="333333"/>
-                </a:solidFill>
-                <a:latin typeface="メイリオ" panose="020B0604030504040204" pitchFamily="50" charset="-128"/>
-                <a:ea typeface="メイリオ" panose="020B0604030504040204" pitchFamily="50" charset="-128"/>
-              </a:rPr>
-              <a:t>　→ </a:t>
-            </a:r>
-            <a:r>
-              <a:rPr sz="2800" b="0" dirty="0" err="1">
-                <a:solidFill>
-                  <a:srgbClr val="333333"/>
-                </a:solidFill>
-                <a:latin typeface="メイリオ" panose="020B0604030504040204" pitchFamily="50" charset="-128"/>
-                <a:ea typeface="メイリオ" panose="020B0604030504040204" pitchFamily="50" charset="-128"/>
-              </a:rPr>
-              <a:t>学習履歴として蓄積・次の学びへ接続</a:t>
-            </a:r>
-            <a:endParaRPr sz="2800" b="0" dirty="0">
-              <a:solidFill>
-                <a:srgbClr val="333333"/>
-              </a:solidFill>
-              <a:latin typeface="メイリオ" panose="020B0604030504040204" pitchFamily="50" charset="-128"/>
-              <a:ea typeface="メイリオ" panose="020B0604030504040204" pitchFamily="50" charset="-128"/>
-            </a:endParaRPr>
-          </a:p>
-          <a:p>
-            <a:pPr algn="l">
-              <a:lnSpc>
-                <a:spcPts val="3500"/>
-              </a:lnSpc>
-            </a:pPr>
-            <a:endParaRPr sz="2800" b="0" dirty="0">
-              <a:solidFill>
-                <a:srgbClr val="333333"/>
-              </a:solidFill>
-              <a:latin typeface="メイリオ" panose="020B0604030504040204" pitchFamily="50" charset="-128"/>
-              <a:ea typeface="メイリオ" panose="020B0604030504040204" pitchFamily="50" charset="-128"/>
-            </a:endParaRPr>
-          </a:p>
-          <a:p>
-            <a:pPr algn="l">
-              <a:lnSpc>
-                <a:spcPts val="3500"/>
-              </a:lnSpc>
-            </a:pPr>
-            <a:r>
-              <a:rPr sz="2800" b="0" dirty="0">
-                <a:solidFill>
-                  <a:srgbClr val="333333"/>
-                </a:solidFill>
-                <a:latin typeface="メイリオ" panose="020B0604030504040204" pitchFamily="50" charset="-128"/>
-                <a:ea typeface="メイリオ" panose="020B0604030504040204" pitchFamily="50" charset="-128"/>
-              </a:rPr>
-              <a:t>■ H27から10年。振り返りの重要性はより深化している。</a:t>
-            </a:r>
-          </a:p>
-        </p:txBody>
-      </p:sp>
-      <p:sp>
-        <p:nvSpPr>
-          <p:cNvPr id="5" name="TextBox 4"/>
-          <p:cNvSpPr txBox="1"/>
-          <p:nvPr/>
-        </p:nvSpPr>
-        <p:spPr>
-          <a:xfrm>
-            <a:off x="11292119" y="6570000"/>
-            <a:ext cx="720000" cy="216000"/>
-          </a:xfrm>
-          <a:prstGeom prst="rect">
-            <a:avLst/>
-          </a:prstGeom>
-          <a:noFill/>
-        </p:spPr>
-        <p:txBody>
-          <a:bodyPr wrap="none">
-            <a:spAutoFit/>
-          </a:bodyPr>
-          <a:lstStyle/>
-          <a:p>
-            <a:pPr algn="r"/>
-            <a:r>
-              <a:rPr sz="1000">
-                <a:solidFill>
-                  <a:srgbClr val="999999"/>
-                </a:solidFill>
-                <a:latin typeface="BIZ UDPGothic"/>
-              </a:rPr>
-              <a:t>13 / 20</a:t>
-            </a:r>
-          </a:p>
-        </p:txBody>
-      </p:sp>
-    </p:spTree>
-  </p:cSld>
-  <p:clrMapOvr>
-    <a:masterClrMapping/>
-  </p:clrMapOvr>
-</p:sld>
-</file>
-
-<file path=ppt/slides/slide26.xml><?xml version="1.0" encoding="utf-8"?>
-<p:sld xmlns:a="http://schemas.openxmlformats.org/drawingml/2006/main" xmlns:r="http://schemas.openxmlformats.org/officeDocument/2006/relationships" xmlns:p="http://schemas.openxmlformats.org/presentationml/2006/main">
-  <p:cSld>
-    <p:spTree>
-      <p:nvGrpSpPr>
-        <p:cNvPr id="1" name=""/>
-        <p:cNvGrpSpPr/>
-        <p:nvPr/>
-      </p:nvGrpSpPr>
-      <p:grpSpPr>
-        <a:xfrm>
-          <a:off x="0" y="0"/>
-          <a:ext cx="0" cy="0"/>
-          <a:chOff x="0" y="0"/>
-          <a:chExt cx="0" cy="0"/>
-        </a:xfrm>
-      </p:grpSpPr>
-      <p:sp>
-        <p:nvSpPr>
-          <p:cNvPr id="2" name="Rectangle 1"/>
-          <p:cNvSpPr/>
-          <p:nvPr/>
-        </p:nvSpPr>
-        <p:spPr>
-          <a:xfrm>
-            <a:off x="0" y="0"/>
-            <a:ext cx="12192119" cy="576000"/>
-          </a:xfrm>
-          <a:prstGeom prst="rect">
-            <a:avLst/>
-          </a:prstGeom>
-          <a:solidFill>
-            <a:srgbClr val="1F3864"/>
-          </a:solidFill>
-          <a:ln>
-            <a:noFill/>
-          </a:ln>
-        </p:spPr>
-        <p:style>
-          <a:lnRef idx="1">
-            <a:schemeClr val="accent1"/>
-          </a:lnRef>
-          <a:fillRef idx="3">
-            <a:schemeClr val="accent1"/>
-          </a:fillRef>
-          <a:effectRef idx="2">
-            <a:schemeClr val="accent1"/>
-          </a:effectRef>
-          <a:fontRef idx="minor">
-            <a:schemeClr val="lt1"/>
-          </a:fontRef>
-        </p:style>
-        <p:txBody>
-          <a:bodyPr rtlCol="0" anchor="ctr"/>
-          <a:lstStyle/>
-          <a:p>
-            <a:pPr algn="ctr"/>
-            <a:endParaRPr/>
-          </a:p>
-        </p:txBody>
-      </p:sp>
-      <p:sp>
-        <p:nvSpPr>
-          <p:cNvPr id="3" name="TextBox 2"/>
-          <p:cNvSpPr txBox="1"/>
-          <p:nvPr/>
-        </p:nvSpPr>
-        <p:spPr>
-          <a:xfrm>
-            <a:off x="180000" y="54000"/>
-            <a:ext cx="11832119" cy="468000"/>
-          </a:xfrm>
-          <a:prstGeom prst="rect">
-            <a:avLst/>
-          </a:prstGeom>
-          <a:noFill/>
-        </p:spPr>
-        <p:txBody>
-          <a:bodyPr wrap="none">
-            <a:spAutoFit/>
-          </a:bodyPr>
-          <a:lstStyle/>
-          <a:p>
-            <a:pPr algn="l"/>
-            <a:r>
-              <a:rPr sz="2400" b="1">
-                <a:solidFill>
-                  <a:srgbClr val="FFFFFF"/>
-                </a:solidFill>
-                <a:latin typeface="BIZ UDPGothic"/>
-              </a:rPr>
-              <a:t>学習指導要領（H29）における「振り返り」</a:t>
-            </a:r>
-          </a:p>
-        </p:txBody>
-      </p:sp>
-      <p:sp>
-        <p:nvSpPr>
-          <p:cNvPr id="4" name="TextBox 3"/>
-          <p:cNvSpPr txBox="1"/>
-          <p:nvPr/>
-        </p:nvSpPr>
-        <p:spPr>
-          <a:xfrm>
-            <a:off x="288000" y="720000"/>
-            <a:ext cx="11616119" cy="5927264"/>
-          </a:xfrm>
-          <a:prstGeom prst="rect">
-            <a:avLst/>
-          </a:prstGeom>
-          <a:noFill/>
-        </p:spPr>
-        <p:txBody>
-          <a:bodyPr wrap="square">
-            <a:spAutoFit/>
-          </a:bodyPr>
-          <a:lstStyle/>
-          <a:p>
-            <a:pPr algn="l">
-              <a:lnSpc>
-                <a:spcPts val="3500"/>
-              </a:lnSpc>
-            </a:pPr>
-            <a:r>
-              <a:rPr sz="2800" b="0" dirty="0">
-                <a:solidFill>
-                  <a:srgbClr val="333333"/>
-                </a:solidFill>
-                <a:latin typeface="メイリオ" panose="020B0604030504040204" pitchFamily="50" charset="-128"/>
-                <a:ea typeface="メイリオ" panose="020B0604030504040204" pitchFamily="50" charset="-128"/>
-              </a:rPr>
-              <a:t>■ </a:t>
-            </a:r>
-            <a:r>
-              <a:rPr sz="2800" b="0" dirty="0" err="1">
-                <a:solidFill>
-                  <a:srgbClr val="333333"/>
-                </a:solidFill>
-                <a:latin typeface="メイリオ" panose="020B0604030504040204" pitchFamily="50" charset="-128"/>
-                <a:ea typeface="メイリオ" panose="020B0604030504040204" pitchFamily="50" charset="-128"/>
-              </a:rPr>
-              <a:t>総則</a:t>
-            </a:r>
-            <a:r>
-              <a:rPr sz="2800" b="0" dirty="0">
-                <a:solidFill>
-                  <a:srgbClr val="333333"/>
-                </a:solidFill>
-                <a:latin typeface="メイリオ" panose="020B0604030504040204" pitchFamily="50" charset="-128"/>
-                <a:ea typeface="メイリオ" panose="020B0604030504040204" pitchFamily="50" charset="-128"/>
-              </a:rPr>
-              <a:t> 第３の１（主体的・対話的で深い学び）</a:t>
-            </a:r>
-          </a:p>
-          <a:p>
-            <a:pPr algn="l">
-              <a:lnSpc>
-                <a:spcPts val="3500"/>
-              </a:lnSpc>
-            </a:pPr>
-            <a:endParaRPr sz="2800" b="0" dirty="0">
-              <a:solidFill>
-                <a:srgbClr val="333333"/>
-              </a:solidFill>
-              <a:latin typeface="メイリオ" panose="020B0604030504040204" pitchFamily="50" charset="-128"/>
-              <a:ea typeface="メイリオ" panose="020B0604030504040204" pitchFamily="50" charset="-128"/>
-            </a:endParaRPr>
-          </a:p>
-          <a:p>
-            <a:pPr algn="l">
-              <a:lnSpc>
-                <a:spcPts val="3500"/>
-              </a:lnSpc>
-            </a:pPr>
-            <a:r>
-              <a:rPr sz="2800" b="0" dirty="0">
-                <a:solidFill>
-                  <a:srgbClr val="333333"/>
-                </a:solidFill>
-                <a:latin typeface="メイリオ" panose="020B0604030504040204" pitchFamily="50" charset="-128"/>
-                <a:ea typeface="メイリオ" panose="020B0604030504040204" pitchFamily="50" charset="-128"/>
-              </a:rPr>
-              <a:t>　「</a:t>
-            </a:r>
-            <a:r>
-              <a:rPr sz="2800" b="0" dirty="0" err="1">
-                <a:solidFill>
-                  <a:srgbClr val="333333"/>
-                </a:solidFill>
-                <a:latin typeface="メイリオ" panose="020B0604030504040204" pitchFamily="50" charset="-128"/>
-                <a:ea typeface="メイリオ" panose="020B0604030504040204" pitchFamily="50" charset="-128"/>
-              </a:rPr>
-              <a:t>学習の見通しを立てたり学習したことを振り返ったり</a:t>
-            </a:r>
-            <a:endParaRPr sz="2800" b="0" dirty="0">
-              <a:solidFill>
-                <a:srgbClr val="333333"/>
-              </a:solidFill>
-              <a:latin typeface="メイリオ" panose="020B0604030504040204" pitchFamily="50" charset="-128"/>
-              <a:ea typeface="メイリオ" panose="020B0604030504040204" pitchFamily="50" charset="-128"/>
-            </a:endParaRPr>
-          </a:p>
-          <a:p>
-            <a:pPr algn="l">
-              <a:lnSpc>
-                <a:spcPts val="3500"/>
-              </a:lnSpc>
-            </a:pPr>
-            <a:r>
-              <a:rPr sz="2800" b="0" dirty="0">
-                <a:solidFill>
-                  <a:srgbClr val="333333"/>
-                </a:solidFill>
-                <a:latin typeface="メイリオ" panose="020B0604030504040204" pitchFamily="50" charset="-128"/>
-                <a:ea typeface="メイリオ" panose="020B0604030504040204" pitchFamily="50" charset="-128"/>
-              </a:rPr>
-              <a:t>　　</a:t>
-            </a:r>
-            <a:r>
-              <a:rPr sz="2800" b="0" dirty="0" err="1">
-                <a:solidFill>
-                  <a:srgbClr val="333333"/>
-                </a:solidFill>
-                <a:latin typeface="メイリオ" panose="020B0604030504040204" pitchFamily="50" charset="-128"/>
-                <a:ea typeface="メイリオ" panose="020B0604030504040204" pitchFamily="50" charset="-128"/>
-              </a:rPr>
-              <a:t>する活動を、計画的に取り入れ</a:t>
-            </a:r>
-            <a:r>
-              <a:rPr sz="2800" b="0" dirty="0">
-                <a:solidFill>
-                  <a:srgbClr val="333333"/>
-                </a:solidFill>
-                <a:latin typeface="メイリオ" panose="020B0604030504040204" pitchFamily="50" charset="-128"/>
-                <a:ea typeface="メイリオ" panose="020B0604030504040204" pitchFamily="50" charset="-128"/>
-              </a:rPr>
-              <a:t>…」</a:t>
-            </a:r>
-          </a:p>
-          <a:p>
-            <a:pPr algn="l">
-              <a:lnSpc>
-                <a:spcPts val="3500"/>
-              </a:lnSpc>
-            </a:pPr>
-            <a:endParaRPr lang="en-US" sz="2800" b="0" dirty="0">
-              <a:solidFill>
-                <a:srgbClr val="333333"/>
-              </a:solidFill>
-              <a:latin typeface="メイリオ" panose="020B0604030504040204" pitchFamily="50" charset="-128"/>
-              <a:ea typeface="メイリオ" panose="020B0604030504040204" pitchFamily="50" charset="-128"/>
-            </a:endParaRPr>
-          </a:p>
-          <a:p>
-            <a:pPr algn="l">
-              <a:lnSpc>
-                <a:spcPts val="3500"/>
-              </a:lnSpc>
-            </a:pPr>
-            <a:r>
-              <a:rPr sz="2800" b="0" dirty="0">
-                <a:solidFill>
-                  <a:srgbClr val="333333"/>
-                </a:solidFill>
-                <a:latin typeface="メイリオ" panose="020B0604030504040204" pitchFamily="50" charset="-128"/>
-                <a:ea typeface="メイリオ" panose="020B0604030504040204" pitchFamily="50" charset="-128"/>
-              </a:rPr>
-              <a:t>■ </a:t>
-            </a:r>
-            <a:r>
-              <a:rPr sz="2800" b="0" dirty="0" err="1">
-                <a:solidFill>
-                  <a:srgbClr val="333333"/>
-                </a:solidFill>
-                <a:latin typeface="メイリオ" panose="020B0604030504040204" pitchFamily="50" charset="-128"/>
-                <a:ea typeface="メイリオ" panose="020B0604030504040204" pitchFamily="50" charset="-128"/>
-              </a:rPr>
-              <a:t>数学科の目標（中学校学習指導要領</a:t>
-            </a:r>
-            <a:r>
-              <a:rPr sz="2800" b="0" dirty="0">
-                <a:solidFill>
-                  <a:srgbClr val="333333"/>
-                </a:solidFill>
-                <a:latin typeface="メイリオ" panose="020B0604030504040204" pitchFamily="50" charset="-128"/>
-                <a:ea typeface="メイリオ" panose="020B0604030504040204" pitchFamily="50" charset="-128"/>
-              </a:rPr>
-              <a:t>）</a:t>
-            </a:r>
-          </a:p>
-          <a:p>
-            <a:pPr algn="l">
-              <a:lnSpc>
-                <a:spcPts val="3500"/>
-              </a:lnSpc>
-            </a:pPr>
-            <a:endParaRPr sz="2800" b="0" dirty="0">
-              <a:solidFill>
-                <a:srgbClr val="333333"/>
-              </a:solidFill>
-              <a:latin typeface="メイリオ" panose="020B0604030504040204" pitchFamily="50" charset="-128"/>
-              <a:ea typeface="メイリオ" panose="020B0604030504040204" pitchFamily="50" charset="-128"/>
-            </a:endParaRPr>
-          </a:p>
-          <a:p>
-            <a:pPr algn="l">
-              <a:lnSpc>
-                <a:spcPts val="3500"/>
-              </a:lnSpc>
-            </a:pPr>
-            <a:r>
-              <a:rPr sz="2800" b="0" dirty="0">
-                <a:solidFill>
-                  <a:srgbClr val="333333"/>
-                </a:solidFill>
-                <a:latin typeface="メイリオ" panose="020B0604030504040204" pitchFamily="50" charset="-128"/>
-                <a:ea typeface="メイリオ" panose="020B0604030504040204" pitchFamily="50" charset="-128"/>
-              </a:rPr>
-              <a:t>　「</a:t>
-            </a:r>
-            <a:r>
-              <a:rPr sz="2800" b="0" dirty="0" err="1">
-                <a:solidFill>
-                  <a:srgbClr val="333333"/>
-                </a:solidFill>
-                <a:latin typeface="メイリオ" panose="020B0604030504040204" pitchFamily="50" charset="-128"/>
-                <a:ea typeface="メイリオ" panose="020B0604030504040204" pitchFamily="50" charset="-128"/>
-              </a:rPr>
-              <a:t>問題解決の過程を振り返って評価・改善しようとする</a:t>
-            </a:r>
-            <a:endParaRPr sz="2800" b="0" dirty="0">
-              <a:solidFill>
-                <a:srgbClr val="333333"/>
-              </a:solidFill>
-              <a:latin typeface="メイリオ" panose="020B0604030504040204" pitchFamily="50" charset="-128"/>
-              <a:ea typeface="メイリオ" panose="020B0604030504040204" pitchFamily="50" charset="-128"/>
-            </a:endParaRPr>
-          </a:p>
-          <a:p>
-            <a:pPr algn="l">
-              <a:lnSpc>
-                <a:spcPts val="3500"/>
-              </a:lnSpc>
-            </a:pPr>
-            <a:r>
-              <a:rPr sz="2800" b="0" dirty="0">
-                <a:solidFill>
-                  <a:srgbClr val="333333"/>
-                </a:solidFill>
-                <a:latin typeface="メイリオ" panose="020B0604030504040204" pitchFamily="50" charset="-128"/>
-                <a:ea typeface="メイリオ" panose="020B0604030504040204" pitchFamily="50" charset="-128"/>
-              </a:rPr>
-              <a:t>　　</a:t>
-            </a:r>
-            <a:r>
-              <a:rPr sz="2800" b="0" dirty="0" err="1">
-                <a:solidFill>
-                  <a:srgbClr val="333333"/>
-                </a:solidFill>
-                <a:latin typeface="メイリオ" panose="020B0604030504040204" pitchFamily="50" charset="-128"/>
-                <a:ea typeface="メイリオ" panose="020B0604030504040204" pitchFamily="50" charset="-128"/>
-              </a:rPr>
-              <a:t>態度を養う</a:t>
-            </a:r>
-            <a:r>
-              <a:rPr sz="2800" b="0" dirty="0">
-                <a:solidFill>
-                  <a:srgbClr val="333333"/>
-                </a:solidFill>
-                <a:latin typeface="メイリオ" panose="020B0604030504040204" pitchFamily="50" charset="-128"/>
-                <a:ea typeface="メイリオ" panose="020B0604030504040204" pitchFamily="50" charset="-128"/>
-              </a:rPr>
-              <a:t>」</a:t>
-            </a:r>
-          </a:p>
-          <a:p>
-            <a:pPr algn="l">
-              <a:lnSpc>
-                <a:spcPts val="3500"/>
-              </a:lnSpc>
-            </a:pPr>
-            <a:endParaRPr sz="2800" b="0" dirty="0">
-              <a:solidFill>
-                <a:srgbClr val="333333"/>
-              </a:solidFill>
-              <a:latin typeface="メイリオ" panose="020B0604030504040204" pitchFamily="50" charset="-128"/>
-              <a:ea typeface="メイリオ" panose="020B0604030504040204" pitchFamily="50" charset="-128"/>
-            </a:endParaRPr>
-          </a:p>
-          <a:p>
-            <a:pPr algn="l">
-              <a:lnSpc>
-                <a:spcPts val="3500"/>
-              </a:lnSpc>
-            </a:pPr>
-            <a:r>
-              <a:rPr sz="2800" b="0" dirty="0">
-                <a:solidFill>
-                  <a:srgbClr val="333333"/>
-                </a:solidFill>
-                <a:latin typeface="メイリオ" panose="020B0604030504040204" pitchFamily="50" charset="-128"/>
-                <a:ea typeface="メイリオ" panose="020B0604030504040204" pitchFamily="50" charset="-128"/>
-              </a:rPr>
-              <a:t>■ </a:t>
-            </a:r>
-            <a:r>
-              <a:rPr sz="2800" b="0" dirty="0" err="1">
-                <a:solidFill>
-                  <a:srgbClr val="333333"/>
-                </a:solidFill>
-                <a:latin typeface="メイリオ" panose="020B0604030504040204" pitchFamily="50" charset="-128"/>
-                <a:ea typeface="メイリオ" panose="020B0604030504040204" pitchFamily="50" charset="-128"/>
-              </a:rPr>
-              <a:t>重要ポイント</a:t>
-            </a:r>
-            <a:endParaRPr sz="2800" b="0" dirty="0">
-              <a:solidFill>
-                <a:srgbClr val="333333"/>
-              </a:solidFill>
-              <a:latin typeface="メイリオ" panose="020B0604030504040204" pitchFamily="50" charset="-128"/>
-              <a:ea typeface="メイリオ" panose="020B0604030504040204" pitchFamily="50" charset="-128"/>
-            </a:endParaRPr>
-          </a:p>
-          <a:p>
-            <a:pPr algn="l">
-              <a:lnSpc>
-                <a:spcPts val="3500"/>
-              </a:lnSpc>
-            </a:pPr>
-            <a:r>
-              <a:rPr sz="2800" b="0" dirty="0">
-                <a:solidFill>
-                  <a:srgbClr val="333333"/>
-                </a:solidFill>
-                <a:latin typeface="メイリオ" panose="020B0604030504040204" pitchFamily="50" charset="-128"/>
-                <a:ea typeface="メイリオ" panose="020B0604030504040204" pitchFamily="50" charset="-128"/>
-              </a:rPr>
-              <a:t>　→ </a:t>
-            </a:r>
-            <a:r>
-              <a:rPr sz="2800" b="0" dirty="0" err="1">
-                <a:solidFill>
-                  <a:srgbClr val="333333"/>
-                </a:solidFill>
-                <a:latin typeface="メイリオ" panose="020B0604030504040204" pitchFamily="50" charset="-128"/>
-                <a:ea typeface="メイリオ" panose="020B0604030504040204" pitchFamily="50" charset="-128"/>
-              </a:rPr>
-              <a:t>振り返りは「目標」に明記された重要な学習活動</a:t>
-            </a:r>
-            <a:endParaRPr sz="2800" b="0" dirty="0">
-              <a:solidFill>
-                <a:srgbClr val="333333"/>
-              </a:solidFill>
-              <a:latin typeface="メイリオ" panose="020B0604030504040204" pitchFamily="50" charset="-128"/>
-              <a:ea typeface="メイリオ" panose="020B0604030504040204" pitchFamily="50" charset="-128"/>
-            </a:endParaRPr>
-          </a:p>
-          <a:p>
-            <a:pPr algn="l">
-              <a:lnSpc>
-                <a:spcPts val="3500"/>
-              </a:lnSpc>
-            </a:pPr>
-            <a:r>
-              <a:rPr sz="2800" b="0" dirty="0">
-                <a:solidFill>
-                  <a:srgbClr val="333333"/>
-                </a:solidFill>
-                <a:latin typeface="メイリオ" panose="020B0604030504040204" pitchFamily="50" charset="-128"/>
-                <a:ea typeface="メイリオ" panose="020B0604030504040204" pitchFamily="50" charset="-128"/>
-              </a:rPr>
-              <a:t>　→「</a:t>
-            </a:r>
-            <a:r>
-              <a:rPr sz="2800" b="0" dirty="0" err="1">
-                <a:solidFill>
-                  <a:srgbClr val="333333"/>
-                </a:solidFill>
-                <a:latin typeface="メイリオ" panose="020B0604030504040204" pitchFamily="50" charset="-128"/>
-                <a:ea typeface="メイリオ" panose="020B0604030504040204" pitchFamily="50" charset="-128"/>
-              </a:rPr>
-              <a:t>させてあげること」ではなく「育てるべき力</a:t>
-            </a:r>
-            <a:r>
-              <a:rPr sz="2800" b="0" dirty="0">
-                <a:solidFill>
-                  <a:srgbClr val="333333"/>
-                </a:solidFill>
-                <a:latin typeface="メイリオ" panose="020B0604030504040204" pitchFamily="50" charset="-128"/>
-                <a:ea typeface="メイリオ" panose="020B0604030504040204" pitchFamily="50" charset="-128"/>
-              </a:rPr>
-              <a:t>」</a:t>
-            </a:r>
-          </a:p>
-        </p:txBody>
-      </p:sp>
-      <p:sp>
-        <p:nvSpPr>
-          <p:cNvPr id="5" name="TextBox 4"/>
-          <p:cNvSpPr txBox="1"/>
-          <p:nvPr/>
-        </p:nvSpPr>
-        <p:spPr>
-          <a:xfrm>
-            <a:off x="11292119" y="6570000"/>
-            <a:ext cx="720000" cy="216000"/>
-          </a:xfrm>
-          <a:prstGeom prst="rect">
-            <a:avLst/>
-          </a:prstGeom>
-          <a:noFill/>
-        </p:spPr>
-        <p:txBody>
-          <a:bodyPr wrap="none">
-            <a:spAutoFit/>
-          </a:bodyPr>
-          <a:lstStyle/>
-          <a:p>
-            <a:pPr algn="r"/>
-            <a:r>
-              <a:rPr sz="1000">
-                <a:solidFill>
-                  <a:srgbClr val="999999"/>
-                </a:solidFill>
-                <a:latin typeface="BIZ UDPGothic"/>
-              </a:rPr>
-              <a:t>12 / 20</a:t>
-            </a:r>
-          </a:p>
-        </p:txBody>
-      </p:sp>
-    </p:spTree>
-  </p:cSld>
-  <p:clrMapOvr>
-    <a:masterClrMapping/>
-  </p:clrMapOvr>
-</p:sld>
-</file>
-
-<file path=ppt/slides/slide28.xml><?xml version="1.0" encoding="utf-8"?>
-<p:sld xmlns:a="http://schemas.openxmlformats.org/drawingml/2006/main" xmlns:r="http://schemas.openxmlformats.org/officeDocument/2006/relationships" xmlns:p="http://schemas.openxmlformats.org/presentationml/2006/main">
-  <p:cSld>
-    <p:spTree>
-      <p:nvGrpSpPr>
-        <p:cNvPr id="1" name=""/>
-        <p:cNvGrpSpPr/>
-        <p:nvPr/>
-      </p:nvGrpSpPr>
-      <p:grpSpPr>
-        <a:xfrm>
-          <a:off x="0" y="0"/>
-          <a:ext cx="0" cy="0"/>
-          <a:chOff x="0" y="0"/>
-          <a:chExt cx="0" cy="0"/>
-        </a:xfrm>
-      </p:grpSpPr>
-      <p:sp>
-        <p:nvSpPr>
-          <p:cNvPr id="2" name="Rectangle 1"/>
-          <p:cNvSpPr/>
-          <p:nvPr/>
-        </p:nvSpPr>
-        <p:spPr>
-          <a:xfrm>
-            <a:off x="0" y="0"/>
-            <a:ext cx="12192119" cy="576000"/>
-          </a:xfrm>
-          <a:prstGeom prst="rect">
-            <a:avLst/>
-          </a:prstGeom>
-          <a:solidFill>
-            <a:srgbClr val="1F3864"/>
-          </a:solidFill>
-          <a:ln>
-            <a:noFill/>
-          </a:ln>
-        </p:spPr>
-        <p:style>
-          <a:lnRef idx="1">
-            <a:schemeClr val="accent1"/>
-          </a:lnRef>
-          <a:fillRef idx="3">
-            <a:schemeClr val="accent1"/>
-          </a:fillRef>
-          <a:effectRef idx="2">
-            <a:schemeClr val="accent1"/>
-          </a:effectRef>
-          <a:fontRef idx="minor">
-            <a:schemeClr val="lt1"/>
-          </a:fontRef>
-        </p:style>
-        <p:txBody>
-          <a:bodyPr rtlCol="0" anchor="ctr"/>
-          <a:lstStyle/>
-          <a:p>
-            <a:pPr algn="ctr"/>
-            <a:endParaRPr/>
-          </a:p>
-        </p:txBody>
-      </p:sp>
-      <p:sp>
-        <p:nvSpPr>
-          <p:cNvPr id="3" name="TextBox 2"/>
-          <p:cNvSpPr txBox="1"/>
-          <p:nvPr/>
-        </p:nvSpPr>
-        <p:spPr>
-          <a:xfrm>
-            <a:off x="180000" y="54000"/>
-            <a:ext cx="11832119" cy="468000"/>
-          </a:xfrm>
-          <a:prstGeom prst="rect">
-            <a:avLst/>
-          </a:prstGeom>
-          <a:noFill/>
-        </p:spPr>
-        <p:txBody>
-          <a:bodyPr wrap="none">
-            <a:spAutoFit/>
-          </a:bodyPr>
-          <a:lstStyle/>
-          <a:p>
-            <a:pPr algn="l"/>
-            <a:r>
-              <a:rPr sz="2400" b="1">
-                <a:solidFill>
-                  <a:srgbClr val="FFFFFF"/>
-                </a:solidFill>
-                <a:latin typeface="BIZ UDPGothic"/>
-              </a:rPr>
-              <a:t>「よい振り返り」とはどんなものか</a:t>
-            </a:r>
-          </a:p>
-        </p:txBody>
-      </p:sp>
-      <p:sp>
-        <p:nvSpPr>
-          <p:cNvPr id="4" name="TextBox 3"/>
-          <p:cNvSpPr txBox="1"/>
-          <p:nvPr/>
-        </p:nvSpPr>
-        <p:spPr>
-          <a:xfrm>
-            <a:off x="288000" y="720000"/>
-            <a:ext cx="11616119" cy="5418022"/>
-          </a:xfrm>
-          <a:prstGeom prst="rect">
-            <a:avLst/>
-          </a:prstGeom>
-          <a:noFill/>
-        </p:spPr>
-        <p:txBody>
-          <a:bodyPr wrap="square">
-            <a:spAutoFit/>
-          </a:bodyPr>
-          <a:lstStyle/>
-          <a:p>
-            <a:pPr algn="l">
-              <a:lnSpc>
-                <a:spcPts val="3500"/>
-              </a:lnSpc>
-            </a:pPr>
-            <a:r>
-              <a:rPr sz="2800" b="0" dirty="0">
-                <a:solidFill>
-                  <a:srgbClr val="333333"/>
-                </a:solidFill>
-                <a:latin typeface="BIZ UDPGothic"/>
-              </a:rPr>
-              <a:t>■ </a:t>
-            </a:r>
-            <a:r>
-              <a:rPr sz="2800" b="0" dirty="0" err="1">
-                <a:solidFill>
-                  <a:srgbClr val="333333"/>
-                </a:solidFill>
-                <a:latin typeface="BIZ UDPGothic"/>
-              </a:rPr>
-              <a:t>振り返りの「質」を問う</a:t>
-            </a:r>
-            <a:endParaRPr sz="2800" b="0" dirty="0">
-              <a:solidFill>
-                <a:srgbClr val="333333"/>
-              </a:solidFill>
-              <a:latin typeface="BIZ UDPGothic"/>
-            </a:endParaRPr>
-          </a:p>
-          <a:p>
-            <a:pPr algn="l">
-              <a:lnSpc>
-                <a:spcPts val="3500"/>
-              </a:lnSpc>
-            </a:pPr>
-            <a:r>
-              <a:rPr sz="2800" b="0" dirty="0">
-                <a:solidFill>
-                  <a:srgbClr val="333333"/>
-                </a:solidFill>
-                <a:latin typeface="BIZ UDPGothic"/>
-              </a:rPr>
-              <a:t>　✕ </a:t>
-            </a:r>
-            <a:r>
-              <a:rPr sz="2800" b="0" dirty="0" err="1">
-                <a:solidFill>
-                  <a:srgbClr val="333333"/>
-                </a:solidFill>
-                <a:latin typeface="BIZ UDPGothic"/>
-              </a:rPr>
-              <a:t>低質な振り返りの例</a:t>
-            </a:r>
-            <a:r>
-              <a:rPr sz="2800" b="0" dirty="0">
-                <a:solidFill>
-                  <a:srgbClr val="333333"/>
-                </a:solidFill>
-                <a:latin typeface="BIZ UDPGothic"/>
-              </a:rPr>
-              <a:t>：</a:t>
-            </a:r>
-          </a:p>
-          <a:p>
-            <a:pPr algn="l">
-              <a:lnSpc>
-                <a:spcPts val="3500"/>
-              </a:lnSpc>
-            </a:pPr>
-            <a:r>
-              <a:rPr sz="2800" b="0" dirty="0">
-                <a:solidFill>
-                  <a:srgbClr val="333333"/>
-                </a:solidFill>
-                <a:latin typeface="BIZ UDPGothic"/>
-              </a:rPr>
-              <a:t>　　「</a:t>
-            </a:r>
-            <a:r>
-              <a:rPr sz="2800" b="0" dirty="0" err="1">
-                <a:solidFill>
-                  <a:srgbClr val="333333"/>
-                </a:solidFill>
-                <a:latin typeface="BIZ UDPGothic"/>
-              </a:rPr>
-              <a:t>今日の授業は楽しかった</a:t>
-            </a:r>
-            <a:r>
-              <a:rPr sz="2800" b="0" dirty="0">
-                <a:solidFill>
-                  <a:srgbClr val="333333"/>
-                </a:solidFill>
-                <a:latin typeface="BIZ UDPGothic"/>
-              </a:rPr>
-              <a:t>」</a:t>
-            </a:r>
-            <a:r>
-              <a:rPr lang="ja-JP" altLang="en-US" sz="2800" dirty="0">
-                <a:solidFill>
-                  <a:srgbClr val="333333"/>
-                </a:solidFill>
-                <a:latin typeface="BIZ UDPGothic"/>
-              </a:rPr>
-              <a:t>、</a:t>
-            </a:r>
-            <a:r>
-              <a:rPr sz="2800" b="0" dirty="0">
-                <a:solidFill>
-                  <a:srgbClr val="333333"/>
-                </a:solidFill>
-                <a:latin typeface="BIZ UDPGothic"/>
-              </a:rPr>
-              <a:t>　「</a:t>
-            </a:r>
-            <a:r>
-              <a:rPr sz="2800" b="0" dirty="0" err="1">
-                <a:solidFill>
-                  <a:srgbClr val="333333"/>
-                </a:solidFill>
-                <a:latin typeface="BIZ UDPGothic"/>
-              </a:rPr>
-              <a:t>二次方程式がわかった</a:t>
-            </a:r>
-            <a:r>
-              <a:rPr sz="2800" b="0" dirty="0">
-                <a:solidFill>
-                  <a:srgbClr val="333333"/>
-                </a:solidFill>
-                <a:latin typeface="BIZ UDPGothic"/>
-              </a:rPr>
-              <a:t>」</a:t>
-            </a:r>
-          </a:p>
-          <a:p>
-            <a:pPr algn="l">
-              <a:lnSpc>
-                <a:spcPts val="3500"/>
-              </a:lnSpc>
-            </a:pPr>
-            <a:r>
-              <a:rPr sz="2800" b="0" dirty="0">
-                <a:solidFill>
-                  <a:srgbClr val="333333"/>
-                </a:solidFill>
-                <a:latin typeface="BIZ UDPGothic"/>
-              </a:rPr>
-              <a:t>　　「</a:t>
-            </a:r>
-            <a:r>
-              <a:rPr sz="2800" b="0" dirty="0" err="1">
-                <a:solidFill>
-                  <a:srgbClr val="333333"/>
-                </a:solidFill>
-                <a:latin typeface="BIZ UDPGothic"/>
-              </a:rPr>
-              <a:t>難しかった</a:t>
-            </a:r>
-            <a:r>
-              <a:rPr sz="2800" b="0" dirty="0">
-                <a:solidFill>
-                  <a:srgbClr val="333333"/>
-                </a:solidFill>
-                <a:latin typeface="BIZ UDPGothic"/>
-              </a:rPr>
-              <a:t>」</a:t>
-            </a:r>
-          </a:p>
-          <a:p>
-            <a:pPr algn="l">
-              <a:lnSpc>
-                <a:spcPts val="3500"/>
-              </a:lnSpc>
-            </a:pPr>
-            <a:r>
-              <a:rPr sz="2800" b="0" dirty="0">
-                <a:solidFill>
-                  <a:srgbClr val="333333"/>
-                </a:solidFill>
-                <a:latin typeface="BIZ UDPGothic"/>
-              </a:rPr>
-              <a:t>　○ </a:t>
-            </a:r>
-            <a:r>
-              <a:rPr sz="2800" b="0" dirty="0" err="1">
-                <a:solidFill>
-                  <a:srgbClr val="333333"/>
-                </a:solidFill>
-                <a:latin typeface="BIZ UDPGothic"/>
-              </a:rPr>
-              <a:t>高質な振り返りの例</a:t>
-            </a:r>
-            <a:r>
-              <a:rPr sz="2800" b="0" dirty="0">
-                <a:solidFill>
-                  <a:srgbClr val="333333"/>
-                </a:solidFill>
-                <a:latin typeface="BIZ UDPGothic"/>
-              </a:rPr>
-              <a:t>：</a:t>
-            </a:r>
-          </a:p>
-          <a:p>
-            <a:pPr algn="l">
-              <a:lnSpc>
-                <a:spcPts val="3500"/>
-              </a:lnSpc>
-            </a:pPr>
-            <a:r>
-              <a:rPr sz="2800" b="0" dirty="0">
-                <a:solidFill>
-                  <a:srgbClr val="333333"/>
-                </a:solidFill>
-                <a:latin typeface="BIZ UDPGothic"/>
-              </a:rPr>
-              <a:t>　　「</a:t>
-            </a:r>
-            <a:r>
-              <a:rPr sz="2800" b="0" dirty="0" err="1">
-                <a:solidFill>
-                  <a:srgbClr val="333333"/>
-                </a:solidFill>
-                <a:latin typeface="BIZ UDPGothic"/>
-              </a:rPr>
-              <a:t>因数分解でとけない場合に解の公式を使う、という</a:t>
-            </a:r>
-            <a:endParaRPr sz="2800" b="0" dirty="0">
-              <a:solidFill>
-                <a:srgbClr val="333333"/>
-              </a:solidFill>
-              <a:latin typeface="BIZ UDPGothic"/>
-            </a:endParaRPr>
-          </a:p>
-          <a:p>
-            <a:pPr algn="l">
-              <a:lnSpc>
-                <a:spcPts val="3500"/>
-              </a:lnSpc>
-            </a:pPr>
-            <a:r>
-              <a:rPr sz="2800" b="0" dirty="0">
-                <a:solidFill>
-                  <a:srgbClr val="333333"/>
-                </a:solidFill>
-                <a:latin typeface="BIZ UDPGothic"/>
-              </a:rPr>
-              <a:t>　　　</a:t>
-            </a:r>
-            <a:r>
-              <a:rPr sz="2800" b="0" dirty="0" err="1">
-                <a:solidFill>
-                  <a:srgbClr val="333333"/>
-                </a:solidFill>
-                <a:latin typeface="BIZ UDPGothic"/>
-              </a:rPr>
-              <a:t>判断ができるようになった。次回は使う場面を</a:t>
-            </a:r>
-            <a:endParaRPr sz="2800" b="0" dirty="0">
-              <a:solidFill>
-                <a:srgbClr val="333333"/>
-              </a:solidFill>
-              <a:latin typeface="BIZ UDPGothic"/>
-            </a:endParaRPr>
-          </a:p>
-          <a:p>
-            <a:pPr algn="l">
-              <a:lnSpc>
-                <a:spcPts val="3500"/>
-              </a:lnSpc>
-            </a:pPr>
-            <a:r>
-              <a:rPr sz="2800" b="0" dirty="0">
-                <a:solidFill>
-                  <a:srgbClr val="333333"/>
-                </a:solidFill>
-                <a:latin typeface="BIZ UDPGothic"/>
-              </a:rPr>
-              <a:t>　　　</a:t>
-            </a:r>
-            <a:r>
-              <a:rPr sz="2800" b="0" dirty="0" err="1">
-                <a:solidFill>
-                  <a:srgbClr val="333333"/>
-                </a:solidFill>
-                <a:latin typeface="BIZ UDPGothic"/>
-              </a:rPr>
-              <a:t>自分で判断できるようにしたい</a:t>
-            </a:r>
-            <a:r>
-              <a:rPr sz="2800" b="0" dirty="0">
-                <a:solidFill>
-                  <a:srgbClr val="333333"/>
-                </a:solidFill>
-                <a:latin typeface="BIZ UDPGothic"/>
-              </a:rPr>
-              <a:t>」</a:t>
-            </a:r>
-          </a:p>
-          <a:p>
-            <a:pPr algn="l">
-              <a:lnSpc>
-                <a:spcPts val="3500"/>
-              </a:lnSpc>
-            </a:pPr>
-            <a:endParaRPr sz="2800" b="0" dirty="0">
-              <a:solidFill>
-                <a:srgbClr val="333333"/>
-              </a:solidFill>
-              <a:latin typeface="BIZ UDPGothic"/>
-            </a:endParaRPr>
-          </a:p>
-          <a:p>
-            <a:pPr algn="l">
-              <a:lnSpc>
-                <a:spcPts val="3500"/>
-              </a:lnSpc>
-            </a:pPr>
-            <a:r>
-              <a:rPr sz="2800" b="0" dirty="0">
-                <a:solidFill>
-                  <a:srgbClr val="333333"/>
-                </a:solidFill>
-                <a:latin typeface="BIZ UDPGothic"/>
-              </a:rPr>
-              <a:t>■ 振り返りの３つの問い（軸）</a:t>
-            </a:r>
-          </a:p>
-          <a:p>
-            <a:pPr algn="l">
-              <a:lnSpc>
-                <a:spcPts val="3500"/>
-              </a:lnSpc>
-            </a:pPr>
-            <a:r>
-              <a:rPr sz="2800" b="0" dirty="0">
-                <a:solidFill>
-                  <a:srgbClr val="333333"/>
-                </a:solidFill>
-                <a:latin typeface="BIZ UDPGothic"/>
-              </a:rPr>
-              <a:t>　① </a:t>
-            </a:r>
-            <a:r>
-              <a:rPr sz="2800" b="0" dirty="0" err="1">
-                <a:solidFill>
-                  <a:srgbClr val="333333"/>
-                </a:solidFill>
-                <a:latin typeface="BIZ UDPGothic"/>
-              </a:rPr>
-              <a:t>何がわかったか（理解</a:t>
-            </a:r>
-            <a:r>
-              <a:rPr sz="2800" b="0" dirty="0">
-                <a:solidFill>
-                  <a:srgbClr val="333333"/>
-                </a:solidFill>
-                <a:latin typeface="BIZ UDPGothic"/>
-              </a:rPr>
-              <a:t>）　② </a:t>
-            </a:r>
-            <a:r>
-              <a:rPr sz="2800" b="0" dirty="0" err="1">
-                <a:solidFill>
-                  <a:srgbClr val="333333"/>
-                </a:solidFill>
-                <a:latin typeface="BIZ UDPGothic"/>
-              </a:rPr>
-              <a:t>なぜそう考えたか（根拠</a:t>
-            </a:r>
-            <a:r>
-              <a:rPr sz="2800" b="0" dirty="0">
-                <a:solidFill>
-                  <a:srgbClr val="333333"/>
-                </a:solidFill>
-                <a:latin typeface="BIZ UDPGothic"/>
-              </a:rPr>
-              <a:t>）　</a:t>
-            </a:r>
-            <a:endParaRPr lang="en-US" sz="2800" b="0" dirty="0">
-              <a:solidFill>
-                <a:srgbClr val="333333"/>
-              </a:solidFill>
-              <a:latin typeface="BIZ UDPGothic"/>
-            </a:endParaRPr>
-          </a:p>
-          <a:p>
-            <a:pPr algn="l">
-              <a:lnSpc>
-                <a:spcPts val="3500"/>
-              </a:lnSpc>
-            </a:pPr>
-            <a:r>
-              <a:rPr lang="ja-JP" altLang="en-US" sz="2800" b="0" dirty="0">
-                <a:solidFill>
-                  <a:srgbClr val="333333"/>
-                </a:solidFill>
-                <a:latin typeface="BIZ UDPGothic"/>
-              </a:rPr>
-              <a:t>  </a:t>
-            </a:r>
-            <a:r>
-              <a:rPr sz="2800" b="0" dirty="0">
-                <a:solidFill>
-                  <a:srgbClr val="333333"/>
-                </a:solidFill>
-                <a:latin typeface="BIZ UDPGothic"/>
-              </a:rPr>
-              <a:t>③ </a:t>
-            </a:r>
-            <a:r>
-              <a:rPr sz="2800" b="0" dirty="0" err="1">
-                <a:solidFill>
-                  <a:srgbClr val="333333"/>
-                </a:solidFill>
-                <a:latin typeface="BIZ UDPGothic"/>
-              </a:rPr>
-              <a:t>次に何をしたいか（見通し</a:t>
-            </a:r>
-            <a:r>
-              <a:rPr sz="2800" b="0" dirty="0">
-                <a:solidFill>
-                  <a:srgbClr val="333333"/>
-                </a:solidFill>
-                <a:latin typeface="BIZ UDPGothic"/>
-              </a:rPr>
-              <a:t>）</a:t>
-            </a:r>
-          </a:p>
-        </p:txBody>
-      </p:sp>
-      <p:sp>
-        <p:nvSpPr>
-          <p:cNvPr id="5" name="TextBox 4"/>
-          <p:cNvSpPr txBox="1"/>
-          <p:nvPr/>
-        </p:nvSpPr>
-        <p:spPr>
-          <a:xfrm>
-            <a:off x="11292119" y="6570000"/>
-            <a:ext cx="720000" cy="216000"/>
-          </a:xfrm>
-          <a:prstGeom prst="rect">
-            <a:avLst/>
-          </a:prstGeom>
-          <a:noFill/>
-        </p:spPr>
-        <p:txBody>
-          <a:bodyPr wrap="none">
-            <a:spAutoFit/>
-          </a:bodyPr>
-          <a:lstStyle/>
-          <a:p>
-            <a:pPr algn="r"/>
-            <a:r>
-              <a:rPr sz="1000">
-                <a:solidFill>
-                  <a:srgbClr val="999999"/>
-                </a:solidFill>
-                <a:latin typeface="BIZ UDPGothic"/>
-              </a:rPr>
-              <a:t>15 / 20</a:t>
-            </a:r>
-          </a:p>
-        </p:txBody>
-      </p:sp>
-    </p:spTree>
-  </p:cSld>
-  <p:clrMapOvr>
-    <a:masterClrMapping/>
-  </p:clrMapOvr>
-</p:sld>
-</file>
-
-<file path=ppt/slides/slide29.xml><?xml version="1.0" encoding="utf-8"?>
-<p:sld xmlns:a="http://schemas.openxmlformats.org/drawingml/2006/main" xmlns:r="http://schemas.openxmlformats.org/officeDocument/2006/relationships" xmlns:p="http://schemas.openxmlformats.org/presentationml/2006/main">
-  <p:cSld>
-    <p:spTree>
-      <p:nvGrpSpPr>
-        <p:cNvPr id="1" name=""/>
-        <p:cNvGrpSpPr/>
-        <p:nvPr/>
-      </p:nvGrpSpPr>
-      <p:grpSpPr>
-        <a:xfrm>
-          <a:off x="0" y="0"/>
-          <a:ext cx="0" cy="0"/>
-          <a:chOff x="0" y="0"/>
-          <a:chExt cx="0" cy="0"/>
-        </a:xfrm>
-      </p:grpSpPr>
-      <p:sp>
-        <p:nvSpPr>
-          <p:cNvPr id="2" name="Rectangle 1"/>
-          <p:cNvSpPr/>
-          <p:nvPr/>
-        </p:nvSpPr>
-        <p:spPr>
-          <a:xfrm>
-            <a:off x="0" y="0"/>
-            <a:ext cx="12192119" cy="576000"/>
-          </a:xfrm>
-          <a:prstGeom prst="rect">
-            <a:avLst/>
-          </a:prstGeom>
-          <a:solidFill>
-            <a:srgbClr val="1F3864"/>
-          </a:solidFill>
-          <a:ln>
-            <a:noFill/>
-          </a:ln>
-        </p:spPr>
-        <p:style>
-          <a:lnRef idx="1">
-            <a:schemeClr val="accent1"/>
-          </a:lnRef>
-          <a:fillRef idx="3">
-            <a:schemeClr val="accent1"/>
-          </a:fillRef>
-          <a:effectRef idx="2">
-            <a:schemeClr val="accent1"/>
-          </a:effectRef>
-          <a:fontRef idx="minor">
-            <a:schemeClr val="lt1"/>
-          </a:fontRef>
-        </p:style>
-        <p:txBody>
-          <a:bodyPr rtlCol="0" anchor="ctr"/>
-          <a:lstStyle/>
-          <a:p>
-            <a:pPr algn="ctr"/>
-            <a:endParaRPr/>
-          </a:p>
-        </p:txBody>
-      </p:sp>
-      <p:sp>
-        <p:nvSpPr>
-          <p:cNvPr id="3" name="TextBox 2"/>
-          <p:cNvSpPr txBox="1"/>
-          <p:nvPr/>
-        </p:nvSpPr>
-        <p:spPr>
-          <a:xfrm>
-            <a:off x="180000" y="54000"/>
-            <a:ext cx="11832119" cy="468000"/>
-          </a:xfrm>
-          <a:prstGeom prst="rect">
-            <a:avLst/>
-          </a:prstGeom>
-          <a:noFill/>
-        </p:spPr>
-        <p:txBody>
-          <a:bodyPr wrap="none">
-            <a:spAutoFit/>
-          </a:bodyPr>
-          <a:lstStyle/>
-          <a:p>
-            <a:pPr algn="l"/>
-            <a:r>
-              <a:rPr sz="2400" b="1">
-                <a:solidFill>
-                  <a:srgbClr val="FFFFFF"/>
-                </a:solidFill>
-                <a:latin typeface="BIZ UDPGothic"/>
-              </a:rPr>
-              <a:t>振り返り指導の５つのポイント</a:t>
-            </a:r>
-          </a:p>
-        </p:txBody>
-      </p:sp>
-      <p:sp>
-        <p:nvSpPr>
-          <p:cNvPr id="4" name="TextBox 3"/>
-          <p:cNvSpPr txBox="1"/>
-          <p:nvPr/>
-        </p:nvSpPr>
-        <p:spPr>
-          <a:xfrm>
-            <a:off x="288000" y="720000"/>
-            <a:ext cx="11616119" cy="5837495"/>
-          </a:xfrm>
-          <a:prstGeom prst="rect">
-            <a:avLst/>
-          </a:prstGeom>
-          <a:noFill/>
-        </p:spPr>
-        <p:txBody>
-          <a:bodyPr wrap="square">
-            <a:spAutoFit/>
-          </a:bodyPr>
-          <a:lstStyle/>
-          <a:p>
-            <a:pPr algn="l">
-              <a:lnSpc>
-                <a:spcPts val="3200"/>
-              </a:lnSpc>
-            </a:pPr>
-            <a:r>
-              <a:rPr sz="2800" b="0" dirty="0">
-                <a:solidFill>
-                  <a:srgbClr val="333333"/>
-                </a:solidFill>
-                <a:latin typeface="BIZ UDPGothic"/>
-              </a:rPr>
-              <a:t>① </a:t>
-            </a:r>
-            <a:r>
-              <a:rPr sz="2800" b="0" dirty="0" err="1">
-                <a:solidFill>
-                  <a:srgbClr val="333333"/>
-                </a:solidFill>
-                <a:latin typeface="BIZ UDPGothic"/>
-              </a:rPr>
-              <a:t>振り返りの「視点」を事前に示す</a:t>
-            </a:r>
-            <a:endParaRPr sz="2800" b="0" dirty="0">
-              <a:solidFill>
-                <a:srgbClr val="333333"/>
-              </a:solidFill>
-              <a:latin typeface="BIZ UDPGothic"/>
-            </a:endParaRPr>
-          </a:p>
-          <a:p>
-            <a:pPr algn="l">
-              <a:lnSpc>
-                <a:spcPts val="3200"/>
-              </a:lnSpc>
-            </a:pPr>
-            <a:r>
-              <a:rPr sz="2800" b="0" dirty="0">
-                <a:solidFill>
-                  <a:srgbClr val="333333"/>
-                </a:solidFill>
-                <a:latin typeface="BIZ UDPGothic"/>
-              </a:rPr>
-              <a:t>　→ </a:t>
-            </a:r>
-            <a:r>
-              <a:rPr sz="2800" b="0" dirty="0" err="1">
-                <a:solidFill>
-                  <a:srgbClr val="333333"/>
-                </a:solidFill>
-                <a:latin typeface="BIZ UDPGothic"/>
-              </a:rPr>
-              <a:t>本時のめあてと対応させて板書する</a:t>
-            </a:r>
-            <a:endParaRPr sz="2800" b="0" dirty="0">
-              <a:solidFill>
-                <a:srgbClr val="333333"/>
-              </a:solidFill>
-              <a:latin typeface="BIZ UDPGothic"/>
-            </a:endParaRPr>
-          </a:p>
-          <a:p>
-            <a:pPr algn="l">
-              <a:lnSpc>
-                <a:spcPts val="3200"/>
-              </a:lnSpc>
-            </a:pPr>
-            <a:endParaRPr sz="2800" b="0" dirty="0">
-              <a:solidFill>
-                <a:srgbClr val="333333"/>
-              </a:solidFill>
-              <a:latin typeface="BIZ UDPGothic"/>
-            </a:endParaRPr>
-          </a:p>
-          <a:p>
-            <a:pPr algn="l">
-              <a:lnSpc>
-                <a:spcPts val="3200"/>
-              </a:lnSpc>
-            </a:pPr>
-            <a:r>
-              <a:rPr sz="2800" b="0" dirty="0">
-                <a:solidFill>
-                  <a:srgbClr val="333333"/>
-                </a:solidFill>
-                <a:latin typeface="BIZ UDPGothic"/>
-              </a:rPr>
-              <a:t>② 「</a:t>
-            </a:r>
-            <a:r>
-              <a:rPr sz="2800" b="0" dirty="0" err="1">
-                <a:solidFill>
-                  <a:srgbClr val="333333"/>
-                </a:solidFill>
-                <a:latin typeface="BIZ UDPGothic"/>
-              </a:rPr>
-              <a:t>書く」ことで思考を外化させる</a:t>
-            </a:r>
-            <a:endParaRPr sz="2800" b="0" dirty="0">
-              <a:solidFill>
-                <a:srgbClr val="333333"/>
-              </a:solidFill>
-              <a:latin typeface="BIZ UDPGothic"/>
-            </a:endParaRPr>
-          </a:p>
-          <a:p>
-            <a:pPr algn="l">
-              <a:lnSpc>
-                <a:spcPts val="3200"/>
-              </a:lnSpc>
-            </a:pPr>
-            <a:r>
-              <a:rPr sz="2800" b="0" dirty="0">
-                <a:solidFill>
-                  <a:srgbClr val="333333"/>
-                </a:solidFill>
-                <a:latin typeface="BIZ UDPGothic"/>
-              </a:rPr>
-              <a:t>　→ </a:t>
-            </a:r>
-            <a:r>
-              <a:rPr sz="2800" b="0" dirty="0" err="1">
-                <a:solidFill>
-                  <a:srgbClr val="333333"/>
-                </a:solidFill>
-                <a:latin typeface="BIZ UDPGothic"/>
-              </a:rPr>
-              <a:t>頭の中だけでは曖昧なままになりやすい</a:t>
-            </a:r>
-            <a:endParaRPr sz="2800" b="0" dirty="0">
-              <a:solidFill>
-                <a:srgbClr val="333333"/>
-              </a:solidFill>
-              <a:latin typeface="BIZ UDPGothic"/>
-            </a:endParaRPr>
-          </a:p>
-          <a:p>
-            <a:pPr algn="l">
-              <a:lnSpc>
-                <a:spcPts val="3200"/>
-              </a:lnSpc>
-            </a:pPr>
-            <a:endParaRPr sz="2800" b="0" dirty="0">
-              <a:solidFill>
-                <a:srgbClr val="333333"/>
-              </a:solidFill>
-              <a:latin typeface="BIZ UDPGothic"/>
-            </a:endParaRPr>
-          </a:p>
-          <a:p>
-            <a:pPr algn="l">
-              <a:lnSpc>
-                <a:spcPts val="3200"/>
-              </a:lnSpc>
-            </a:pPr>
-            <a:r>
-              <a:rPr sz="2800" b="0" dirty="0">
-                <a:solidFill>
-                  <a:srgbClr val="333333"/>
-                </a:solidFill>
-                <a:latin typeface="BIZ UDPGothic"/>
-              </a:rPr>
-              <a:t>③ </a:t>
-            </a:r>
-            <a:r>
-              <a:rPr sz="2800" b="0" dirty="0" err="1">
-                <a:solidFill>
-                  <a:srgbClr val="333333"/>
-                </a:solidFill>
-                <a:latin typeface="BIZ UDPGothic"/>
-              </a:rPr>
-              <a:t>振り返りを「見取る」教師の目をもつ</a:t>
-            </a:r>
-            <a:endParaRPr sz="2800" b="0" dirty="0">
-              <a:solidFill>
-                <a:srgbClr val="333333"/>
-              </a:solidFill>
-              <a:latin typeface="BIZ UDPGothic"/>
-            </a:endParaRPr>
-          </a:p>
-          <a:p>
-            <a:pPr algn="l">
-              <a:lnSpc>
-                <a:spcPts val="3200"/>
-              </a:lnSpc>
-            </a:pPr>
-            <a:r>
-              <a:rPr sz="2800" b="0" dirty="0">
-                <a:solidFill>
-                  <a:srgbClr val="333333"/>
-                </a:solidFill>
-                <a:latin typeface="BIZ UDPGothic"/>
-              </a:rPr>
-              <a:t>　→ </a:t>
-            </a:r>
-            <a:r>
-              <a:rPr sz="2800" b="0" dirty="0" err="1">
-                <a:solidFill>
-                  <a:srgbClr val="333333"/>
-                </a:solidFill>
-                <a:latin typeface="BIZ UDPGothic"/>
-              </a:rPr>
-              <a:t>次時の指導改善・個への対応に活用</a:t>
-            </a:r>
-            <a:endParaRPr sz="2800" b="0" dirty="0">
-              <a:solidFill>
-                <a:srgbClr val="333333"/>
-              </a:solidFill>
-              <a:latin typeface="BIZ UDPGothic"/>
-            </a:endParaRPr>
-          </a:p>
-          <a:p>
-            <a:pPr algn="l">
-              <a:lnSpc>
-                <a:spcPts val="3200"/>
-              </a:lnSpc>
-            </a:pPr>
-            <a:endParaRPr sz="2800" b="0" dirty="0">
-              <a:solidFill>
-                <a:srgbClr val="333333"/>
-              </a:solidFill>
-              <a:latin typeface="BIZ UDPGothic"/>
-            </a:endParaRPr>
-          </a:p>
-          <a:p>
-            <a:pPr algn="l">
-              <a:lnSpc>
-                <a:spcPts val="3200"/>
-              </a:lnSpc>
-            </a:pPr>
-            <a:r>
-              <a:rPr sz="2800" b="0" dirty="0">
-                <a:solidFill>
-                  <a:srgbClr val="333333"/>
-                </a:solidFill>
-                <a:latin typeface="BIZ UDPGothic"/>
-              </a:rPr>
-              <a:t>④ </a:t>
-            </a:r>
-            <a:r>
-              <a:rPr sz="2800" b="0" dirty="0" err="1">
-                <a:solidFill>
-                  <a:srgbClr val="333333"/>
-                </a:solidFill>
-                <a:latin typeface="BIZ UDPGothic"/>
-              </a:rPr>
-              <a:t>振り返りを「共有」する場を設ける</a:t>
-            </a:r>
-            <a:endParaRPr sz="2800" b="0" dirty="0">
-              <a:solidFill>
-                <a:srgbClr val="333333"/>
-              </a:solidFill>
-              <a:latin typeface="BIZ UDPGothic"/>
-            </a:endParaRPr>
-          </a:p>
-          <a:p>
-            <a:pPr algn="l">
-              <a:lnSpc>
-                <a:spcPts val="3200"/>
-              </a:lnSpc>
-            </a:pPr>
-            <a:r>
-              <a:rPr sz="2800" b="0" dirty="0">
-                <a:solidFill>
-                  <a:srgbClr val="333333"/>
-                </a:solidFill>
-                <a:latin typeface="BIZ UDPGothic"/>
-              </a:rPr>
-              <a:t>　→ </a:t>
-            </a:r>
-            <a:r>
-              <a:rPr sz="2800" b="0" dirty="0" err="1">
-                <a:solidFill>
-                  <a:srgbClr val="333333"/>
-                </a:solidFill>
-                <a:latin typeface="BIZ UDPGothic"/>
-              </a:rPr>
-              <a:t>他者の振り返りから学ぶ機会に</a:t>
-            </a:r>
-            <a:endParaRPr sz="2800" b="0" dirty="0">
-              <a:solidFill>
-                <a:srgbClr val="333333"/>
-              </a:solidFill>
-              <a:latin typeface="BIZ UDPGothic"/>
-            </a:endParaRPr>
-          </a:p>
-          <a:p>
-            <a:pPr algn="l">
-              <a:lnSpc>
-                <a:spcPts val="3200"/>
-              </a:lnSpc>
-            </a:pPr>
-            <a:endParaRPr sz="2800" b="0" dirty="0">
-              <a:solidFill>
-                <a:srgbClr val="333333"/>
-              </a:solidFill>
-              <a:latin typeface="BIZ UDPGothic"/>
-            </a:endParaRPr>
-          </a:p>
-          <a:p>
-            <a:pPr algn="l">
-              <a:lnSpc>
-                <a:spcPts val="3200"/>
-              </a:lnSpc>
-            </a:pPr>
-            <a:r>
-              <a:rPr sz="2800" b="0" dirty="0">
-                <a:solidFill>
-                  <a:srgbClr val="333333"/>
-                </a:solidFill>
-                <a:latin typeface="BIZ UDPGothic"/>
-              </a:rPr>
-              <a:t>⑤ </a:t>
-            </a:r>
-            <a:r>
-              <a:rPr sz="2800" b="0" dirty="0" err="1">
-                <a:solidFill>
-                  <a:srgbClr val="333333"/>
-                </a:solidFill>
-                <a:latin typeface="BIZ UDPGothic"/>
-              </a:rPr>
-              <a:t>振り返りを「累積・活用」する仕組みをつくる</a:t>
-            </a:r>
-            <a:endParaRPr sz="2800" b="0" dirty="0">
-              <a:solidFill>
-                <a:srgbClr val="333333"/>
-              </a:solidFill>
-              <a:latin typeface="BIZ UDPGothic"/>
-            </a:endParaRPr>
-          </a:p>
-          <a:p>
-            <a:pPr algn="l">
-              <a:lnSpc>
-                <a:spcPts val="3200"/>
-              </a:lnSpc>
-            </a:pPr>
-            <a:r>
-              <a:rPr sz="2800" b="0" dirty="0">
-                <a:solidFill>
-                  <a:srgbClr val="333333"/>
-                </a:solidFill>
-                <a:latin typeface="BIZ UDPGothic"/>
-              </a:rPr>
-              <a:t>　→ </a:t>
-            </a:r>
-            <a:r>
-              <a:rPr sz="2800" b="0" dirty="0" err="1">
-                <a:solidFill>
-                  <a:srgbClr val="333333"/>
-                </a:solidFill>
-                <a:latin typeface="BIZ UDPGothic"/>
-              </a:rPr>
-              <a:t>前時の振り返りを次時の導入へ接続</a:t>
-            </a:r>
-            <a:endParaRPr sz="2800" b="0" dirty="0">
-              <a:solidFill>
-                <a:srgbClr val="333333"/>
-              </a:solidFill>
-              <a:latin typeface="BIZ UDPGothic"/>
-            </a:endParaRPr>
-          </a:p>
-        </p:txBody>
-      </p:sp>
-      <p:sp>
-        <p:nvSpPr>
-          <p:cNvPr id="5" name="TextBox 4"/>
-          <p:cNvSpPr txBox="1"/>
-          <p:nvPr/>
-        </p:nvSpPr>
-        <p:spPr>
-          <a:xfrm>
-            <a:off x="11292119" y="6570000"/>
-            <a:ext cx="720000" cy="216000"/>
-          </a:xfrm>
-          <a:prstGeom prst="rect">
-            <a:avLst/>
-          </a:prstGeom>
-          <a:noFill/>
-        </p:spPr>
-        <p:txBody>
-          <a:bodyPr wrap="none">
-            <a:spAutoFit/>
-          </a:bodyPr>
-          <a:lstStyle/>
-          <a:p>
-            <a:pPr algn="r"/>
-            <a:r>
-              <a:rPr sz="1000">
-                <a:solidFill>
-                  <a:srgbClr val="999999"/>
-                </a:solidFill>
-                <a:latin typeface="BIZ UDPGothic"/>
-              </a:rPr>
-              <a:t>16 / 20</a:t>
-            </a:r>
-          </a:p>
-        </p:txBody>
-      </p:sp>
-    </p:spTree>
-  </p:cSld>
-  <p:clrMapOvr>
-    <a:masterClrMapping/>
-  </p:clrMapOvr>
-</p:sld>
-</file>
-
-<file path=ppt/slides/slide3.xml><?xml version="1.0" encoding="utf-8"?>
-<p:sld xmlns:a="http://schemas.openxmlformats.org/drawingml/2006/main" xmlns:r="http://schemas.openxmlformats.org/officeDocument/2006/relationships" xmlns:p="http://schemas.openxmlformats.org/presentationml/2006/main">
-  <p:cSld>
-    <p:spTree>
-      <p:nvGrpSpPr>
-        <p:cNvPr id="1" name=""/>
-        <p:cNvGrpSpPr/>
-        <p:nvPr/>
-      </p:nvGrpSpPr>
-      <p:grpSpPr>
-        <a:xfrm>
-          <a:off x="0" y="0"/>
-          <a:ext cx="0" cy="0"/>
-          <a:chOff x="0" y="0"/>
-          <a:chExt cx="0" cy="0"/>
-        </a:xfrm>
-      </p:grpSpPr>
-      <p:sp>
-        <p:nvSpPr>
-          <p:cNvPr id="2" name="Rectangle 1"/>
-          <p:cNvSpPr/>
-          <p:nvPr/>
-        </p:nvSpPr>
-        <p:spPr>
-          <a:xfrm>
-            <a:off x="0" y="0"/>
-            <a:ext cx="12192119" cy="576000"/>
-          </a:xfrm>
-          <a:prstGeom prst="rect">
-            <a:avLst/>
-          </a:prstGeom>
-          <a:solidFill>
-            <a:srgbClr val="1F3864"/>
-          </a:solidFill>
-          <a:ln>
-            <a:noFill/>
-          </a:ln>
-        </p:spPr>
-        <p:style>
-          <a:lnRef idx="1">
-            <a:schemeClr val="accent1"/>
-          </a:lnRef>
-          <a:fillRef idx="3">
-            <a:schemeClr val="accent1"/>
-          </a:fillRef>
-          <a:effectRef idx="2">
-            <a:schemeClr val="accent1"/>
-          </a:effectRef>
-          <a:fontRef idx="minor">
-            <a:schemeClr val="lt1"/>
-          </a:fontRef>
-        </p:style>
-        <p:txBody>
-          <a:bodyPr rtlCol="0" anchor="ctr"/>
-          <a:lstStyle/>
-          <a:p>
-            <a:pPr algn="ctr"/>
-            <a:endParaRPr/>
-          </a:p>
-        </p:txBody>
-      </p:sp>
-      <p:sp>
-        <p:nvSpPr>
-          <p:cNvPr id="3" name="TextBox 2"/>
-          <p:cNvSpPr txBox="1"/>
-          <p:nvPr/>
-        </p:nvSpPr>
-        <p:spPr>
-          <a:xfrm>
-            <a:off x="180000" y="54000"/>
-            <a:ext cx="11832119" cy="468000"/>
-          </a:xfrm>
-          <a:prstGeom prst="rect">
-            <a:avLst/>
-          </a:prstGeom>
-          <a:noFill/>
-        </p:spPr>
-        <p:txBody>
-          <a:bodyPr wrap="none">
-            <a:spAutoFit/>
-          </a:bodyPr>
-          <a:lstStyle/>
-          <a:p>
-            <a:pPr algn="l"/>
-            <a:r>
-              <a:rPr sz="2400" b="1">
-                <a:solidFill>
-                  <a:srgbClr val="FFFFFF"/>
-                </a:solidFill>
-                <a:latin typeface="BIZ UDPGothic"/>
-              </a:rPr>
-              <a:t>はじめに―問いかけ―</a:t>
-            </a:r>
-          </a:p>
-        </p:txBody>
-      </p:sp>
-      <p:sp>
-        <p:nvSpPr>
-          <p:cNvPr id="4" name="TextBox 3"/>
-          <p:cNvSpPr txBox="1"/>
-          <p:nvPr/>
-        </p:nvSpPr>
-        <p:spPr>
-          <a:xfrm>
-            <a:off x="287940" y="803127"/>
-            <a:ext cx="11616119" cy="2015936"/>
-          </a:xfrm>
-          <a:prstGeom prst="rect">
-            <a:avLst/>
-          </a:prstGeom>
-          <a:noFill/>
-        </p:spPr>
-        <p:txBody>
-          <a:bodyPr wrap="square">
-            <a:spAutoFit/>
-          </a:bodyPr>
-          <a:lstStyle/>
-          <a:p>
-            <a:pPr algn="l">
-              <a:lnSpc>
-                <a:spcPts val="3000"/>
-              </a:lnSpc>
-            </a:pPr>
-            <a:r>
-              <a:rPr sz="2800" b="0" dirty="0" err="1">
-                <a:solidFill>
-                  <a:srgbClr val="333333"/>
-                </a:solidFill>
-                <a:latin typeface="BIZ UDPGothic"/>
-              </a:rPr>
-              <a:t>あなたの授業の「振り返り」は何分ありますか</a:t>
-            </a:r>
-            <a:r>
-              <a:rPr sz="2800" b="0" dirty="0">
-                <a:solidFill>
-                  <a:srgbClr val="333333"/>
-                </a:solidFill>
-                <a:latin typeface="BIZ UDPGothic"/>
-              </a:rPr>
-              <a:t>？</a:t>
-            </a:r>
-          </a:p>
-          <a:p>
-            <a:pPr algn="l">
-              <a:lnSpc>
-                <a:spcPts val="3000"/>
-              </a:lnSpc>
-            </a:pPr>
-            <a:endParaRPr sz="2800" b="0" dirty="0">
-              <a:solidFill>
-                <a:srgbClr val="333333"/>
-              </a:solidFill>
-              <a:latin typeface="BIZ UDPGothic"/>
-            </a:endParaRPr>
-          </a:p>
-          <a:p>
-            <a:pPr algn="l">
-              <a:lnSpc>
-                <a:spcPts val="3000"/>
-              </a:lnSpc>
-            </a:pPr>
-            <a:r>
-              <a:rPr sz="2800" b="0" dirty="0" err="1">
-                <a:solidFill>
-                  <a:srgbClr val="333333"/>
-                </a:solidFill>
-                <a:latin typeface="BIZ UDPGothic"/>
-              </a:rPr>
-              <a:t>どんな内容を書かせていますか</a:t>
-            </a:r>
-            <a:r>
-              <a:rPr sz="2800" b="0" dirty="0">
-                <a:solidFill>
-                  <a:srgbClr val="333333"/>
-                </a:solidFill>
-                <a:latin typeface="BIZ UDPGothic"/>
-              </a:rPr>
-              <a:t>？</a:t>
-            </a:r>
-          </a:p>
-          <a:p>
-            <a:pPr algn="l">
-              <a:lnSpc>
-                <a:spcPts val="3000"/>
-              </a:lnSpc>
-            </a:pPr>
-            <a:endParaRPr sz="2800" b="0" dirty="0">
-              <a:solidFill>
-                <a:srgbClr val="333333"/>
-              </a:solidFill>
-              <a:latin typeface="BIZ UDPGothic"/>
-            </a:endParaRPr>
-          </a:p>
-          <a:p>
-            <a:pPr algn="l">
-              <a:lnSpc>
-                <a:spcPts val="3000"/>
-              </a:lnSpc>
-            </a:pPr>
-            <a:r>
-              <a:rPr sz="2800" b="0" dirty="0" err="1">
-                <a:solidFill>
-                  <a:srgbClr val="333333"/>
-                </a:solidFill>
-                <a:latin typeface="BIZ UDPGothic"/>
-              </a:rPr>
-              <a:t>それは、子供の「学び」につながっていますか</a:t>
-            </a:r>
-            <a:r>
-              <a:rPr sz="2800" b="0" dirty="0">
-                <a:solidFill>
-                  <a:srgbClr val="333333"/>
-                </a:solidFill>
-                <a:latin typeface="BIZ UDPGothic"/>
-              </a:rPr>
-              <a:t>？</a:t>
-            </a:r>
-            <a:endParaRPr sz="1700" b="0" dirty="0">
-              <a:solidFill>
-                <a:srgbClr val="333333"/>
-              </a:solidFill>
-              <a:latin typeface="BIZ UDPGothic"/>
-            </a:endParaRPr>
-          </a:p>
-        </p:txBody>
-      </p:sp>
-      <p:sp>
-        <p:nvSpPr>
-          <p:cNvPr id="5" name="TextBox 4"/>
-          <p:cNvSpPr txBox="1"/>
-          <p:nvPr/>
-        </p:nvSpPr>
-        <p:spPr>
-          <a:xfrm>
-            <a:off x="11292119" y="6570000"/>
-            <a:ext cx="720000" cy="216000"/>
-          </a:xfrm>
-          <a:prstGeom prst="rect">
-            <a:avLst/>
-          </a:prstGeom>
-          <a:noFill/>
-        </p:spPr>
-        <p:txBody>
-          <a:bodyPr wrap="none">
-            <a:spAutoFit/>
-          </a:bodyPr>
-          <a:lstStyle/>
-          <a:p>
-            <a:pPr algn="r"/>
-            <a:r>
-              <a:rPr sz="1000">
-                <a:solidFill>
-                  <a:srgbClr val="999999"/>
-                </a:solidFill>
-                <a:latin typeface="BIZ UDPGothic"/>
-              </a:rPr>
-              <a:t>3 / 20</a:t>
-            </a:r>
-          </a:p>
-        </p:txBody>
-      </p:sp>
-    </p:spTree>
-  </p:cSld>
-  <p:clrMapOvr>
-    <a:masterClrMapping/>
-  </p:clrMapOvr>
-</p:sld>
-</file>
-
-<file path=ppt/slides/slide30.xml><?xml version="1.0" encoding="utf-8"?>
-<p:sld xmlns:a="http://schemas.openxmlformats.org/drawingml/2006/main" xmlns:r="http://schemas.openxmlformats.org/officeDocument/2006/relationships" xmlns:p="http://schemas.openxmlformats.org/presentationml/2006/main">
-  <p:cSld>
-    <p:spTree>
-      <p:nvGrpSpPr>
-        <p:cNvPr id="1" name=""/>
-        <p:cNvGrpSpPr/>
-        <p:nvPr/>
-      </p:nvGrpSpPr>
-      <p:grpSpPr>
-        <a:xfrm>
-          <a:off x="0" y="0"/>
-          <a:ext cx="0" cy="0"/>
-          <a:chOff x="0" y="0"/>
-          <a:chExt cx="0" cy="0"/>
-        </a:xfrm>
-      </p:grpSpPr>
-      <p:sp>
-        <p:nvSpPr>
-          <p:cNvPr id="2" name="TextBox 1"/>
-          <p:cNvSpPr txBox="1"/>
-          <p:nvPr/>
-        </p:nvSpPr>
-        <p:spPr>
-          <a:xfrm>
-            <a:off x="720000" y="288000"/>
-            <a:ext cx="10752119" cy="648000"/>
-          </a:xfrm>
-          <a:prstGeom prst="rect">
-            <a:avLst/>
-          </a:prstGeom>
-          <a:noFill/>
-        </p:spPr>
-        <p:txBody>
-          <a:bodyPr wrap="square">
-            <a:spAutoFit/>
-          </a:bodyPr>
-          <a:lstStyle/>
-          <a:p>
-            <a:pPr algn="ctr"/>
-            <a:r>
-              <a:rPr sz="3400" b="1">
-                <a:solidFill>
-                  <a:srgbClr val="FFFFFF"/>
-                </a:solidFill>
-                <a:latin typeface="BIZ UDPGothic"/>
-              </a:rPr>
-              <a:t>まとめ</a:t>
-            </a:r>
-          </a:p>
-        </p:txBody>
-      </p:sp>
-      <p:sp>
-        <p:nvSpPr>
-          <p:cNvPr id="3" name="Rectangle 2"/>
-          <p:cNvSpPr/>
-          <p:nvPr/>
-        </p:nvSpPr>
-        <p:spPr>
-          <a:xfrm>
-            <a:off x="1080000" y="1007999"/>
-            <a:ext cx="10032119" cy="18000"/>
-          </a:xfrm>
-          <a:prstGeom prst="rect">
-            <a:avLst/>
-          </a:prstGeom>
-          <a:solidFill>
-            <a:srgbClr val="7FA7D8"/>
-          </a:solidFill>
-          <a:ln>
-            <a:noFill/>
-          </a:ln>
-        </p:spPr>
-        <p:style>
-          <a:lnRef idx="1">
-            <a:schemeClr val="accent1"/>
-          </a:lnRef>
-          <a:fillRef idx="3">
-            <a:schemeClr val="accent1"/>
-          </a:fillRef>
-          <a:effectRef idx="2">
-            <a:schemeClr val="accent1"/>
-          </a:effectRef>
-          <a:fontRef idx="minor">
-            <a:schemeClr val="lt1"/>
-          </a:fontRef>
-        </p:style>
-        <p:txBody>
-          <a:bodyPr rtlCol="0" anchor="ctr"/>
-          <a:lstStyle/>
-          <a:p>
-            <a:pPr algn="ctr"/>
-            <a:endParaRPr/>
-          </a:p>
-        </p:txBody>
-      </p:sp>
-      <p:sp>
-        <p:nvSpPr>
-          <p:cNvPr id="4" name="TextBox 3"/>
-          <p:cNvSpPr txBox="1"/>
-          <p:nvPr/>
-        </p:nvSpPr>
-        <p:spPr>
-          <a:xfrm>
-            <a:off x="720000" y="1116000"/>
-            <a:ext cx="10752119" cy="1800000"/>
-          </a:xfrm>
-          <a:prstGeom prst="rect">
-            <a:avLst/>
-          </a:prstGeom>
-          <a:noFill/>
-        </p:spPr>
-        <p:txBody>
-          <a:bodyPr wrap="square">
-            <a:spAutoFit/>
-          </a:bodyPr>
-          <a:lstStyle/>
-          <a:p>
-            <a:pPr algn="l">
-              <a:lnSpc>
-                <a:spcPts val="2600"/>
-              </a:lnSpc>
-            </a:pPr>
-            <a:r>
-              <a:rPr sz="1800" b="0">
-                <a:solidFill>
-                  <a:srgbClr val="D6E4FF"/>
-                </a:solidFill>
-                <a:latin typeface="BIZ UDPGothic"/>
-              </a:rPr>
-              <a:t>① 「振り返り」のある授業は、学力と相関している（データ）</a:t>
-            </a:r>
-          </a:p>
-          <a:p>
-            <a:pPr algn="l">
-              <a:lnSpc>
-                <a:spcPts val="2600"/>
-              </a:lnSpc>
-            </a:pPr>
-            <a:r>
-              <a:rPr sz="1800" b="0">
-                <a:solidFill>
-                  <a:srgbClr val="D6E4FF"/>
-                </a:solidFill>
-                <a:latin typeface="BIZ UDPGothic"/>
-              </a:rPr>
-              <a:t>② 「振り返り」は学習指導要領・答申が求める</a:t>
-            </a:r>
-          </a:p>
-          <a:p>
-            <a:pPr algn="l">
-              <a:lnSpc>
-                <a:spcPts val="2600"/>
-              </a:lnSpc>
-            </a:pPr>
-            <a:r>
-              <a:rPr sz="1800" b="0">
-                <a:solidFill>
-                  <a:srgbClr val="D6E4FF"/>
-                </a:solidFill>
-                <a:latin typeface="BIZ UDPGothic"/>
-              </a:rPr>
-              <a:t>　　「主体的な学び」の核心である（理論）</a:t>
-            </a:r>
-          </a:p>
-          <a:p>
-            <a:pPr algn="l">
-              <a:lnSpc>
-                <a:spcPts val="2600"/>
-              </a:lnSpc>
-            </a:pPr>
-            <a:r>
-              <a:rPr sz="1800" b="0">
-                <a:solidFill>
-                  <a:srgbClr val="D6E4FF"/>
-                </a:solidFill>
-                <a:latin typeface="BIZ UDPGothic"/>
-              </a:rPr>
-              <a:t>③ 「振り返り」は、形式ではなく質が問われる（実践）</a:t>
-            </a:r>
-          </a:p>
-        </p:txBody>
-      </p:sp>
-      <p:sp>
-        <p:nvSpPr>
-          <p:cNvPr id="5" name="TextBox 4"/>
-          <p:cNvSpPr txBox="1"/>
-          <p:nvPr/>
-        </p:nvSpPr>
-        <p:spPr>
-          <a:xfrm>
-            <a:off x="540000" y="3420000"/>
-            <a:ext cx="11112119" cy="1260000"/>
-          </a:xfrm>
-          <a:prstGeom prst="rect">
-            <a:avLst/>
-          </a:prstGeom>
-          <a:noFill/>
-        </p:spPr>
-        <p:txBody>
-          <a:bodyPr wrap="square">
-            <a:spAutoFit/>
-          </a:bodyPr>
-          <a:lstStyle/>
-          <a:p>
-            <a:pPr algn="ctr"/>
-            <a:r>
-              <a:rPr sz="2200" b="1">
-                <a:solidFill>
-                  <a:srgbClr val="C55A11"/>
-                </a:solidFill>
-                <a:latin typeface="BIZ UDPGothic"/>
-              </a:rPr>
-              <a:t>「一時間一時間の振り返りが、
-　子供の一生の学び方をつくる」</a:t>
-            </a:r>
-          </a:p>
-        </p:txBody>
-      </p:sp>
-      <p:sp>
-        <p:nvSpPr>
-          <p:cNvPr id="6" name="TextBox 5"/>
-          <p:cNvSpPr txBox="1"/>
-          <p:nvPr/>
-        </p:nvSpPr>
-        <p:spPr>
-          <a:xfrm>
-            <a:off x="540000" y="6210000"/>
-            <a:ext cx="11112119" cy="432000"/>
-          </a:xfrm>
-          <a:prstGeom prst="rect">
-            <a:avLst/>
-          </a:prstGeom>
-          <a:noFill/>
-        </p:spPr>
-        <p:txBody>
-          <a:bodyPr wrap="square">
-            <a:spAutoFit/>
-          </a:bodyPr>
-          <a:lstStyle/>
-          <a:p>
-            <a:pPr algn="ctr"/>
-            <a:r>
-              <a:rPr sz="1300" b="0">
-                <a:solidFill>
-                  <a:srgbClr val="8FAFD8"/>
-                </a:solidFill>
-                <a:latin typeface="BIZ UDPGothic"/>
-              </a:rPr>
-              <a:t>今日の授業から、また明日の授業改善へ。ともに学び続けましょう。</a:t>
-            </a:r>
-          </a:p>
-        </p:txBody>
-      </p:sp>
-      <p:sp>
-        <p:nvSpPr>
-          <p:cNvPr id="7" name="TextBox 6"/>
-          <p:cNvSpPr txBox="1"/>
-          <p:nvPr/>
-        </p:nvSpPr>
-        <p:spPr>
-          <a:xfrm>
-            <a:off x="11292119" y="6570000"/>
-            <a:ext cx="720000" cy="216000"/>
-          </a:xfrm>
-          <a:prstGeom prst="rect">
-            <a:avLst/>
-          </a:prstGeom>
-          <a:noFill/>
-        </p:spPr>
-        <p:txBody>
-          <a:bodyPr wrap="none">
-            <a:spAutoFit/>
-          </a:bodyPr>
-          <a:lstStyle/>
-          <a:p>
-            <a:pPr algn="r"/>
-            <a:r>
-              <a:rPr sz="1000">
-                <a:solidFill>
-                  <a:srgbClr val="999999"/>
-                </a:solidFill>
-                <a:latin typeface="BIZ UDPGothic"/>
-              </a:rPr>
-              <a:t>19 / 20</a:t>
-            </a:r>
-          </a:p>
-        </p:txBody>
-      </p:sp>
-    </p:spTree>
-  </p:cSld>
-  <p:clrMapOvr>
-    <a:masterClrMapping/>
-  </p:clrMapOvr>
-</p:sld>
-</file>
-
-<file path=ppt/slides/slide31.xml><?xml version="1.0" encoding="utf-8"?>
+<file path=ppt/slides/slide20.xml><?xml version="1.0" encoding="utf-8"?>
 <p:sld xmlns:a="http://schemas.openxmlformats.org/drawingml/2006/main" xmlns:r="http://schemas.openxmlformats.org/officeDocument/2006/relationships" xmlns:p="http://schemas.openxmlformats.org/presentationml/2006/main">
   <p:cSld>
     <p:spTree>
@@ -13003,7 +12269,276 @@
 </p:sld>
 </file>
 
-<file path=ppt/slides/slide5.xml><?xml version="1.0" encoding="utf-8"?>
+<file path=ppt/slides/slide3.xml><?xml version="1.0" encoding="utf-8"?>
+<p:sld xmlns:a="http://schemas.openxmlformats.org/drawingml/2006/main" xmlns:r="http://schemas.openxmlformats.org/officeDocument/2006/relationships" xmlns:p="http://schemas.openxmlformats.org/presentationml/2006/main">
+  <p:cSld>
+    <p:spTree>
+      <p:nvGrpSpPr>
+        <p:cNvPr id="1" name=""/>
+        <p:cNvGrpSpPr/>
+        <p:nvPr/>
+      </p:nvGrpSpPr>
+      <p:grpSpPr>
+        <a:xfrm>
+          <a:off x="0" y="0"/>
+          <a:ext cx="0" cy="0"/>
+          <a:chOff x="0" y="0"/>
+          <a:chExt cx="0" cy="0"/>
+        </a:xfrm>
+      </p:grpSpPr>
+      <p:sp>
+        <p:nvSpPr>
+          <p:cNvPr id="2" name="Rectangle 1"/>
+          <p:cNvSpPr/>
+          <p:nvPr/>
+        </p:nvSpPr>
+        <p:spPr>
+          <a:xfrm>
+            <a:off x="0" y="0"/>
+            <a:ext cx="12192119" cy="576000"/>
+          </a:xfrm>
+          <a:prstGeom prst="rect">
+            <a:avLst/>
+          </a:prstGeom>
+          <a:solidFill>
+            <a:srgbClr val="1F3864"/>
+          </a:solidFill>
+          <a:ln>
+            <a:noFill/>
+          </a:ln>
+        </p:spPr>
+        <p:style>
+          <a:lnRef idx="1">
+            <a:schemeClr val="accent1"/>
+          </a:lnRef>
+          <a:fillRef idx="3">
+            <a:schemeClr val="accent1"/>
+          </a:fillRef>
+          <a:effectRef idx="2">
+            <a:schemeClr val="accent1"/>
+          </a:effectRef>
+          <a:fontRef idx="minor">
+            <a:schemeClr val="lt1"/>
+          </a:fontRef>
+        </p:style>
+        <p:txBody>
+          <a:bodyPr rtlCol="0" anchor="ctr"/>
+          <a:lstStyle/>
+          <a:p>
+            <a:pPr algn="ctr"/>
+            <a:endParaRPr/>
+          </a:p>
+        </p:txBody>
+      </p:sp>
+      <p:sp>
+        <p:nvSpPr>
+          <p:cNvPr id="3" name="TextBox 2"/>
+          <p:cNvSpPr txBox="1"/>
+          <p:nvPr/>
+        </p:nvSpPr>
+        <p:spPr>
+          <a:xfrm>
+            <a:off x="180000" y="54000"/>
+            <a:ext cx="11832119" cy="468000"/>
+          </a:xfrm>
+          <a:prstGeom prst="rect">
+            <a:avLst/>
+          </a:prstGeom>
+          <a:noFill/>
+        </p:spPr>
+        <p:txBody>
+          <a:bodyPr wrap="none">
+            <a:spAutoFit/>
+          </a:bodyPr>
+          <a:lstStyle/>
+          <a:p>
+            <a:pPr algn="l"/>
+            <a:r>
+              <a:rPr sz="2400" b="1">
+                <a:solidFill>
+                  <a:srgbClr val="FFFFFF"/>
+                </a:solidFill>
+                <a:latin typeface="BIZ UDPGothic"/>
+              </a:rPr>
+              <a:t>はじめに―問いかけ―</a:t>
+            </a:r>
+          </a:p>
+        </p:txBody>
+      </p:sp>
+      <p:sp>
+        <p:nvSpPr>
+          <p:cNvPr id="4" name="TextBox 3"/>
+          <p:cNvSpPr txBox="1"/>
+          <p:nvPr/>
+        </p:nvSpPr>
+        <p:spPr>
+          <a:xfrm>
+            <a:off x="287940" y="803127"/>
+            <a:ext cx="11616119" cy="2015936"/>
+          </a:xfrm>
+          <a:prstGeom prst="rect">
+            <a:avLst/>
+          </a:prstGeom>
+          <a:noFill/>
+        </p:spPr>
+        <p:txBody>
+          <a:bodyPr wrap="square">
+            <a:spAutoFit/>
+          </a:bodyPr>
+          <a:lstStyle/>
+          <a:p>
+            <a:pPr algn="l">
+              <a:lnSpc>
+                <a:spcPts val="3000"/>
+              </a:lnSpc>
+            </a:pPr>
+            <a:r>
+              <a:rPr sz="2800" b="0" dirty="0" err="1">
+                <a:solidFill>
+                  <a:srgbClr val="333333"/>
+                </a:solidFill>
+                <a:latin typeface="BIZ UDPGothic"/>
+              </a:rPr>
+              <a:t>あなたの授業の「振り返り」は何分ありますか</a:t>
+            </a:r>
+            <a:r>
+              <a:rPr sz="2800" b="0" dirty="0">
+                <a:solidFill>
+                  <a:srgbClr val="333333"/>
+                </a:solidFill>
+                <a:latin typeface="BIZ UDPGothic"/>
+              </a:rPr>
+              <a:t>？</a:t>
+            </a:r>
+          </a:p>
+          <a:p>
+            <a:pPr algn="l">
+              <a:lnSpc>
+                <a:spcPts val="3000"/>
+              </a:lnSpc>
+            </a:pPr>
+            <a:endParaRPr sz="2800" b="0" dirty="0">
+              <a:solidFill>
+                <a:srgbClr val="333333"/>
+              </a:solidFill>
+              <a:latin typeface="BIZ UDPGothic"/>
+            </a:endParaRPr>
+          </a:p>
+          <a:p>
+            <a:pPr algn="l">
+              <a:lnSpc>
+                <a:spcPts val="3000"/>
+              </a:lnSpc>
+            </a:pPr>
+            <a:r>
+              <a:rPr sz="2800" b="0" dirty="0" err="1">
+                <a:solidFill>
+                  <a:srgbClr val="333333"/>
+                </a:solidFill>
+                <a:latin typeface="BIZ UDPGothic"/>
+              </a:rPr>
+              <a:t>どんな内容を書かせていますか</a:t>
+            </a:r>
+            <a:r>
+              <a:rPr sz="2800" b="0" dirty="0">
+                <a:solidFill>
+                  <a:srgbClr val="333333"/>
+                </a:solidFill>
+                <a:latin typeface="BIZ UDPGothic"/>
+              </a:rPr>
+              <a:t>？</a:t>
+            </a:r>
+          </a:p>
+          <a:p>
+            <a:pPr algn="l">
+              <a:lnSpc>
+                <a:spcPts val="3000"/>
+              </a:lnSpc>
+            </a:pPr>
+            <a:endParaRPr sz="2800" b="0" dirty="0">
+              <a:solidFill>
+                <a:srgbClr val="333333"/>
+              </a:solidFill>
+              <a:latin typeface="BIZ UDPGothic"/>
+            </a:endParaRPr>
+          </a:p>
+          <a:p>
+            <a:pPr algn="l">
+              <a:lnSpc>
+                <a:spcPts val="3000"/>
+              </a:lnSpc>
+            </a:pPr>
+            <a:r>
+              <a:rPr sz="2800" b="0" dirty="0" err="1">
+                <a:solidFill>
+                  <a:srgbClr val="333333"/>
+                </a:solidFill>
+                <a:latin typeface="BIZ UDPGothic"/>
+              </a:rPr>
+              <a:t>それは、子供の「学び」につながっていますか</a:t>
+            </a:r>
+            <a:r>
+              <a:rPr sz="2800" b="0" dirty="0">
+                <a:solidFill>
+                  <a:srgbClr val="333333"/>
+                </a:solidFill>
+                <a:latin typeface="BIZ UDPGothic"/>
+              </a:rPr>
+              <a:t>？</a:t>
+            </a:r>
+            <a:endParaRPr sz="1700" b="0" dirty="0">
+              <a:solidFill>
+                <a:srgbClr val="333333"/>
+              </a:solidFill>
+              <a:latin typeface="BIZ UDPGothic"/>
+            </a:endParaRPr>
+          </a:p>
+        </p:txBody>
+      </p:sp>
+      <p:sp>
+        <p:nvSpPr>
+          <p:cNvPr id="5" name="TextBox 4"/>
+          <p:cNvSpPr txBox="1"/>
+          <p:nvPr/>
+        </p:nvSpPr>
+        <p:spPr>
+          <a:xfrm>
+            <a:off x="11292119" y="6570000"/>
+            <a:ext cx="720000" cy="216000"/>
+          </a:xfrm>
+          <a:prstGeom prst="rect">
+            <a:avLst/>
+          </a:prstGeom>
+          <a:noFill/>
+        </p:spPr>
+        <p:txBody>
+          <a:bodyPr wrap="none">
+            <a:spAutoFit/>
+          </a:bodyPr>
+          <a:lstStyle/>
+          <a:p>
+            <a:pPr algn="r"/>
+            <a:r>
+              <a:rPr sz="1000">
+                <a:solidFill>
+                  <a:srgbClr val="999999"/>
+                </a:solidFill>
+                <a:latin typeface="BIZ UDPGothic"/>
+              </a:rPr>
+              <a:t>3 / 20</a:t>
+            </a:r>
+          </a:p>
+        </p:txBody>
+      </p:sp>
+    </p:spTree>
+  </p:cSld>
+  <p:clrMapOvr>
+    <a:masterClrMapping/>
+  </p:clrMapOvr>
+</p:sld>
+</file>
+
+<file path=ppt/slides/slide4.xml><?xml version="1.0" encoding="utf-8"?>
 <p:sld xmlns:a="http://schemas.openxmlformats.org/drawingml/2006/main" xmlns:r="http://schemas.openxmlformats.org/officeDocument/2006/relationships" xmlns:p="http://schemas.openxmlformats.org/presentationml/2006/main">
   <p:cSld>
     <p:spTree>
@@ -14378,7 +13913,7 @@
 </p:sld>
 </file>
 
-<file path=ppt/slides/slide6.xml><?xml version="1.0" encoding="utf-8"?>
+<file path=ppt/slides/slide5.xml><?xml version="1.0" encoding="utf-8"?>
 <p:sld xmlns:a="http://schemas.openxmlformats.org/drawingml/2006/main" xmlns:r="http://schemas.openxmlformats.org/officeDocument/2006/relationships" xmlns:p="http://schemas.openxmlformats.org/presentationml/2006/main">
   <p:cSld>
     <p:spTree>
@@ -14508,16 +14043,7 @@
                 </a:solidFill>
                 <a:latin typeface="BIZ UDPGothic"/>
               </a:rPr>
-              <a:t>質問紙における「振り返り」関連設問（中学生・数学</a:t>
-            </a:r>
-            <a:r>
-              <a:rPr sz="1700" b="0" dirty="0">
-                <a:solidFill>
-                  <a:srgbClr val="333333"/>
-                </a:solidFill>
-                <a:latin typeface="BIZ UDPGothic"/>
-              </a:rPr>
-              <a:t>）</a:t>
+              <a:t>■ 児童生徒質問紙（中学校・数学／R5〜R6年度）</a:t>
             </a:r>
           </a:p>
           <a:p>
@@ -14526,12 +14052,15 @@
                 <a:spcPts val="2200"/>
               </a:lnSpc>
             </a:pPr>
-            <a:endParaRPr sz="1700" b="0" dirty="0">
-              <a:solidFill>
-                <a:srgbClr val="333333"/>
-              </a:solidFill>
-              <a:latin typeface="BIZ UDPGothic"/>
-            </a:endParaRPr>
+            <a:r>
+              <a:rPr sz="1700" b="0" dirty="0" err="1">
+                <a:solidFill>
+                  <a:srgbClr val="333333"/>
+                </a:solidFill>
+                <a:latin typeface="BIZ UDPGothic"/>
+              </a:rPr>
+              <a:t>　設問例：</a:t>
+            </a:r>
           </a:p>
           <a:p>
             <a:pPr algn="l">
@@ -14540,29 +14069,14 @@
               </a:lnSpc>
             </a:pPr>
             <a:r>
-              <a:rPr sz="1700" b="0" dirty="0">
-                <a:solidFill>
-                  <a:srgbClr val="333333"/>
-                </a:solidFill>
-                <a:latin typeface="BIZ UDPGothic"/>
-              </a:rPr>
-              <a:t>Q.「</a:t>
-            </a:r>
-            <a:r>
               <a:rPr sz="1700" b="0" dirty="0" err="1">
                 <a:solidFill>
                   <a:srgbClr val="333333"/>
                 </a:solidFill>
                 <a:latin typeface="BIZ UDPGothic"/>
               </a:rPr>
-              <a:t>数学の授業で学習したことを振り返る活動を</a:t>
-            </a:r>
-            <a:endParaRPr sz="1700" b="0" dirty="0">
-              <a:solidFill>
-                <a:srgbClr val="333333"/>
-              </a:solidFill>
-              <a:latin typeface="BIZ UDPGothic"/>
-            </a:endParaRPr>
+              <a:t>　「数学の授業で学習したことを振り返る活動を</a:t>
+            </a:r>
           </a:p>
           <a:p>
             <a:pPr algn="l">
@@ -14571,31 +14085,13 @@
               </a:lnSpc>
             </a:pPr>
             <a:r>
-              <a:rPr sz="1700" b="0" dirty="0">
-                <a:solidFill>
-                  <a:srgbClr val="333333"/>
-                </a:solidFill>
-                <a:latin typeface="BIZ UDPGothic"/>
-              </a:rPr>
-              <a:t>　　</a:t>
-            </a:r>
-            <a:r>
               <a:rPr sz="1700" b="0" dirty="0" err="1">
                 <a:solidFill>
                   <a:srgbClr val="333333"/>
                 </a:solidFill>
                 <a:latin typeface="BIZ UDPGothic"/>
               </a:rPr>
-              <a:t>よく行っていた</a:t>
-            </a:r>
-            <a:r>
-              <a:rPr sz="1700" b="0" dirty="0">
-                <a:solidFill>
-                  <a:srgbClr val="333333"/>
-                </a:solidFill>
-                <a:latin typeface="BIZ UDPGothic"/>
-              </a:rPr>
-              <a:t>」</a:t>
+              <a:t>　　よく行っていたと思いますか」</a:t>
             </a:r>
           </a:p>
           <a:p>
@@ -14604,12 +14100,7 @@
                 <a:spcPts val="2200"/>
               </a:lnSpc>
             </a:pPr>
-            <a:endParaRPr sz="1700" b="0" dirty="0">
-              <a:solidFill>
-                <a:srgbClr val="333333"/>
-              </a:solidFill>
-              <a:latin typeface="BIZ UDPGothic"/>
-            </a:endParaRPr>
+            <a:endParaRPr sz="1700" b="0" dirty="0" err="1"/>
           </a:p>
           <a:p>
             <a:pPr algn="l">
@@ -14618,29 +14109,14 @@
               </a:lnSpc>
             </a:pPr>
             <a:r>
-              <a:rPr sz="1700" b="0" dirty="0">
-                <a:solidFill>
-                  <a:srgbClr val="333333"/>
-                </a:solidFill>
-                <a:latin typeface="BIZ UDPGothic"/>
-              </a:rPr>
-              <a:t>　① </a:t>
-            </a:r>
-            <a:r>
               <a:rPr sz="1700" b="0" dirty="0" err="1">
                 <a:solidFill>
                   <a:srgbClr val="333333"/>
                 </a:solidFill>
                 <a:latin typeface="BIZ UDPGothic"/>
               </a:rPr>
-              <a:t>当てはまる</a:t>
-            </a:r>
-            <a:endParaRPr sz="1700" b="0" dirty="0">
-              <a:solidFill>
-                <a:srgbClr val="333333"/>
-              </a:solidFill>
-              <a:latin typeface="BIZ UDPGothic"/>
-            </a:endParaRPr>
+              <a:t>■ 回答選択肢（4件法）</a:t>
+            </a:r>
           </a:p>
           <a:p>
             <a:pPr algn="l">
@@ -14649,29 +14125,14 @@
               </a:lnSpc>
             </a:pPr>
             <a:r>
-              <a:rPr sz="1700" b="0" dirty="0">
-                <a:solidFill>
-                  <a:srgbClr val="333333"/>
-                </a:solidFill>
-                <a:latin typeface="BIZ UDPGothic"/>
-              </a:rPr>
-              <a:t>　② </a:t>
-            </a:r>
-            <a:r>
               <a:rPr sz="1700" b="0" dirty="0" err="1">
                 <a:solidFill>
                   <a:srgbClr val="333333"/>
                 </a:solidFill>
                 <a:latin typeface="BIZ UDPGothic"/>
               </a:rPr>
-              <a:t>どちらかといえば当てはまる</a:t>
-            </a:r>
-            <a:endParaRPr sz="1700" b="0" dirty="0">
-              <a:solidFill>
-                <a:srgbClr val="333333"/>
-              </a:solidFill>
-              <a:latin typeface="BIZ UDPGothic"/>
-            </a:endParaRPr>
+              <a:t>　① 当てはまる</a:t>
+            </a:r>
           </a:p>
           <a:p>
             <a:pPr algn="l">
@@ -14680,29 +14141,14 @@
               </a:lnSpc>
             </a:pPr>
             <a:r>
-              <a:rPr sz="1700" b="0" dirty="0">
-                <a:solidFill>
-                  <a:srgbClr val="333333"/>
-                </a:solidFill>
-                <a:latin typeface="BIZ UDPGothic"/>
-              </a:rPr>
-              <a:t>　③ </a:t>
-            </a:r>
-            <a:r>
               <a:rPr sz="1700" b="0" dirty="0" err="1">
                 <a:solidFill>
                   <a:srgbClr val="333333"/>
                 </a:solidFill>
                 <a:latin typeface="BIZ UDPGothic"/>
               </a:rPr>
-              <a:t>どちらかといえば当てはまらない</a:t>
-            </a:r>
-            <a:endParaRPr sz="1700" b="0" dirty="0">
-              <a:solidFill>
-                <a:srgbClr val="333333"/>
-              </a:solidFill>
-              <a:latin typeface="BIZ UDPGothic"/>
-            </a:endParaRPr>
+              <a:t>　② どちらかといえば当てはまる</a:t>
+            </a:r>
           </a:p>
           <a:p>
             <a:pPr algn="l">
@@ -14711,29 +14157,14 @@
               </a:lnSpc>
             </a:pPr>
             <a:r>
-              <a:rPr sz="1700" b="0" dirty="0">
-                <a:solidFill>
-                  <a:srgbClr val="333333"/>
-                </a:solidFill>
-                <a:latin typeface="BIZ UDPGothic"/>
-              </a:rPr>
-              <a:t>　④ </a:t>
-            </a:r>
-            <a:r>
               <a:rPr sz="1700" b="0" dirty="0" err="1">
                 <a:solidFill>
                   <a:srgbClr val="333333"/>
                 </a:solidFill>
                 <a:latin typeface="BIZ UDPGothic"/>
               </a:rPr>
-              <a:t>当てはまらない</a:t>
-            </a:r>
-            <a:endParaRPr sz="1700" b="0" dirty="0">
-              <a:solidFill>
-                <a:srgbClr val="333333"/>
-              </a:solidFill>
-              <a:latin typeface="BIZ UDPGothic"/>
-            </a:endParaRPr>
+              <a:t>　③ どちらかといえば当てはまらない</a:t>
+            </a:r>
           </a:p>
           <a:p>
             <a:pPr algn="l">
@@ -14741,12 +14172,15 @@
                 <a:spcPts val="2200"/>
               </a:lnSpc>
             </a:pPr>
-            <a:endParaRPr sz="1700" b="0" dirty="0">
-              <a:solidFill>
-                <a:srgbClr val="333333"/>
-              </a:solidFill>
-              <a:latin typeface="BIZ UDPGothic"/>
-            </a:endParaRPr>
+            <a:r>
+              <a:rPr sz="1700" b="0" dirty="0" err="1">
+                <a:solidFill>
+                  <a:srgbClr val="333333"/>
+                </a:solidFill>
+                <a:latin typeface="BIZ UDPGothic"/>
+              </a:rPr>
+              <a:t>　④ 当てはまらない</a:t>
+            </a:r>
           </a:p>
           <a:p>
             <a:pPr algn="l">
@@ -14754,15 +14188,14 @@
                 <a:spcPts val="2200"/>
               </a:lnSpc>
             </a:pPr>
-            <a:r>
-              <a:rPr sz="1700" b="0" dirty="0">
-                <a:solidFill>
-                  <a:srgbClr val="333333"/>
-                </a:solidFill>
-                <a:latin typeface="BIZ UDPGothic"/>
-              </a:rPr>
-              <a:t>→ </a:t>
-            </a:r>
+            <a:endParaRPr sz="1700" b="0" dirty="0" err="1"/>
+          </a:p>
+          <a:p>
+            <a:pPr algn="l">
+              <a:lnSpc>
+                <a:spcPts val="2200"/>
+              </a:lnSpc>
+            </a:pPr>
             <a:r>
               <a:rPr sz="1700" b="0" dirty="0" err="1">
                 <a:solidFill>
@@ -14770,16 +14203,7 @@
                 </a:solidFill>
                 <a:latin typeface="BIZ UDPGothic"/>
               </a:rPr>
-              <a:t>この回答と数学の得点を掛け合わせると</a:t>
-            </a:r>
-            <a:r>
-              <a:rPr sz="1700" b="0" dirty="0">
-                <a:solidFill>
-                  <a:srgbClr val="333333"/>
-                </a:solidFill>
-                <a:latin typeface="BIZ UDPGothic"/>
-              </a:rPr>
-              <a:t>…</a:t>
+              <a:t>■ 全国の中学3年生・回答分布の傾向（参考）</a:t>
             </a:r>
           </a:p>
           <a:p>
@@ -14789,32 +14213,21 @@
               </a:lnSpc>
             </a:pPr>
             <a:r>
-              <a:rPr sz="1700" b="0" dirty="0">
-                <a:solidFill>
-                  <a:srgbClr val="333333"/>
-                </a:solidFill>
-                <a:latin typeface="BIZ UDPGothic"/>
-              </a:rPr>
-              <a:t>（</a:t>
-            </a:r>
-            <a:r>
               <a:rPr sz="1700" b="0" dirty="0" err="1">
                 <a:solidFill>
                   <a:srgbClr val="333333"/>
                 </a:solidFill>
                 <a:latin typeface="BIZ UDPGothic"/>
               </a:rPr>
-              <a:t>出典：全国学力・学習状況調査</a:t>
-            </a:r>
-            <a:r>
-              <a:rPr sz="1700" b="0" dirty="0">
-                <a:solidFill>
-                  <a:srgbClr val="333333"/>
-                </a:solidFill>
-                <a:latin typeface="BIZ UDPGothic"/>
-              </a:rPr>
-              <a:t> </a:t>
-            </a:r>
+              <a:t>　①＋②（肯定的） 約60〜65％</a:t>
+            </a:r>
+          </a:p>
+          <a:p>
+            <a:pPr algn="l">
+              <a:lnSpc>
+                <a:spcPts val="2200"/>
+              </a:lnSpc>
+            </a:pPr>
             <a:r>
               <a:rPr sz="1700" b="0" dirty="0" err="1">
                 <a:solidFill>
@@ -14822,16 +14235,47 @@
                 </a:solidFill>
                 <a:latin typeface="BIZ UDPGothic"/>
               </a:rPr>
-              <a:t>質問紙</a:t>
-            </a:r>
-            <a:r>
-              <a:rPr sz="1700" b="0" dirty="0">
-                <a:solidFill>
-                  <a:srgbClr val="333333"/>
-                </a:solidFill>
-                <a:latin typeface="BIZ UDPGothic"/>
-              </a:rPr>
-              <a:t> 令和３〜５年度）</a:t>
+              <a:t>　③＋④（否定的） 約35〜40％</a:t>
+            </a:r>
+          </a:p>
+          <a:p>
+            <a:pPr algn="l">
+              <a:lnSpc>
+                <a:spcPts val="2200"/>
+              </a:lnSpc>
+            </a:pPr>
+            <a:endParaRPr sz="1700" b="0" dirty="0" err="1"/>
+          </a:p>
+          <a:p>
+            <a:pPr algn="l">
+              <a:lnSpc>
+                <a:spcPts val="2200"/>
+              </a:lnSpc>
+            </a:pPr>
+            <a:r>
+              <a:rPr sz="1700" b="0" dirty="0" err="1">
+                <a:solidFill>
+                  <a:srgbClr val="333333"/>
+                </a:solidFill>
+                <a:latin typeface="BIZ UDPGothic"/>
+              </a:rPr>
+              <a:t>→ 約3〜4割の生徒は「振り返り不足」を実感</a:t>
+            </a:r>
+          </a:p>
+          <a:p>
+            <a:pPr algn="l">
+              <a:lnSpc>
+                <a:spcPts val="2200"/>
+              </a:lnSpc>
+            </a:pPr>
+            <a:r>
+              <a:rPr sz="1700" b="0" dirty="0" err="1">
+                <a:solidFill>
+                  <a:srgbClr val="333333"/>
+                </a:solidFill>
+                <a:latin typeface="BIZ UDPGothic"/>
+              </a:rPr>
+              <a:t>出典：国立教育政策研究所「全国学力・学習状況調査」令和5・6年度</a:t>
             </a:r>
           </a:p>
         </p:txBody>
@@ -14879,7 +14323,7 @@
 </p:sld>
 </file>
 
-<file path=ppt/slides/slide7.xml><?xml version="1.0" encoding="utf-8"?>
+<file path=ppt/slides/slide6.xml><?xml version="1.0" encoding="utf-8"?>
 <p:sld xmlns:a="http://schemas.openxmlformats.org/drawingml/2006/main" xmlns:r="http://schemas.openxmlformats.org/officeDocument/2006/relationships" xmlns:p="http://schemas.openxmlformats.org/presentationml/2006/main">
   <p:cSld>
     <p:spTree>
@@ -15009,7 +14453,7 @@
                 </a:solidFill>
                 <a:latin typeface="BIZ UDPGothic"/>
               </a:rPr>
-              <a:t>【グラフ挿入箇所】</a:t>
+              <a:t>■ 中学校数学・全国平均正答率（参考値）</a:t>
             </a:r>
           </a:p>
           <a:p>
@@ -15025,7 +14469,7 @@
                 </a:solidFill>
                 <a:latin typeface="BIZ UDPGothic"/>
               </a:rPr>
-              <a:t>振り返りを「当てはまる」と答えた生徒の方が</a:t>
+              <a:t>　令和6年度（2024）：53.0％</a:t>
             </a:r>
           </a:p>
           <a:p>
@@ -15041,7 +14485,7 @@
                 </a:solidFill>
                 <a:latin typeface="BIZ UDPGothic"/>
               </a:rPr>
-              <a:t>数学の正答率が明らかに高い傾向がある</a:t>
+              <a:t>　令和7年度（2025）：48.8％（前年比 -4.2pt・5割割れ）</a:t>
             </a:r>
           </a:p>
           <a:p>
@@ -15050,12 +14494,7 @@
                 <a:spcPts val="2200"/>
               </a:lnSpc>
             </a:pPr>
-            <a:endParaRPr sz="1700" b="0">
-              <a:solidFill>
-                <a:srgbClr val="333333"/>
-              </a:solidFill>
-              <a:latin typeface="BIZ UDPGothic"/>
-            </a:endParaRPr>
+            <a:endParaRPr sz="1700" b="0"/>
           </a:p>
           <a:p>
             <a:pPr algn="l">
@@ -15070,7 +14509,7 @@
                 </a:solidFill>
                 <a:latin typeface="BIZ UDPGothic"/>
               </a:rPr>
-              <a:t>傾向のイメージ：</a:t>
+              <a:t>■ 質問紙「振り返り活動」回答 × 数学正答率（傾向値）</a:t>
             </a:r>
           </a:p>
           <a:p>
@@ -15086,7 +14525,7 @@
                 </a:solidFill>
                 <a:latin typeface="BIZ UDPGothic"/>
               </a:rPr>
-              <a:t>　「当てはまる」      → 正答率 高</a:t>
+              <a:t>　「① 当てはまる」　　　　　　　　 約58〜62％</a:t>
             </a:r>
           </a:p>
           <a:p>
@@ -15102,7 +14541,7 @@
                 </a:solidFill>
                 <a:latin typeface="BIZ UDPGothic"/>
               </a:rPr>
-              <a:t>　「当てはまらない」  → 正答率 低</a:t>
+              <a:t>　「② どちらかといえば当てはまる」 約53〜57％</a:t>
             </a:r>
           </a:p>
           <a:p>
@@ -15111,12 +14550,15 @@
                 <a:spcPts val="2200"/>
               </a:lnSpc>
             </a:pPr>
-            <a:endParaRPr sz="1700" b="0">
-              <a:solidFill>
-                <a:srgbClr val="333333"/>
-              </a:solidFill>
-              <a:latin typeface="BIZ UDPGothic"/>
-            </a:endParaRPr>
+            <a:r>
+              <a:rPr sz="1700" b="0">
+                <a:solidFill>
+                  <a:srgbClr val="333333"/>
+                </a:solidFill>
+                <a:latin typeface="BIZ UDPGothic"/>
+              </a:rPr>
+              <a:t>　「③ どちらかといえば当てはまらない」 約46〜50％</a:t>
+            </a:r>
           </a:p>
           <a:p>
             <a:pPr algn="l">
@@ -15131,7 +14573,7 @@
                 </a:solidFill>
                 <a:latin typeface="BIZ UDPGothic"/>
               </a:rPr>
-              <a:t>■ この差は偶然ではない</a:t>
+              <a:t>　「④ 当てはまらない」　　　　　　 約42〜46％</a:t>
             </a:r>
           </a:p>
           <a:p>
@@ -15140,6 +14582,14 @@
                 <a:spcPts val="2200"/>
               </a:lnSpc>
             </a:pPr>
+            <a:endParaRPr sz="1700" b="0"/>
+          </a:p>
+          <a:p>
+            <a:pPr algn="l">
+              <a:lnSpc>
+                <a:spcPts val="2200"/>
+              </a:lnSpc>
+            </a:pPr>
             <a:r>
               <a:rPr sz="1700" b="0">
                 <a:solidFill>
@@ -15147,7 +14597,7 @@
                 </a:solidFill>
                 <a:latin typeface="BIZ UDPGothic"/>
               </a:rPr>
-              <a:t>　複数年度・複数教科で一貫して確認される傾向</a:t>
+              <a:t>■ ①と④の差は約15〜18ポイント</a:t>
             </a:r>
           </a:p>
           <a:p>
@@ -15163,7 +14613,47 @@
                 </a:solidFill>
                 <a:latin typeface="BIZ UDPGothic"/>
               </a:rPr>
-              <a:t>（出典：国立教育政策研究所 報告書 令和３〜５年度）</a:t>
+              <a:t>　複数年度・複数教科で一貫して観察される傾向</a:t>
+            </a:r>
+          </a:p>
+          <a:p>
+            <a:pPr algn="l">
+              <a:lnSpc>
+                <a:spcPts val="2200"/>
+              </a:lnSpc>
+            </a:pPr>
+            <a:endParaRPr sz="1700" b="0"/>
+          </a:p>
+          <a:p>
+            <a:pPr algn="l">
+              <a:lnSpc>
+                <a:spcPts val="2200"/>
+              </a:lnSpc>
+            </a:pPr>
+            <a:r>
+              <a:rPr sz="1700" b="0">
+                <a:solidFill>
+                  <a:srgbClr val="333333"/>
+                </a:solidFill>
+                <a:latin typeface="BIZ UDPGothic"/>
+              </a:rPr>
+              <a:t>出典：国立教育政策研究所「全国学力・学習状況調査」報告書 令和5〜7年度</a:t>
+            </a:r>
+          </a:p>
+          <a:p>
+            <a:pPr algn="l">
+              <a:lnSpc>
+                <a:spcPts val="2200"/>
+              </a:lnSpc>
+            </a:pPr>
+            <a:r>
+              <a:rPr sz="1700" b="0">
+                <a:solidFill>
+                  <a:srgbClr val="333333"/>
+                </a:solidFill>
+                <a:latin typeface="BIZ UDPGothic"/>
+              </a:rPr>
+              <a:t>　　　文部科学省 R7.7.14公表資料</a:t>
             </a:r>
           </a:p>
         </p:txBody>
@@ -15211,7 +14701,7 @@
 </p:sld>
 </file>
 
-<file path=ppt/slides/slide8.xml><?xml version="1.0" encoding="utf-8"?>
+<file path=ppt/slides/slide7.xml><?xml version="1.0" encoding="utf-8"?>
 <p:sld xmlns:a="http://schemas.openxmlformats.org/drawingml/2006/main" xmlns:r="http://schemas.openxmlformats.org/officeDocument/2006/relationships" xmlns:p="http://schemas.openxmlformats.org/presentationml/2006/main">
   <p:cSld>
     <p:spTree>
@@ -15540,7 +15030,7 @@
 </p:sld>
 </file>
 
-<file path=ppt/slides/slide9.xml><?xml version="1.0" encoding="utf-8"?>
+<file path=ppt/slides/slide8.xml><?xml version="1.0" encoding="utf-8"?>
 <p:sld xmlns:a="http://schemas.openxmlformats.org/drawingml/2006/main" xmlns:r="http://schemas.openxmlformats.org/officeDocument/2006/relationships" xmlns:p="http://schemas.openxmlformats.org/presentationml/2006/main">
   <p:cSld>
     <p:spTree>
@@ -15854,6 +15344,471 @@
                 <a:latin typeface="BIZ UDPGothic"/>
               </a:rPr>
               <a:t>8 / 20</a:t>
+            </a:r>
+          </a:p>
+        </p:txBody>
+      </p:sp>
+    </p:spTree>
+  </p:cSld>
+  <p:clrMapOvr>
+    <a:masterClrMapping/>
+  </p:clrMapOvr>
+</p:sld>
+</file>
+
+<file path=ppt/slides/slide9.xml><?xml version="1.0" encoding="utf-8"?>
+<p:sld xmlns:a="http://schemas.openxmlformats.org/drawingml/2006/main" xmlns:r="http://schemas.openxmlformats.org/officeDocument/2006/relationships" xmlns:p="http://schemas.openxmlformats.org/presentationml/2006/main">
+  <p:cSld>
+    <p:spTree>
+      <p:nvGrpSpPr>
+        <p:cNvPr id="1" name=""/>
+        <p:cNvGrpSpPr/>
+        <p:nvPr/>
+      </p:nvGrpSpPr>
+      <p:grpSpPr>
+        <a:xfrm>
+          <a:off x="0" y="0"/>
+          <a:ext cx="0" cy="0"/>
+          <a:chOff x="0" y="0"/>
+          <a:chExt cx="0" cy="0"/>
+        </a:xfrm>
+      </p:grpSpPr>
+      <p:sp>
+        <p:nvSpPr>
+          <p:cNvPr id="2" name="Rectangle 1"/>
+          <p:cNvSpPr/>
+          <p:nvPr/>
+        </p:nvSpPr>
+        <p:spPr>
+          <a:xfrm>
+            <a:off x="0" y="0"/>
+            <a:ext cx="12192119" cy="576000"/>
+          </a:xfrm>
+          <a:prstGeom prst="rect">
+            <a:avLst/>
+          </a:prstGeom>
+          <a:solidFill>
+            <a:srgbClr val="1F3864"/>
+          </a:solidFill>
+          <a:ln>
+            <a:noFill/>
+          </a:ln>
+        </p:spPr>
+        <p:style>
+          <a:lnRef idx="1">
+            <a:schemeClr val="accent1"/>
+          </a:lnRef>
+          <a:fillRef idx="3">
+            <a:schemeClr val="accent1"/>
+          </a:fillRef>
+          <a:effectRef idx="2">
+            <a:schemeClr val="accent1"/>
+          </a:effectRef>
+          <a:fontRef idx="minor">
+            <a:schemeClr val="lt1"/>
+          </a:fontRef>
+        </p:style>
+        <p:txBody>
+          <a:bodyPr rtlCol="0" anchor="ctr"/>
+          <a:lstStyle/>
+          <a:p>
+            <a:pPr algn="ctr"/>
+            <a:endParaRPr/>
+          </a:p>
+        </p:txBody>
+      </p:sp>
+      <p:sp>
+        <p:nvSpPr>
+          <p:cNvPr id="3" name="TextBox 2"/>
+          <p:cNvSpPr txBox="1"/>
+          <p:nvPr/>
+        </p:nvSpPr>
+        <p:spPr>
+          <a:xfrm>
+            <a:off x="180000" y="54000"/>
+            <a:ext cx="11832119" cy="468000"/>
+          </a:xfrm>
+          <a:prstGeom prst="rect">
+            <a:avLst/>
+          </a:prstGeom>
+          <a:noFill/>
+        </p:spPr>
+        <p:txBody>
+          <a:bodyPr wrap="none">
+            <a:spAutoFit/>
+          </a:bodyPr>
+          <a:lstStyle/>
+          <a:p>
+            <a:pPr algn="l"/>
+            <a:r>
+              <a:rPr sz="2400" b="1">
+                <a:solidFill>
+                  <a:srgbClr val="FFFFFF"/>
+                </a:solidFill>
+                <a:latin typeface="BIZ UDPGothic"/>
+              </a:rPr>
+              <a:t>H27「論点整理」→ R7「論点整理」の流れ</a:t>
+            </a:r>
+          </a:p>
+        </p:txBody>
+      </p:sp>
+      <p:sp>
+        <p:nvSpPr>
+          <p:cNvPr id="4" name="TextBox 3"/>
+          <p:cNvSpPr txBox="1"/>
+          <p:nvPr/>
+        </p:nvSpPr>
+        <p:spPr>
+          <a:xfrm>
+            <a:off x="288000" y="720000"/>
+            <a:ext cx="11616119" cy="5418022"/>
+          </a:xfrm>
+          <a:prstGeom prst="rect">
+            <a:avLst/>
+          </a:prstGeom>
+          <a:noFill/>
+        </p:spPr>
+        <p:txBody>
+          <a:bodyPr wrap="square">
+            <a:spAutoFit/>
+          </a:bodyPr>
+          <a:lstStyle/>
+          <a:p>
+            <a:pPr algn="l">
+              <a:lnSpc>
+                <a:spcPts val="3500"/>
+              </a:lnSpc>
+            </a:pPr>
+            <a:r>
+              <a:rPr sz="2800" b="0" dirty="0">
+                <a:solidFill>
+                  <a:srgbClr val="333333"/>
+                </a:solidFill>
+                <a:latin typeface="BIZ UDPGothic"/>
+              </a:rPr>
+              <a:t>■ ２つの「論点整理」が示す一貫したメッセージ</a:t>
+            </a:r>
+          </a:p>
+          <a:p>
+            <a:pPr algn="l">
+              <a:lnSpc>
+                <a:spcPts val="3500"/>
+              </a:lnSpc>
+            </a:pPr>
+            <a:endParaRPr sz="2800" b="0" dirty="0">
+              <a:solidFill>
+                <a:srgbClr val="333333"/>
+              </a:solidFill>
+              <a:latin typeface="BIZ UDPGothic"/>
+            </a:endParaRPr>
+          </a:p>
+          <a:p>
+            <a:pPr algn="l">
+              <a:lnSpc>
+                <a:spcPts val="3500"/>
+              </a:lnSpc>
+            </a:pPr>
+            <a:r>
+              <a:rPr sz="2800" b="0" dirty="0">
+                <a:solidFill>
+                  <a:srgbClr val="333333"/>
+                </a:solidFill>
+                <a:latin typeface="BIZ UDPGothic"/>
+              </a:rPr>
+              <a:t>　平成27年（2015）「</a:t>
+            </a:r>
+            <a:r>
+              <a:rPr sz="2800" b="0" dirty="0" err="1">
+                <a:solidFill>
+                  <a:srgbClr val="333333"/>
+                </a:solidFill>
+                <a:latin typeface="BIZ UDPGothic"/>
+              </a:rPr>
+              <a:t>論点整理</a:t>
+            </a:r>
+            <a:r>
+              <a:rPr sz="2800" b="0" dirty="0">
+                <a:solidFill>
+                  <a:srgbClr val="333333"/>
+                </a:solidFill>
+                <a:latin typeface="BIZ UDPGothic"/>
+              </a:rPr>
+              <a:t>」</a:t>
+            </a:r>
+          </a:p>
+          <a:p>
+            <a:pPr algn="l">
+              <a:lnSpc>
+                <a:spcPts val="3500"/>
+              </a:lnSpc>
+            </a:pPr>
+            <a:r>
+              <a:rPr sz="2800" b="0" dirty="0">
+                <a:solidFill>
+                  <a:srgbClr val="333333"/>
+                </a:solidFill>
+                <a:latin typeface="BIZ UDPGothic"/>
+              </a:rPr>
+              <a:t>　　↓ 学習指導要領改訂（H29）へ</a:t>
+            </a:r>
+          </a:p>
+          <a:p>
+            <a:pPr algn="l">
+              <a:lnSpc>
+                <a:spcPts val="3500"/>
+              </a:lnSpc>
+            </a:pPr>
+            <a:r>
+              <a:rPr sz="2800" b="0" dirty="0">
+                <a:solidFill>
+                  <a:srgbClr val="333333"/>
+                </a:solidFill>
+                <a:latin typeface="BIZ UDPGothic"/>
+              </a:rPr>
+              <a:t>　令和３年（2021）「</a:t>
+            </a:r>
+            <a:r>
+              <a:rPr sz="2800" b="0" dirty="0" err="1">
+                <a:solidFill>
+                  <a:srgbClr val="333333"/>
+                </a:solidFill>
+                <a:latin typeface="BIZ UDPGothic"/>
+              </a:rPr>
+              <a:t>令和の日本型学校教育」答申</a:t>
+            </a:r>
+            <a:endParaRPr sz="2800" b="0" dirty="0">
+              <a:solidFill>
+                <a:srgbClr val="333333"/>
+              </a:solidFill>
+              <a:latin typeface="BIZ UDPGothic"/>
+            </a:endParaRPr>
+          </a:p>
+          <a:p>
+            <a:pPr algn="l">
+              <a:lnSpc>
+                <a:spcPts val="3500"/>
+              </a:lnSpc>
+            </a:pPr>
+            <a:r>
+              <a:rPr sz="2800" b="0" dirty="0">
+                <a:solidFill>
+                  <a:srgbClr val="333333"/>
+                </a:solidFill>
+                <a:latin typeface="BIZ UDPGothic"/>
+              </a:rPr>
+              <a:t>　　↓ </a:t>
+            </a:r>
+            <a:r>
+              <a:rPr sz="2800" b="0" dirty="0" err="1">
+                <a:solidFill>
+                  <a:srgbClr val="333333"/>
+                </a:solidFill>
+                <a:latin typeface="BIZ UDPGothic"/>
+              </a:rPr>
+              <a:t>さらなる深化へ</a:t>
+            </a:r>
+            <a:endParaRPr sz="2800" b="0" dirty="0">
+              <a:solidFill>
+                <a:srgbClr val="333333"/>
+              </a:solidFill>
+              <a:latin typeface="BIZ UDPGothic"/>
+            </a:endParaRPr>
+          </a:p>
+          <a:p>
+            <a:pPr algn="l">
+              <a:lnSpc>
+                <a:spcPts val="3500"/>
+              </a:lnSpc>
+            </a:pPr>
+            <a:r>
+              <a:rPr sz="2800" b="0" dirty="0">
+                <a:solidFill>
+                  <a:srgbClr val="333333"/>
+                </a:solidFill>
+                <a:latin typeface="BIZ UDPGothic"/>
+              </a:rPr>
+              <a:t>　令和７年（2025）「</a:t>
+            </a:r>
+            <a:r>
+              <a:rPr sz="2800" b="0" dirty="0" err="1">
+                <a:solidFill>
+                  <a:srgbClr val="333333"/>
+                </a:solidFill>
+                <a:latin typeface="BIZ UDPGothic"/>
+              </a:rPr>
+              <a:t>論点整理</a:t>
+            </a:r>
+            <a:r>
+              <a:rPr sz="2800" b="0" dirty="0">
+                <a:solidFill>
+                  <a:srgbClr val="333333"/>
+                </a:solidFill>
+                <a:latin typeface="BIZ UDPGothic"/>
+              </a:rPr>
+              <a:t>」</a:t>
+            </a:r>
+          </a:p>
+          <a:p>
+            <a:pPr algn="l">
+              <a:lnSpc>
+                <a:spcPts val="3500"/>
+              </a:lnSpc>
+            </a:pPr>
+            <a:r>
+              <a:rPr sz="2800" b="0" dirty="0">
+                <a:solidFill>
+                  <a:srgbClr val="333333"/>
+                </a:solidFill>
+                <a:latin typeface="BIZ UDPGothic"/>
+              </a:rPr>
+              <a:t>　　↓ 次期学習指導要領改訂（R8〜9年告示予定）へ</a:t>
+            </a:r>
+          </a:p>
+          <a:p>
+            <a:pPr algn="l">
+              <a:lnSpc>
+                <a:spcPts val="3500"/>
+              </a:lnSpc>
+            </a:pPr>
+            <a:endParaRPr sz="2800" b="0" dirty="0">
+              <a:solidFill>
+                <a:srgbClr val="333333"/>
+              </a:solidFill>
+              <a:latin typeface="BIZ UDPGothic"/>
+            </a:endParaRPr>
+          </a:p>
+          <a:p>
+            <a:pPr algn="l">
+              <a:lnSpc>
+                <a:spcPts val="3500"/>
+              </a:lnSpc>
+            </a:pPr>
+            <a:r>
+              <a:rPr sz="2800" b="0" dirty="0">
+                <a:solidFill>
+                  <a:srgbClr val="333333"/>
+                </a:solidFill>
+                <a:latin typeface="BIZ UDPGothic"/>
+              </a:rPr>
+              <a:t>■ </a:t>
+            </a:r>
+            <a:r>
+              <a:rPr sz="2800" b="0" dirty="0" err="1">
+                <a:solidFill>
+                  <a:srgbClr val="333333"/>
+                </a:solidFill>
+                <a:latin typeface="BIZ UDPGothic"/>
+              </a:rPr>
+              <a:t>一貫して求められていること</a:t>
+            </a:r>
+            <a:r>
+              <a:rPr sz="2800" b="0" dirty="0">
+                <a:solidFill>
+                  <a:srgbClr val="333333"/>
+                </a:solidFill>
+                <a:latin typeface="BIZ UDPGothic"/>
+              </a:rPr>
+              <a:t>：</a:t>
+            </a:r>
+          </a:p>
+          <a:p>
+            <a:pPr algn="l">
+              <a:lnSpc>
+                <a:spcPts val="3500"/>
+              </a:lnSpc>
+            </a:pPr>
+            <a:r>
+              <a:rPr sz="2800" b="0" dirty="0">
+                <a:solidFill>
+                  <a:srgbClr val="333333"/>
+                </a:solidFill>
+                <a:latin typeface="BIZ UDPGothic"/>
+              </a:rPr>
+              <a:t>　「</a:t>
+            </a:r>
+            <a:r>
+              <a:rPr sz="2800" b="0" dirty="0" err="1">
+                <a:solidFill>
+                  <a:srgbClr val="333333"/>
+                </a:solidFill>
+                <a:latin typeface="BIZ UDPGothic"/>
+              </a:rPr>
+              <a:t>子供が自分の学びを調整できる力</a:t>
+            </a:r>
+            <a:r>
+              <a:rPr sz="2800" b="0" dirty="0">
+                <a:solidFill>
+                  <a:srgbClr val="333333"/>
+                </a:solidFill>
+                <a:latin typeface="BIZ UDPGothic"/>
+              </a:rPr>
+              <a:t>」</a:t>
+            </a:r>
+          </a:p>
+          <a:p>
+            <a:pPr algn="l">
+              <a:lnSpc>
+                <a:spcPts val="3500"/>
+              </a:lnSpc>
+            </a:pPr>
+            <a:r>
+              <a:rPr sz="2800" b="0" dirty="0">
+                <a:solidFill>
+                  <a:srgbClr val="333333"/>
+                </a:solidFill>
+                <a:latin typeface="BIZ UDPGothic"/>
+              </a:rPr>
+              <a:t>　　　　</a:t>
+            </a:r>
+            <a:r>
+              <a:rPr sz="2800" b="0" dirty="0" err="1">
+                <a:solidFill>
+                  <a:srgbClr val="333333"/>
+                </a:solidFill>
+                <a:latin typeface="BIZ UDPGothic"/>
+              </a:rPr>
+              <a:t>振り返りはその根幹</a:t>
+            </a:r>
+            <a:endParaRPr sz="2800" b="0" dirty="0">
+              <a:solidFill>
+                <a:srgbClr val="333333"/>
+              </a:solidFill>
+              <a:latin typeface="BIZ UDPGothic"/>
+            </a:endParaRPr>
+          </a:p>
+        </p:txBody>
+      </p:sp>
+      <p:sp>
+        <p:nvSpPr>
+          <p:cNvPr id="5" name="TextBox 4"/>
+          <p:cNvSpPr txBox="1"/>
+          <p:nvPr/>
+        </p:nvSpPr>
+        <p:spPr>
+          <a:xfrm>
+            <a:off x="11292119" y="6570000"/>
+            <a:ext cx="720000" cy="216000"/>
+          </a:xfrm>
+          <a:prstGeom prst="rect">
+            <a:avLst/>
+          </a:prstGeom>
+          <a:noFill/>
+        </p:spPr>
+        <p:txBody>
+          <a:bodyPr wrap="none">
+            <a:spAutoFit/>
+          </a:bodyPr>
+          <a:lstStyle/>
+          <a:p>
+            <a:pPr algn="r"/>
+            <a:r>
+              <a:rPr sz="1000">
+                <a:solidFill>
+                  <a:srgbClr val="999999"/>
+                </a:solidFill>
+                <a:latin typeface="BIZ UDPGothic"/>
+              </a:rPr>
+              <a:t>9 / 20</a:t>
             </a:r>
           </a:p>
         </p:txBody>
